--- a/docs/Smart_FMS_사용매뉴얼.pptx
+++ b/docs/Smart_FMS_사용매뉴얼.pptx
@@ -15,6 +15,8 @@
     <p:sldId id="263" r:id="rId14"/>
     <p:sldId id="264" r:id="rId15"/>
     <p:sldId id="265" r:id="rId16"/>
+    <p:sldId id="266" r:id="rId17"/>
+    <p:sldId id="267" r:id="rId18"/>
   </p:sldIdLst>
   <p:sldSz cx="12191695" cy="6858000" type="screen4x3"/>
   <p:notesSz cx="6858000" cy="9144000"/>
@@ -3170,7 +3172,7 @@
                 </a:solidFill>
                 <a:latin typeface="맑은 고딕"/>
               </a:rPr>
-              <a:t>Smart FMS  사용자 매뉴얼</a:t>
+              <a:t>시설관리실 DX 시스템  사용자 매뉴얼</a:t>
             </a:r>
           </a:p>
         </p:txBody>
@@ -3215,7 +3217,7 @@
                 </a:solidFill>
                 <a:latin typeface="맑은 고딕"/>
               </a:rPr>
-              <a:t>POSCO WIDE 스마트 시설관리 플랫폼 (Facility Management System)</a:t>
+              <a:t>POSCO WIDE 광양운영그룹 스마트 시설관리 플랫폼 (Smart FMS)</a:t>
             </a:r>
           </a:p>
           <a:p>
@@ -3237,7 +3239,7 @@
                 </a:solidFill>
                 <a:latin typeface="맑은 고딕"/>
               </a:rPr>
-              <a:t>예방점검(PM) · 정비(CMMS) · 점검일지(엑셀·웹) · QR 현장운영 · AI 분석 · 위험성평가</a:t>
+              <a:t>대시보드 · 사업장/설비 · 점검(PM) · 점검일지(17개 건물 웹 운영일보) · 정비관리(접수→D-1→작업허가→최종승인)</a:t>
             </a:r>
           </a:p>
           <a:p>
@@ -3259,7 +3261,7 @@
                 </a:solidFill>
                 <a:latin typeface="맑은 고딕"/>
               </a:rPr>
-              <a:t>배포: Render(main 자동) · DB: PostgreSQL/SQLite · PC 브라우저 + 모바일 QR</a:t>
+              <a:t>자재 · 협력사 · 위험성평가(AI) · 자료실 · AI 분석(GPT 대화) · 계정/서버관리</a:t>
             </a:r>
           </a:p>
           <a:p>
@@ -3281,7 +3283,29 @@
                 </a:solidFill>
                 <a:latin typeface="맑은 고딕"/>
               </a:rPr>
-              <a:t>POSCO WIDE Smart FMS  ·  2026.09</a:t>
+              <a:t>배포: Render(main 자동) · DB: PostgreSQL · PC 브라우저 + 모바일 QR(로그인 필요)</a:t>
+            </a:r>
+          </a:p>
+          <a:p>
+            <a:pPr algn="ctr">
+              <a:lnSpc>
+                <a:spcPct val="100000"/>
+              </a:lnSpc>
+              <a:spcBef>
+                <a:spcPts val="0"/>
+              </a:spcBef>
+              <a:spcAft>
+                <a:spcPts val="300"/>
+              </a:spcAft>
+            </a:pPr>
+            <a:r>
+              <a:rPr sz="1100" b="0">
+                <a:solidFill>
+                  <a:srgbClr val="555555"/>
+                </a:solidFill>
+                <a:latin typeface="맑은 고딕"/>
+              </a:rPr>
+              <a:t>POSCO WIDE  ·  2026.10 개정</a:t>
             </a:r>
           </a:p>
         </p:txBody>
@@ -3377,7 +3401,7 @@
                 </a:solidFill>
                 <a:latin typeface="맑은 고딕"/>
               </a:rPr>
-              <a:t>09  서버관리 · 계정 · QR URL 부록</a:t>
+              <a:t>09  자재 · 협력사 · 위험성평가 · 자료실</a:t>
             </a:r>
           </a:p>
         </p:txBody>
@@ -3422,161 +3446,29 @@
                 </a:solidFill>
                 <a:latin typeface="맑은 고딕"/>
               </a:rPr>
-              <a:t>【서버관리 /admin/server — system_admin】</a:t>
-            </a:r>
-          </a:p>
-          <a:p>
-            <a:pPr algn="l">
-              <a:lnSpc>
-                <a:spcPct val="100000"/>
-              </a:lnSpc>
-              <a:spcBef>
-                <a:spcPts val="0"/>
-              </a:spcBef>
-              <a:spcAft>
-                <a:spcPts val="100"/>
-              </a:spcAft>
-            </a:pPr>
-            <a:r>
-              <a:rPr sz="850" b="0">
-                <a:solidFill>
-                  <a:srgbClr val="222222"/>
-                </a:solidFill>
-                <a:latin typeface="맑은 고딕"/>
-              </a:rPr>
-              <a:t>상태 30초 갱신: Render·DB·디스크·메모리·CPU</a:t>
-            </a:r>
-          </a:p>
-          <a:p>
-            <a:pPr algn="l">
-              <a:lnSpc>
-                <a:spcPct val="100000"/>
-              </a:lnSpc>
-              <a:spcBef>
-                <a:spcPts val="0"/>
-              </a:spcBef>
-              <a:spcAft>
-                <a:spcPts val="100"/>
-              </a:spcAft>
-            </a:pPr>
-            <a:r>
-              <a:rPr sz="850" b="0">
-                <a:solidFill>
-                  <a:srgbClr val="222222"/>
-                </a:solidFill>
-                <a:latin typeface="맑은 고딕"/>
-              </a:rPr>
-              <a:t>GET /admin/server/status (JSON 폴링)</a:t>
-            </a:r>
-          </a:p>
-          <a:p>
-            <a:pPr algn="l">
-              <a:lnSpc>
-                <a:spcPct val="100000"/>
-              </a:lnSpc>
-              <a:spcBef>
-                <a:spcPts val="0"/>
-              </a:spcBef>
-              <a:spcAft>
-                <a:spcPts val="100"/>
-              </a:spcAft>
-            </a:pPr>
-            <a:r>
-              <a:rPr sz="850" b="0">
-                <a:solidFill>
-                  <a:srgbClr val="222222"/>
-                </a:solidFill>
-                <a:latin typeface="맑은 고딕"/>
-              </a:rPr>
-              <a:t>백업 ZIP /admin/server/backup.zip</a:t>
-            </a:r>
-          </a:p>
-          <a:p>
-            <a:pPr algn="l">
-              <a:lnSpc>
-                <a:spcPct val="100000"/>
-              </a:lnSpc>
-              <a:spcBef>
-                <a:spcPts val="0"/>
-              </a:spcBef>
-              <a:spcAft>
-                <a:spcPts val="100"/>
-              </a:spcAft>
-            </a:pPr>
-            <a:r>
-              <a:rPr sz="850" b="0">
-                <a:solidFill>
-                  <a:srgbClr val="222222"/>
-                </a:solidFill>
-                <a:latin typeface="맑은 고딕"/>
-              </a:rPr>
-              <a:t>files/: 일지·도면·표준서·업로드</a:t>
-            </a:r>
-          </a:p>
-          <a:p>
-            <a:pPr algn="l">
-              <a:lnSpc>
-                <a:spcPct val="100000"/>
-              </a:lnSpc>
-              <a:spcBef>
-                <a:spcPts val="0"/>
-              </a:spcBef>
-              <a:spcAft>
-                <a:spcPts val="100"/>
-              </a:spcAft>
-            </a:pPr>
-            <a:r>
-              <a:rPr sz="850" b="0">
-                <a:solidFill>
-                  <a:srgbClr val="222222"/>
-                </a:solidFill>
-                <a:latin typeface="맑은 고딕"/>
-              </a:rPr>
-              <a:t>excel/: 업무데이터·설비현황·설비상세 + README.txt</a:t>
-            </a:r>
-          </a:p>
-          <a:p>
-            <a:pPr algn="l">
-              <a:lnSpc>
-                <a:spcPct val="100000"/>
-              </a:lnSpc>
-              <a:spcBef>
-                <a:spcPts val="0"/>
-              </a:spcBef>
-              <a:spcAft>
-                <a:spcPts val="100"/>
-              </a:spcAft>
-            </a:pPr>
-            <a:r>
-              <a:rPr sz="850" b="0">
-                <a:solidFill>
-                  <a:srgbClr val="222222"/>
-                </a:solidFill>
-                <a:latin typeface="맑은 고딕"/>
-              </a:rPr>
-              <a:t>매뉴얼 /admin/server/manual.pptx</a:t>
-            </a:r>
-          </a:p>
-          <a:p>
-            <a:pPr algn="l">
-              <a:lnSpc>
-                <a:spcPct val="100000"/>
-              </a:lnSpc>
-              <a:spcBef>
-                <a:spcPts val="0"/>
-              </a:spcBef>
-              <a:spcAft>
-                <a:spcPts val="100"/>
-              </a:spcAft>
-            </a:pPr>
-            <a:r>
-              <a:rPr sz="850" b="0">
-                <a:solidFill>
-                  <a:srgbClr val="222222"/>
-                </a:solidFill>
-                <a:latin typeface="맑은 고딕"/>
-              </a:rPr>
-              <a:t>발표자료 /admin/server/presentation.pptx</a:t>
+              <a:t>【자재관리 /admin/materials】 (팝업 대신 본 화면, 모니터 한 화면 레이아웃)</a:t>
+            </a:r>
+          </a:p>
+          <a:p>
+            <a:pPr algn="l">
+              <a:lnSpc>
+                <a:spcPct val="100000"/>
+              </a:lnSpc>
+              <a:spcBef>
+                <a:spcPts val="0"/>
+              </a:spcBef>
+              <a:spcAft>
+                <a:spcPts val="100"/>
+              </a:spcAft>
+            </a:pPr>
+            <a:r>
+              <a:rPr sz="850" b="0">
+                <a:solidFill>
+                  <a:srgbClr val="222222"/>
+                </a:solidFill>
+                <a:latin typeface="맑은 고딕"/>
+              </a:rPr>
+              <a:t>품목 · 입고 · 출고 · 그룹 · 재고 로그 · Import/Export</a:t>
             </a:r>
           </a:p>
           <a:p>
@@ -3598,29 +3490,117 @@
                 </a:solidFill>
                 <a:latin typeface="맑은 고딕"/>
               </a:rPr>
-              <a:t>【계정 /admin/users】</a:t>
-            </a:r>
-          </a:p>
-          <a:p>
-            <a:pPr algn="l">
-              <a:lnSpc>
-                <a:spcPct val="100000"/>
-              </a:lnSpc>
-              <a:spcBef>
-                <a:spcPts val="0"/>
-              </a:spcBef>
-              <a:spcAft>
-                <a:spcPts val="100"/>
-              </a:spcAft>
-            </a:pPr>
-            <a:r>
-              <a:rPr sz="850" b="0">
-                <a:solidFill>
-                  <a:srgbClr val="222222"/>
-                </a:solidFill>
-                <a:latin typeface="맑은 고딕"/>
-              </a:rPr>
-              <a:t>가입승인 · 역할 · CRUD · menu_access · partner 연결</a:t>
+              <a:t>【협력사 /admin/partners】</a:t>
+            </a:r>
+          </a:p>
+          <a:p>
+            <a:pPr algn="l">
+              <a:lnSpc>
+                <a:spcPct val="100000"/>
+              </a:lnSpc>
+              <a:spcBef>
+                <a:spcPts val="0"/>
+              </a:spcBef>
+              <a:spcAft>
+                <a:spcPts val="100"/>
+              </a:spcAft>
+            </a:pPr>
+            <a:r>
+              <a:rPr sz="850" b="0">
+                <a:solidFill>
+                  <a:srgbClr val="222222"/>
+                </a:solidFill>
+                <a:latin typeface="맑은 고딕"/>
+              </a:rPr>
+              <a:t>코드 · 담당자 · 계약종료 · 정비접수·D-1·작업허가 필터 기준</a:t>
+            </a:r>
+          </a:p>
+          <a:p>
+            <a:pPr algn="l">
+              <a:lnSpc>
+                <a:spcPct val="100000"/>
+              </a:lnSpc>
+              <a:spcBef>
+                <a:spcPts val="0"/>
+              </a:spcBef>
+              <a:spcAft>
+                <a:spcPts val="100"/>
+              </a:spcAft>
+            </a:pPr>
+            <a:r>
+              <a:rPr sz="850" b="0">
+                <a:solidFill>
+                  <a:srgbClr val="222222"/>
+                </a:solidFill>
+                <a:latin typeface="맑은 고딕"/>
+              </a:rPr>
+              <a:t>협력사/외부업체 계정은 협력사와 연결 → 지정된 건만 처리</a:t>
+            </a:r>
+          </a:p>
+          <a:p>
+            <a:pPr algn="l">
+              <a:lnSpc>
+                <a:spcPct val="100000"/>
+              </a:lnSpc>
+              <a:spcBef>
+                <a:spcPts val="0"/>
+              </a:spcBef>
+              <a:spcAft>
+                <a:spcPts val="100"/>
+              </a:spcAft>
+            </a:pPr>
+            <a:r>
+              <a:rPr sz="950" b="1">
+                <a:solidFill>
+                  <a:srgbClr val="003D7A"/>
+                </a:solidFill>
+                <a:latin typeface="맑은 고딕"/>
+              </a:rPr>
+              <a:t>【자료실 /admin/library】 (윈도우 탐색기형)</a:t>
+            </a:r>
+          </a:p>
+          <a:p>
+            <a:pPr algn="l">
+              <a:lnSpc>
+                <a:spcPct val="100000"/>
+              </a:lnSpc>
+              <a:spcBef>
+                <a:spcPts val="0"/>
+              </a:spcBef>
+              <a:spcAft>
+                <a:spcPts val="100"/>
+              </a:spcAft>
+            </a:pPr>
+            <a:r>
+              <a:rPr sz="850" b="0">
+                <a:solidFill>
+                  <a:srgbClr val="222222"/>
+                </a:solidFill>
+                <a:latin typeface="맑은 고딕"/>
+              </a:rPr>
+              <a:t>도면·매뉴얼 등 공용 자료 · 폴더 만들기(상단) · 폴더·파일 한 줄씩 표시</a:t>
+            </a:r>
+          </a:p>
+          <a:p>
+            <a:pPr algn="l">
+              <a:lnSpc>
+                <a:spcPct val="100000"/>
+              </a:lnSpc>
+              <a:spcBef>
+                <a:spcPts val="0"/>
+              </a:spcBef>
+              <a:spcAft>
+                <a:spcPts val="100"/>
+              </a:spcAft>
+            </a:pPr>
+            <a:r>
+              <a:rPr sz="850" b="0">
+                <a:solidFill>
+                  <a:srgbClr val="222222"/>
+                </a:solidFill>
+                <a:latin typeface="맑은 고딕"/>
+              </a:rPr>
+              <a:t>하위메뉴 관리: 우측 상단 설정 버튼(팝업)</a:t>
             </a:r>
           </a:p>
         </p:txBody>
@@ -3665,183 +3645,139 @@
                 </a:solidFill>
                 <a:latin typeface="맑은 고딕"/>
               </a:rPr>
-              <a:t>【QR·URL 부록 — {BASE}=PUBLIC_BASE_URL】</a:t>
-            </a:r>
-          </a:p>
-          <a:p>
-            <a:pPr algn="l">
-              <a:lnSpc>
-                <a:spcPct val="100000"/>
-              </a:lnSpc>
-              <a:spcBef>
-                <a:spcPts val="0"/>
-              </a:spcBef>
-              <a:spcAft>
-                <a:spcPts val="100"/>
-              </a:spcAft>
-            </a:pPr>
-            <a:r>
-              <a:rPr sz="850" b="0">
-                <a:solidFill>
-                  <a:srgbClr val="222222"/>
-                </a:solidFill>
-                <a:latin typeface="맑은 고딕"/>
-              </a:rPr>
-              <a:t>설비 {BASE}/eq/{code} · 일지 .../eq/{code}/log</a:t>
-            </a:r>
-          </a:p>
-          <a:p>
-            <a:pPr algn="l">
-              <a:lnSpc>
-                <a:spcPct val="100000"/>
-              </a:lnSpc>
-              <a:spcBef>
-                <a:spcPts val="0"/>
-              </a:spcBef>
-              <a:spcAft>
-                <a:spcPts val="100"/>
-              </a:spcAft>
-            </a:pPr>
-            <a:r>
-              <a:rPr sz="850" b="0">
-                <a:solidFill>
-                  <a:srgbClr val="222222"/>
-                </a:solidFill>
-                <a:latin typeface="맑은 고딕"/>
-              </a:rPr>
-              <a:t>주택 {BASE}/hs/{code}/daily</a:t>
-            </a:r>
-          </a:p>
-          <a:p>
-            <a:pPr algn="l">
-              <a:lnSpc>
-                <a:spcPct val="100000"/>
-              </a:lnSpc>
-              <a:spcBef>
-                <a:spcPts val="0"/>
-              </a:spcBef>
-              <a:spcAft>
-                <a:spcPts val="100"/>
-              </a:spcAft>
-            </a:pPr>
-            <a:r>
-              <a:rPr sz="850" b="0">
-                <a:solidFill>
-                  <a:srgbClr val="222222"/>
-                </a:solidFill>
-                <a:latin typeface="맑은 고딕"/>
-              </a:rPr>
-              <a:t>CCR {BASE}/ccr/{code}/daily</a:t>
-            </a:r>
-          </a:p>
-          <a:p>
-            <a:pPr algn="l">
-              <a:lnSpc>
-                <a:spcPct val="100000"/>
-              </a:lnSpc>
-              <a:spcBef>
-                <a:spcPts val="0"/>
-              </a:spcBef>
-              <a:spcAft>
-                <a:spcPts val="100"/>
-              </a:spcAft>
-            </a:pPr>
-            <a:r>
-              <a:rPr sz="850" b="0">
-                <a:solidFill>
-                  <a:srgbClr val="222222"/>
-                </a:solidFill>
-                <a:latin typeface="맑은 고딕"/>
-              </a:rPr>
-              <a:t>CCR설비 {BASE}/ccrf/{code}/daily</a:t>
-            </a:r>
-          </a:p>
-          <a:p>
-            <a:pPr algn="l">
-              <a:lnSpc>
-                <a:spcPct val="100000"/>
-              </a:lnSpc>
-              <a:spcBef>
-                <a:spcPts val="0"/>
-              </a:spcBef>
-              <a:spcAft>
-                <a:spcPts val="100"/>
-              </a:spcAft>
-            </a:pPr>
-            <a:r>
-              <a:rPr sz="850" b="0">
-                <a:solidFill>
-                  <a:srgbClr val="222222"/>
-                </a:solidFill>
-                <a:latin typeface="맑은 고딕"/>
-              </a:rPr>
-              <a:t>제철소 {BASE}/swhq/{code}/daily</a:t>
-            </a:r>
-          </a:p>
-          <a:p>
-            <a:pPr algn="l">
-              <a:lnSpc>
-                <a:spcPct val="100000"/>
-              </a:lnSpc>
-              <a:spcBef>
-                <a:spcPts val="0"/>
-              </a:spcBef>
-              <a:spcAft>
-                <a:spcPts val="100"/>
-              </a:spcAft>
-            </a:pPr>
-            <a:r>
-              <a:rPr sz="850" b="0">
-                <a:solidFill>
-                  <a:srgbClr val="222222"/>
-                </a:solidFill>
-                <a:latin typeface="맑은 고딕"/>
-              </a:rPr>
-              <a:t>가로등 {BASE}/lamp/{code}</a:t>
-            </a:r>
-          </a:p>
-          <a:p>
-            <a:pPr algn="l">
-              <a:lnSpc>
-                <a:spcPct val="100000"/>
-              </a:lnSpc>
-              <a:spcBef>
-                <a:spcPts val="0"/>
-              </a:spcBef>
-              <a:spcAft>
-                <a:spcPts val="100"/>
-              </a:spcAft>
-            </a:pPr>
-            <a:r>
-              <a:rPr sz="950" b="1">
-                <a:solidFill>
-                  <a:srgbClr val="003D7A"/>
-                </a:solidFill>
-                <a:latin typeface="맑은 고딕"/>
-              </a:rPr>
-              <a:t>【다운로드】 서버관리 → 사용 매뉴얼 PPT 받기</a:t>
-            </a:r>
-          </a:p>
-          <a:p>
-            <a:pPr algn="l">
-              <a:lnSpc>
-                <a:spcPct val="100000"/>
-              </a:lnSpc>
-              <a:spcBef>
-                <a:spcPts val="0"/>
-              </a:spcBef>
-              <a:spcAft>
-                <a:spcPts val="100"/>
-              </a:spcAft>
-            </a:pPr>
-            <a:r>
-              <a:rPr sz="850" b="0">
-                <a:solidFill>
-                  <a:srgbClr val="222222"/>
-                </a:solidFill>
-                <a:latin typeface="맑은 고딕"/>
-              </a:rPr>
-              <a:t>문의: 시스템관리자 · POSCO WIDE Smart FMS</a:t>
+              <a:t>【위험성평가 /admin/risk-assessment】</a:t>
+            </a:r>
+          </a:p>
+          <a:p>
+            <a:pPr algn="l">
+              <a:lnSpc>
+                <a:spcPct val="100000"/>
+              </a:lnSpc>
+              <a:spcBef>
+                <a:spcPts val="0"/>
+              </a:spcBef>
+              <a:spcAft>
+                <a:spcPts val="100"/>
+              </a:spcAft>
+            </a:pPr>
+            <a:r>
+              <a:rPr sz="850" b="0">
+                <a:solidFill>
+                  <a:srgbClr val="222222"/>
+                </a:solidFill>
+                <a:latin typeface="맑은 고딕"/>
+              </a:rPr>
+              <a:t>입력 단계: 작업선택 → 평가정보 → 5M1E(인·기계·재료·방법·환경·관리)</a:t>
+            </a:r>
+          </a:p>
+          <a:p>
+            <a:pPr algn="l">
+              <a:lnSpc>
+                <a:spcPct val="100000"/>
+              </a:lnSpc>
+              <a:spcBef>
+                <a:spcPts val="0"/>
+              </a:spcBef>
+              <a:spcAft>
+                <a:spcPts val="100"/>
+              </a:spcAft>
+            </a:pPr>
+            <a:r>
+              <a:rPr sz="850" b="0">
+                <a:solidFill>
+                  <a:srgbClr val="222222"/>
+                </a:solidFill>
+                <a:latin typeface="맑은 고딕"/>
+              </a:rPr>
+              <a:t>AI 모드: 작업명만 입력해도 AI 작업분석으로 공종·작업방법·순서·안전조치를 5M1E에 자동 채움(수정 가능)</a:t>
+            </a:r>
+          </a:p>
+          <a:p>
+            <a:pPr algn="l">
+              <a:lnSpc>
+                <a:spcPct val="100000"/>
+              </a:lnSpc>
+              <a:spcBef>
+                <a:spcPts val="0"/>
+              </a:spcBef>
+              <a:spcAft>
+                <a:spcPts val="100"/>
+              </a:spcAft>
+            </a:pPr>
+            <a:r>
+              <a:rPr sz="850" b="0">
+                <a:solidFill>
+                  <a:srgbClr val="222222"/>
+                </a:solidFill>
+                <a:latin typeface="맑은 고딕"/>
+              </a:rPr>
+              <a:t>AI 평가는 백그라운드 처리 + 진행 확인(긴 응답에도 화면 멈춤 없음)</a:t>
+            </a:r>
+          </a:p>
+          <a:p>
+            <a:pPr algn="l">
+              <a:lnSpc>
+                <a:spcPct val="100000"/>
+              </a:lnSpc>
+              <a:spcBef>
+                <a:spcPts val="0"/>
+              </a:spcBef>
+              <a:spcAft>
+                <a:spcPts val="100"/>
+              </a:spcAft>
+            </a:pPr>
+            <a:r>
+              <a:rPr sz="850" b="0">
+                <a:solidFill>
+                  <a:srgbClr val="222222"/>
+                </a:solidFill>
+                <a:latin typeface="맑은 고딕"/>
+              </a:rPr>
+              <a:t>키 설정·문서학습은 대화상자 · 학습 결과(소분류)는 DB 영구 저장(재배포 후 유지)</a:t>
+            </a:r>
+          </a:p>
+          <a:p>
+            <a:pPr algn="l">
+              <a:lnSpc>
+                <a:spcPct val="100000"/>
+              </a:lnSpc>
+              <a:spcBef>
+                <a:spcPts val="0"/>
+              </a:spcBef>
+              <a:spcAft>
+                <a:spcPts val="100"/>
+              </a:spcAft>
+            </a:pPr>
+            <a:r>
+              <a:rPr sz="850" b="0">
+                <a:solidFill>
+                  <a:srgbClr val="222222"/>
+                </a:solidFill>
+                <a:latin typeface="맑은 고딕"/>
+              </a:rPr>
+              <a:t>결과: 등급 색상 · 요약 KPI · HTML/Excel Export</a:t>
+            </a:r>
+          </a:p>
+          <a:p>
+            <a:pPr algn="l">
+              <a:lnSpc>
+                <a:spcPct val="100000"/>
+              </a:lnSpc>
+              <a:spcBef>
+                <a:spcPts val="0"/>
+              </a:spcBef>
+              <a:spcAft>
+                <a:spcPts val="100"/>
+              </a:spcAft>
+            </a:pPr>
+            <a:r>
+              <a:rPr sz="850" b="0">
+                <a:solidFill>
+                  <a:srgbClr val="222222"/>
+                </a:solidFill>
+                <a:latin typeface="맑은 고딕"/>
+              </a:rPr>
+              <a:t>OpenAI API 키는 내 계정·AI 분석과 공유</a:t>
             </a:r>
           </a:p>
         </p:txBody>
@@ -3876,7 +3812,7 @@
                 </a:solidFill>
                 <a:latin typeface="맑은 고딕"/>
               </a:rPr>
-              <a:t>10 / 10</a:t>
+              <a:t>10 / 12</a:t>
             </a:r>
           </a:p>
         </p:txBody>
@@ -3889,7 +3825,7 @@
 </p:sld>
 </file>
 
-<file path=ppt/slides/slide2.xml><?xml version="1.0" encoding="utf-8"?>
+<file path=ppt/slides/slide11.xml><?xml version="1.0" encoding="utf-8"?>
 <p:sld xmlns:a="http://schemas.openxmlformats.org/drawingml/2006/main" xmlns:p="http://schemas.openxmlformats.org/presentationml/2006/main" xmlns:r="http://schemas.openxmlformats.org/officeDocument/2006/relationships">
   <p:cSld>
     <p:spTree>
@@ -3972,7 +3908,7 @@
                 </a:solidFill>
                 <a:latin typeface="맑은 고딕"/>
               </a:rPr>
-              <a:t>01  시스템 개요 · 접속 · 역할 · 메뉴</a:t>
+              <a:t>10  AI 분석 · GPT 대화</a:t>
             </a:r>
           </a:p>
         </p:txBody>
@@ -4017,7 +3953,73 @@
                 </a:solidFill>
                 <a:latin typeface="맑은 고딕"/>
               </a:rPr>
-              <a:t>【시스템】 사업장·건물·설비 기준정보, PM, 점검일지1(엑셀)·2(웹), 정비의뢰→D-1→작업허가, 자재·협력사, 위험성평가, AI, 가로등 QR</a:t>
+              <a:t>【AI 분석 /admin/ai-analysis】 채팅형 화면 — 왼쪽 대화 목록 · 오른쪽 대화</a:t>
+            </a:r>
+          </a:p>
+          <a:p>
+            <a:pPr algn="l">
+              <a:lnSpc>
+                <a:spcPct val="100000"/>
+              </a:lnSpc>
+              <a:spcBef>
+                <a:spcPts val="0"/>
+              </a:spcBef>
+              <a:spcAft>
+                <a:spcPts val="100"/>
+              </a:spcAft>
+            </a:pPr>
+            <a:r>
+              <a:rPr sz="850" b="0">
+                <a:solidFill>
+                  <a:srgbClr val="222222"/>
+                </a:solidFill>
+                <a:latin typeface="맑은 고딕"/>
+              </a:rPr>
+              <a:t>GPT 대화 전용(일반질문 집계 모드 삭제) · 대화 계정별 저장 · 다시보기 · 이어서 대화</a:t>
+            </a:r>
+          </a:p>
+          <a:p>
+            <a:pPr algn="l">
+              <a:lnSpc>
+                <a:spcPct val="100000"/>
+              </a:lnSpc>
+              <a:spcBef>
+                <a:spcPts val="0"/>
+              </a:spcBef>
+              <a:spcAft>
+                <a:spcPts val="100"/>
+              </a:spcAft>
+            </a:pPr>
+            <a:r>
+              <a:rPr sz="850" b="0">
+                <a:solidFill>
+                  <a:srgbClr val="222222"/>
+                </a:solidFill>
+                <a:latin typeface="맑은 고딕"/>
+              </a:rPr>
+              <a:t>모델 선택: 최신 GPT-6 포함(추론 모델 호환) · 기본 gpt-4o-mini</a:t>
+            </a:r>
+          </a:p>
+          <a:p>
+            <a:pPr algn="l">
+              <a:lnSpc>
+                <a:spcPct val="100000"/>
+              </a:lnSpc>
+              <a:spcBef>
+                <a:spcPts val="0"/>
+              </a:spcBef>
+              <a:spcAft>
+                <a:spcPts val="100"/>
+              </a:spcAft>
+            </a:pPr>
+            <a:r>
+              <a:rPr sz="850" b="0">
+                <a:solidFill>
+                  <a:srgbClr val="222222"/>
+                </a:solidFill>
+                <a:latin typeface="맑은 고딕"/>
+              </a:rPr>
+              <a:t>답변 중 '데이터 분석 중' 회전 표시</a:t>
             </a:r>
           </a:p>
           <a:p>
@@ -4039,139 +4041,73 @@
                 </a:solidFill>
                 <a:latin typeface="맑은 고딕"/>
               </a:rPr>
-              <a:t>【접속】 로그인 /admin/login · 가입 /admin/signup(관리자 승인) · 내 계정 /admin/account(항상 접근, API키·비번)</a:t>
-            </a:r>
-          </a:p>
-          <a:p>
-            <a:pPr algn="l">
-              <a:lnSpc>
-                <a:spcPct val="100000"/>
-              </a:lnSpc>
-              <a:spcBef>
-                <a:spcPts val="0"/>
-              </a:spcBef>
-              <a:spcAft>
-                <a:spcPts val="100"/>
-              </a:spcAft>
-            </a:pPr>
-            <a:r>
-              <a:rPr sz="950" b="1">
-                <a:solidFill>
-                  <a:srgbClr val="003D7A"/>
-                </a:solidFill>
-                <a:latin typeface="맑은 고딕"/>
-              </a:rPr>
-              <a:t>【초기관리자】 환경변수 ADMIN_ID/ADMIN_PW (배포 시 반드시 변경)</a:t>
-            </a:r>
-          </a:p>
-          <a:p>
-            <a:pPr algn="l">
-              <a:lnSpc>
-                <a:spcPct val="100000"/>
-              </a:lnSpc>
-              <a:spcBef>
-                <a:spcPts val="0"/>
-              </a:spcBef>
-              <a:spcAft>
-                <a:spcPts val="100"/>
-              </a:spcAft>
-            </a:pPr>
-            <a:r>
-              <a:rPr sz="950" b="1">
-                <a:solidFill>
-                  <a:srgbClr val="003D7A"/>
-                </a:solidFill>
-                <a:latin typeface="맑은 고딕"/>
-              </a:rPr>
-              <a:t>【역할】 시스템관리자·사업장관리자·그룹장·파트장·시설담당자·협력사·외부업체·조회전용</a:t>
-            </a:r>
-          </a:p>
-          <a:p>
-            <a:pPr algn="l">
-              <a:lnSpc>
-                <a:spcPct val="100000"/>
-              </a:lnSpc>
-              <a:spcBef>
-                <a:spcPts val="0"/>
-              </a:spcBef>
-              <a:spcAft>
-                <a:spcPts val="100"/>
-              </a:spcAft>
-            </a:pPr>
-            <a:r>
-              <a:rPr sz="950" b="1">
-                <a:solidFill>
-                  <a:srgbClr val="003D7A"/>
-                </a:solidFill>
-                <a:latin typeface="맑은 고딕"/>
-              </a:rPr>
-              <a:t>【CRUD】 can_create/edit/delete — 역할 기본값 + 계정별 조정</a:t>
-            </a:r>
-          </a:p>
-          <a:p>
-            <a:pPr algn="l">
-              <a:lnSpc>
-                <a:spcPct val="100000"/>
-              </a:lnSpc>
-              <a:spcBef>
-                <a:spcPts val="0"/>
-              </a:spcBef>
-              <a:spcAft>
-                <a:spcPts val="100"/>
-              </a:spcAft>
-            </a:pPr>
-            <a:r>
-              <a:rPr sz="950" b="1">
-                <a:solidFill>
-                  <a:srgbClr val="003D7A"/>
-                </a:solidFill>
-                <a:latin typeface="맑은 고딕"/>
-              </a:rPr>
-              <a:t>【전용메뉴】 서버관리·계정관리 = system_admin만</a:t>
-            </a:r>
-          </a:p>
-          <a:p>
-            <a:pPr algn="l">
-              <a:lnSpc>
-                <a:spcPct val="100000"/>
-              </a:lnSpc>
-              <a:spcBef>
-                <a:spcPts val="0"/>
-              </a:spcBef>
-              <a:spcAft>
-                <a:spcPts val="100"/>
-              </a:spcAft>
-            </a:pPr>
-            <a:r>
-              <a:rPr sz="950" b="1">
-                <a:solidFill>
-                  <a:srgbClr val="003D7A"/>
-                </a:solidFill>
-                <a:latin typeface="맑은 고딕"/>
-              </a:rPr>
-              <a:t>【협력사/외부】 설비·PM·점검일지·점검일지2·시설섹션·가로등 기본 차단, 수정(E)만</a:t>
-            </a:r>
-          </a:p>
-          <a:p>
-            <a:pPr algn="l">
-              <a:lnSpc>
-                <a:spcPct val="100000"/>
-              </a:lnSpc>
-              <a:spcBef>
-                <a:spcPts val="0"/>
-              </a:spcBef>
-              <a:spcAft>
-                <a:spcPts val="100"/>
-              </a:spcAft>
-            </a:pPr>
-            <a:r>
-              <a:rPr sz="950" b="1">
-                <a:solidFill>
-                  <a:srgbClr val="003D7A"/>
-                </a:solidFill>
-                <a:latin typeface="맑은 고딕"/>
-              </a:rPr>
-              <a:t>【조회전용】 읽기만, C/E/D 불가</a:t>
+              <a:t>【데이터 범위】</a:t>
+            </a:r>
+          </a:p>
+          <a:p>
+            <a:pPr algn="l">
+              <a:lnSpc>
+                <a:spcPct val="100000"/>
+              </a:lnSpc>
+              <a:spcBef>
+                <a:spcPts val="0"/>
+              </a:spcBef>
+              <a:spcAft>
+                <a:spcPts val="100"/>
+              </a:spcAft>
+            </a:pPr>
+            <a:r>
+              <a:rPr sz="850" b="0">
+                <a:solidFill>
+                  <a:srgbClr val="222222"/>
+                </a:solidFill>
+                <a:latin typeface="맑은 고딕"/>
+              </a:rPr>
+              <a:t>7개 메뉴 DB 원본을 질문 기준으로 추출(사업장·설비·정비·PM·점검일지·자재·가로등 등)</a:t>
+            </a:r>
+          </a:p>
+          <a:p>
+            <a:pPr algn="l">
+              <a:lnSpc>
+                <a:spcPct val="100000"/>
+              </a:lnSpc>
+              <a:spcBef>
+                <a:spcPts val="0"/>
+              </a:spcBef>
+              <a:spcAft>
+                <a:spcPts val="100"/>
+              </a:spcAft>
+            </a:pPr>
+            <a:r>
+              <a:rPr sz="850" b="0">
+                <a:solidFill>
+                  <a:srgbClr val="222222"/>
+                </a:solidFill>
+                <a:latin typeface="맑은 고딕"/>
+              </a:rPr>
+              <a:t>일지·정비·점검 본문(특이사항 등) · 점검일지 월보 계산 결과(중앙관제실·주택변전소 등)</a:t>
+            </a:r>
+          </a:p>
+          <a:p>
+            <a:pPr algn="l">
+              <a:lnSpc>
+                <a:spcPct val="100000"/>
+              </a:lnSpc>
+              <a:spcBef>
+                <a:spcPts val="0"/>
+              </a:spcBef>
+              <a:spcAft>
+                <a:spcPts val="100"/>
+              </a:spcAft>
+            </a:pPr>
+            <a:r>
+              <a:rPr sz="850" b="0">
+                <a:solidFill>
+                  <a:srgbClr val="222222"/>
+                </a:solidFill>
+                <a:latin typeface="맑은 고딕"/>
+              </a:rPr>
+              <a:t>후속 질문은 이번 질문을 우선해 조회 범위 해석</a:t>
             </a:r>
           </a:p>
         </p:txBody>
@@ -4216,425 +4152,205 @@
                 </a:solidFill>
                 <a:latin typeface="맑은 고딕"/>
               </a:rPr>
-              <a:t>【메뉴 — PC 사이드바】</a:t>
-            </a:r>
-          </a:p>
-          <a:p>
-            <a:pPr algn="l">
-              <a:lnSpc>
-                <a:spcPct val="100000"/>
-              </a:lnSpc>
-              <a:spcBef>
-                <a:spcPts val="0"/>
-              </a:spcBef>
-              <a:spcAft>
-                <a:spcPts val="100"/>
-              </a:spcAft>
-            </a:pPr>
-            <a:r>
-              <a:rPr sz="850" b="0">
-                <a:solidFill>
-                  <a:srgbClr val="222222"/>
-                </a:solidFill>
-                <a:latin typeface="맑은 고딕"/>
-              </a:rPr>
-              <a:t>Dashboard /admin/dashboard</a:t>
-            </a:r>
-          </a:p>
-          <a:p>
-            <a:pPr algn="l">
-              <a:lnSpc>
-                <a:spcPct val="100000"/>
-              </a:lnSpc>
-              <a:spcBef>
-                <a:spcPts val="0"/>
-              </a:spcBef>
-              <a:spcAft>
-                <a:spcPts val="100"/>
-              </a:spcAft>
-            </a:pPr>
-            <a:r>
-              <a:rPr sz="850" b="0">
-                <a:solidFill>
-                  <a:srgbClr val="222222"/>
-                </a:solidFill>
-                <a:latin typeface="맑은 고딕"/>
-              </a:rPr>
-              <a:t>주요설비 일정 /admin/schedules</a:t>
-            </a:r>
-          </a:p>
-          <a:p>
-            <a:pPr algn="l">
-              <a:lnSpc>
-                <a:spcPct val="100000"/>
-              </a:lnSpc>
-              <a:spcBef>
-                <a:spcPts val="0"/>
-              </a:spcBef>
-              <a:spcAft>
-                <a:spcPts val="100"/>
-              </a:spcAft>
-            </a:pPr>
-            <a:r>
-              <a:rPr sz="850" b="0">
-                <a:solidFill>
-                  <a:srgbClr val="222222"/>
-                </a:solidFill>
-                <a:latin typeface="맑은 고딕"/>
-              </a:rPr>
-              <a:t>공지사항 /admin/notices</a:t>
-            </a:r>
-          </a:p>
-          <a:p>
-            <a:pPr algn="l">
-              <a:lnSpc>
-                <a:spcPct val="100000"/>
-              </a:lnSpc>
-              <a:spcBef>
-                <a:spcPts val="0"/>
-              </a:spcBef>
-              <a:spcAft>
-                <a:spcPts val="100"/>
-              </a:spcAft>
-            </a:pPr>
-            <a:r>
-              <a:rPr sz="850" b="0">
-                <a:solidFill>
-                  <a:srgbClr val="222222"/>
-                </a:solidFill>
-                <a:latin typeface="맑은 고딕"/>
-              </a:rPr>
-              <a:t>사업장·건물 /admin/sites</a:t>
-            </a:r>
-          </a:p>
-          <a:p>
-            <a:pPr algn="l">
-              <a:lnSpc>
-                <a:spcPct val="100000"/>
-              </a:lnSpc>
-              <a:spcBef>
-                <a:spcPts val="0"/>
-              </a:spcBef>
-              <a:spcAft>
-                <a:spcPts val="100"/>
-              </a:spcAft>
-            </a:pPr>
-            <a:r>
-              <a:rPr sz="850" b="0">
-                <a:solidFill>
-                  <a:srgbClr val="222222"/>
-                </a:solidFill>
-                <a:latin typeface="맑은 고딕"/>
-              </a:rPr>
-              <a:t>설비관리 /admin/equipment</a:t>
-            </a:r>
-          </a:p>
-          <a:p>
-            <a:pPr algn="l">
-              <a:lnSpc>
-                <a:spcPct val="100000"/>
-              </a:lnSpc>
-              <a:spcBef>
-                <a:spcPts val="0"/>
-              </a:spcBef>
-              <a:spcAft>
-                <a:spcPts val="100"/>
-              </a:spcAft>
-            </a:pPr>
-            <a:r>
-              <a:rPr sz="850" b="0">
-                <a:solidFill>
-                  <a:srgbClr val="222222"/>
-                </a:solidFill>
-                <a:latin typeface="맑은 고딕"/>
-              </a:rPr>
-              <a:t>점검(PM) /admin/pm</a:t>
-            </a:r>
-          </a:p>
-          <a:p>
-            <a:pPr algn="l">
-              <a:lnSpc>
-                <a:spcPct val="100000"/>
-              </a:lnSpc>
-              <a:spcBef>
-                <a:spcPts val="0"/>
-              </a:spcBef>
-              <a:spcAft>
-                <a:spcPts val="100"/>
-              </a:spcAft>
-            </a:pPr>
-            <a:r>
-              <a:rPr sz="850" b="0">
-                <a:solidFill>
-                  <a:srgbClr val="222222"/>
-                </a:solidFill>
-                <a:latin typeface="맑은 고딕"/>
-              </a:rPr>
-              <a:t>점검일지 /admin/inspection-logs</a:t>
-            </a:r>
-          </a:p>
-          <a:p>
-            <a:pPr algn="l">
-              <a:lnSpc>
-                <a:spcPct val="100000"/>
-              </a:lnSpc>
-              <a:spcBef>
-                <a:spcPts val="0"/>
-              </a:spcBef>
-              <a:spcAft>
-                <a:spcPts val="100"/>
-              </a:spcAft>
-            </a:pPr>
-            <a:r>
-              <a:rPr sz="850" b="0">
-                <a:solidFill>
-                  <a:srgbClr val="222222"/>
-                </a:solidFill>
-                <a:latin typeface="맑은 고딕"/>
-              </a:rPr>
-              <a:t>점검일지2 /admin/inspection-logs2</a:t>
-            </a:r>
-          </a:p>
-          <a:p>
-            <a:pPr algn="l">
-              <a:lnSpc>
-                <a:spcPct val="100000"/>
-              </a:lnSpc>
-              <a:spcBef>
-                <a:spcPts val="0"/>
-              </a:spcBef>
-              <a:spcAft>
-                <a:spcPts val="100"/>
-              </a:spcAft>
-            </a:pPr>
-            <a:r>
-              <a:rPr sz="850" b="0">
-                <a:solidFill>
-                  <a:srgbClr val="222222"/>
-                </a:solidFill>
-                <a:latin typeface="맑은 고딕"/>
-              </a:rPr>
-              <a:t>정비접수/승인 /admin/work-orders</a:t>
-            </a:r>
-          </a:p>
-          <a:p>
-            <a:pPr algn="l">
-              <a:lnSpc>
-                <a:spcPct val="100000"/>
-              </a:lnSpc>
-              <a:spcBef>
-                <a:spcPts val="0"/>
-              </a:spcBef>
-              <a:spcAft>
-                <a:spcPts val="100"/>
-              </a:spcAft>
-            </a:pPr>
-            <a:r>
-              <a:rPr sz="850" b="0">
-                <a:solidFill>
-                  <a:srgbClr val="222222"/>
-                </a:solidFill>
-                <a:latin typeface="맑은 고딕"/>
-              </a:rPr>
-              <a:t>정비 List(D-1) /admin/d1</a:t>
-            </a:r>
-          </a:p>
-          <a:p>
-            <a:pPr algn="l">
-              <a:lnSpc>
-                <a:spcPct val="100000"/>
-              </a:lnSpc>
-              <a:spcBef>
-                <a:spcPts val="0"/>
-              </a:spcBef>
-              <a:spcAft>
-                <a:spcPts val="100"/>
-              </a:spcAft>
-            </a:pPr>
-            <a:r>
-              <a:rPr sz="850" b="0">
-                <a:solidFill>
-                  <a:srgbClr val="222222"/>
-                </a:solidFill>
-                <a:latin typeface="맑은 고딕"/>
-              </a:rPr>
-              <a:t>작업허가/승인 /admin/facility-section</a:t>
-            </a:r>
-          </a:p>
-          <a:p>
-            <a:pPr algn="l">
-              <a:lnSpc>
-                <a:spcPct val="100000"/>
-              </a:lnSpc>
-              <a:spcBef>
-                <a:spcPts val="0"/>
-              </a:spcBef>
-              <a:spcAft>
-                <a:spcPts val="100"/>
-              </a:spcAft>
-            </a:pPr>
-            <a:r>
-              <a:rPr sz="850" b="0">
-                <a:solidFill>
-                  <a:srgbClr val="222222"/>
-                </a:solidFill>
-                <a:latin typeface="맑은 고딕"/>
-              </a:rPr>
-              <a:t>가로등 /admin/streetlamp/requests</a:t>
-            </a:r>
-          </a:p>
-          <a:p>
-            <a:pPr algn="l">
-              <a:lnSpc>
-                <a:spcPct val="100000"/>
-              </a:lnSpc>
-              <a:spcBef>
-                <a:spcPts val="0"/>
-              </a:spcBef>
-              <a:spcAft>
-                <a:spcPts val="100"/>
-              </a:spcAft>
-            </a:pPr>
-            <a:r>
-              <a:rPr sz="850" b="0">
-                <a:solidFill>
-                  <a:srgbClr val="222222"/>
-                </a:solidFill>
-                <a:latin typeface="맑은 고딕"/>
-              </a:rPr>
-              <a:t>AI 분석 /admin/ai-analysis</a:t>
-            </a:r>
-          </a:p>
-          <a:p>
-            <a:pPr algn="l">
-              <a:lnSpc>
-                <a:spcPct val="100000"/>
-              </a:lnSpc>
-              <a:spcBef>
-                <a:spcPts val="0"/>
-              </a:spcBef>
-              <a:spcAft>
-                <a:spcPts val="100"/>
-              </a:spcAft>
-            </a:pPr>
-            <a:r>
-              <a:rPr sz="850" b="0">
-                <a:solidFill>
-                  <a:srgbClr val="222222"/>
-                </a:solidFill>
-                <a:latin typeface="맑은 고딕"/>
-              </a:rPr>
-              <a:t>서버관리 /admin/server</a:t>
-            </a:r>
-          </a:p>
-          <a:p>
-            <a:pPr algn="l">
-              <a:lnSpc>
-                <a:spcPct val="100000"/>
-              </a:lnSpc>
-              <a:spcBef>
-                <a:spcPts val="0"/>
-              </a:spcBef>
-              <a:spcAft>
-                <a:spcPts val="100"/>
-              </a:spcAft>
-            </a:pPr>
-            <a:r>
-              <a:rPr sz="850" b="0">
-                <a:solidFill>
-                  <a:srgbClr val="222222"/>
-                </a:solidFill>
-                <a:latin typeface="맑은 고딕"/>
-              </a:rPr>
-              <a:t>위험성평가 /admin/risk-assessment</a:t>
-            </a:r>
-          </a:p>
-          <a:p>
-            <a:pPr algn="l">
-              <a:lnSpc>
-                <a:spcPct val="100000"/>
-              </a:lnSpc>
-              <a:spcBef>
-                <a:spcPts val="0"/>
-              </a:spcBef>
-              <a:spcAft>
-                <a:spcPts val="100"/>
-              </a:spcAft>
-            </a:pPr>
-            <a:r>
-              <a:rPr sz="850" b="0">
-                <a:solidFill>
-                  <a:srgbClr val="222222"/>
-                </a:solidFill>
-                <a:latin typeface="맑은 고딕"/>
-              </a:rPr>
-              <a:t>자재관리 /admin/materials?popup=1</a:t>
-            </a:r>
-          </a:p>
-          <a:p>
-            <a:pPr algn="l">
-              <a:lnSpc>
-                <a:spcPct val="100000"/>
-              </a:lnSpc>
-              <a:spcBef>
-                <a:spcPts val="0"/>
-              </a:spcBef>
-              <a:spcAft>
-                <a:spcPts val="100"/>
-              </a:spcAft>
-            </a:pPr>
-            <a:r>
-              <a:rPr sz="850" b="0">
-                <a:solidFill>
-                  <a:srgbClr val="222222"/>
-                </a:solidFill>
-                <a:latin typeface="맑은 고딕"/>
-              </a:rPr>
-              <a:t>협력사 /admin/partners</a:t>
-            </a:r>
-          </a:p>
-          <a:p>
-            <a:pPr algn="l">
-              <a:lnSpc>
-                <a:spcPct val="100000"/>
-              </a:lnSpc>
-              <a:spcBef>
-                <a:spcPts val="0"/>
-              </a:spcBef>
-              <a:spcAft>
-                <a:spcPts val="100"/>
-              </a:spcAft>
-            </a:pPr>
-            <a:r>
-              <a:rPr sz="850" b="0">
-                <a:solidFill>
-                  <a:srgbClr val="222222"/>
-                </a:solidFill>
-                <a:latin typeface="맑은 고딕"/>
-              </a:rPr>
-              <a:t>계정관리 /admin/users</a:t>
-            </a:r>
-          </a:p>
-          <a:p>
-            <a:pPr algn="l">
-              <a:lnSpc>
-                <a:spcPct val="100000"/>
-              </a:lnSpc>
-              <a:spcBef>
-                <a:spcPts val="0"/>
-              </a:spcBef>
-              <a:spcAft>
-                <a:spcPts val="100"/>
-              </a:spcAft>
-            </a:pPr>
-            <a:r>
-              <a:rPr sz="850" b="0">
-                <a:solidFill>
-                  <a:srgbClr val="222222"/>
-                </a:solidFill>
-                <a:latin typeface="맑은 고딕"/>
-              </a:rPr>
-              <a:t>※ menu_access JSON으로 계정별 메뉴 개별 허용·차단</a:t>
+              <a:t>【답변 형식】</a:t>
+            </a:r>
+          </a:p>
+          <a:p>
+            <a:pPr algn="l">
+              <a:lnSpc>
+                <a:spcPct val="100000"/>
+              </a:lnSpc>
+              <a:spcBef>
+                <a:spcPts val="0"/>
+              </a:spcBef>
+              <a:spcAft>
+                <a:spcPts val="100"/>
+              </a:spcAft>
+            </a:pPr>
+            <a:r>
+              <a:rPr sz="850" b="0">
+                <a:solidFill>
+                  <a:srgbClr val="222222"/>
+                </a:solidFill>
+                <a:latin typeface="맑은 고딕"/>
+              </a:rPr>
+              <a:t>표 렌더링 · 그래프 생성(ChatGPT식 데이터 분석)</a:t>
+            </a:r>
+          </a:p>
+          <a:p>
+            <a:pPr algn="l">
+              <a:lnSpc>
+                <a:spcPct val="100000"/>
+              </a:lnSpc>
+              <a:spcBef>
+                <a:spcPts val="0"/>
+              </a:spcBef>
+              <a:spcAft>
+                <a:spcPts val="100"/>
+              </a:spcAft>
+            </a:pPr>
+            <a:r>
+              <a:rPr sz="850" b="0">
+                <a:solidFill>
+                  <a:srgbClr val="222222"/>
+                </a:solidFill>
+                <a:latin typeface="맑은 고딕"/>
+              </a:rPr>
+              <a:t>엑셀로 정리·다운로드(예: 정비완료 상세 목록)</a:t>
+            </a:r>
+          </a:p>
+          <a:p>
+            <a:pPr algn="l">
+              <a:lnSpc>
+                <a:spcPct val="100000"/>
+              </a:lnSpc>
+              <a:spcBef>
+                <a:spcPts val="0"/>
+              </a:spcBef>
+              <a:spcAft>
+                <a:spcPts val="100"/>
+              </a:spcAft>
+            </a:pPr>
+            <a:r>
+              <a:rPr sz="950" b="1">
+                <a:solidFill>
+                  <a:srgbClr val="003D7A"/>
+                </a:solidFill>
+                <a:latin typeface="맑은 고딕"/>
+              </a:rPr>
+              <a:t>【공유 학습 노트】 계정 간 공유되는 업무 기준·용어 메모 → 답변에 반영</a:t>
+            </a:r>
+          </a:p>
+          <a:p>
+            <a:pPr algn="l">
+              <a:lnSpc>
+                <a:spcPct val="100000"/>
+              </a:lnSpc>
+              <a:spcBef>
+                <a:spcPts val="0"/>
+              </a:spcBef>
+              <a:spcAft>
+                <a:spcPts val="100"/>
+              </a:spcAft>
+            </a:pPr>
+            <a:r>
+              <a:rPr sz="950" b="1">
+                <a:solidFill>
+                  <a:srgbClr val="003D7A"/>
+                </a:solidFill>
+                <a:latin typeface="맑은 고딕"/>
+              </a:rPr>
+              <a:t>【설정】 API 키·모델: AI 분석 설정 또는 내 계정 /admin/account</a:t>
+            </a:r>
+          </a:p>
+          <a:p>
+            <a:pPr algn="l">
+              <a:lnSpc>
+                <a:spcPct val="100000"/>
+              </a:lnSpc>
+              <a:spcBef>
+                <a:spcPts val="0"/>
+              </a:spcBef>
+              <a:spcAft>
+                <a:spcPts val="100"/>
+              </a:spcAft>
+            </a:pPr>
+            <a:r>
+              <a:rPr sz="850" b="0">
+                <a:solidFill>
+                  <a:srgbClr val="222222"/>
+                </a:solidFill>
+                <a:latin typeface="맑은 고딕"/>
+              </a:rPr>
+              <a:t>API 키 미설정 시 안내 박스 표시</a:t>
+            </a:r>
+          </a:p>
+          <a:p>
+            <a:pPr algn="l">
+              <a:lnSpc>
+                <a:spcPct val="100000"/>
+              </a:lnSpc>
+              <a:spcBef>
+                <a:spcPts val="0"/>
+              </a:spcBef>
+              <a:spcAft>
+                <a:spcPts val="100"/>
+              </a:spcAft>
+            </a:pPr>
+            <a:r>
+              <a:rPr sz="950" b="1">
+                <a:solidFill>
+                  <a:srgbClr val="003D7A"/>
+                </a:solidFill>
+                <a:latin typeface="맑은 고딕"/>
+              </a:rPr>
+              <a:t>【활용 예】</a:t>
+            </a:r>
+          </a:p>
+          <a:p>
+            <a:pPr algn="l">
+              <a:lnSpc>
+                <a:spcPct val="100000"/>
+              </a:lnSpc>
+              <a:spcBef>
+                <a:spcPts val="0"/>
+              </a:spcBef>
+              <a:spcAft>
+                <a:spcPts val="100"/>
+              </a:spcAft>
+            </a:pPr>
+            <a:r>
+              <a:rPr sz="850" b="0">
+                <a:solidFill>
+                  <a:srgbClr val="222222"/>
+                </a:solidFill>
+                <a:latin typeface="맑은 고딕"/>
+              </a:rPr>
+              <a:t>· 지난달 중앙관제실 전력 사용량 추이를 그래프로</a:t>
+            </a:r>
+          </a:p>
+          <a:p>
+            <a:pPr algn="l">
+              <a:lnSpc>
+                <a:spcPct val="100000"/>
+              </a:lnSpc>
+              <a:spcBef>
+                <a:spcPts val="0"/>
+              </a:spcBef>
+              <a:spcAft>
+                <a:spcPts val="100"/>
+              </a:spcAft>
+            </a:pPr>
+            <a:r>
+              <a:rPr sz="850" b="0">
+                <a:solidFill>
+                  <a:srgbClr val="222222"/>
+                </a:solidFill>
+                <a:latin typeface="맑은 고딕"/>
+              </a:rPr>
+              <a:t>· 이번 주 협력사별 정비완료 건을 엑셀로</a:t>
+            </a:r>
+          </a:p>
+          <a:p>
+            <a:pPr algn="l">
+              <a:lnSpc>
+                <a:spcPct val="100000"/>
+              </a:lnSpc>
+              <a:spcBef>
+                <a:spcPts val="0"/>
+              </a:spcBef>
+              <a:spcAft>
+                <a:spcPts val="100"/>
+              </a:spcAft>
+            </a:pPr>
+            <a:r>
+              <a:rPr sz="850" b="0">
+                <a:solidFill>
+                  <a:srgbClr val="222222"/>
+                </a:solidFill>
+                <a:latin typeface="맑은 고딕"/>
+              </a:rPr>
+              <a:t>· 주의·고장 설비와 최근 점검일지 특이사항 요약</a:t>
             </a:r>
           </a:p>
         </p:txBody>
@@ -4669,7 +4385,7 @@
                 </a:solidFill>
                 <a:latin typeface="맑은 고딕"/>
               </a:rPr>
-              <a:t>2 / 10</a:t>
+              <a:t>11 / 12</a:t>
             </a:r>
           </a:p>
         </p:txBody>
@@ -4682,7 +4398,7 @@
 </p:sld>
 </file>
 
-<file path=ppt/slides/slide3.xml><?xml version="1.0" encoding="utf-8"?>
+<file path=ppt/slides/slide12.xml><?xml version="1.0" encoding="utf-8"?>
 <p:sld xmlns:a="http://schemas.openxmlformats.org/drawingml/2006/main" xmlns:p="http://schemas.openxmlformats.org/presentationml/2006/main" xmlns:r="http://schemas.openxmlformats.org/officeDocument/2006/relationships">
   <p:cSld>
     <p:spTree>
@@ -4765,7 +4481,7 @@
                 </a:solidFill>
                 <a:latin typeface="맑은 고딕"/>
               </a:rPr>
-              <a:t>02  Dashboard · 일정 · 공지</a:t>
+              <a:t>11  계정관리 · 서버관리 · 부록</a:t>
             </a:r>
           </a:p>
         </p:txBody>
@@ -4810,139 +4526,139 @@
                 </a:solidFill>
                 <a:latin typeface="맑은 고딕"/>
               </a:rPr>
-              <a:t>【Dashboard /admin/dashboard】</a:t>
-            </a:r>
-          </a:p>
-          <a:p>
-            <a:pPr algn="l">
-              <a:lnSpc>
-                <a:spcPct val="100000"/>
-              </a:lnSpc>
-              <a:spcBef>
-                <a:spcPts val="0"/>
-              </a:spcBef>
-              <a:spcAft>
-                <a:spcPts val="100"/>
-              </a:spcAft>
-            </a:pPr>
-            <a:r>
-              <a:rPr sz="850" b="0">
-                <a:solidFill>
-                  <a:srgbClr val="222222"/>
-                </a:solidFill>
-                <a:latin typeface="맑은 고딕"/>
-              </a:rPr>
-              <a:t>KPI: 사업장·건물·설비 수, PM 지연, 정비의뢰, 오늘/어제 점검 등 (30초 TTL 캐시)</a:t>
-            </a:r>
-          </a:p>
-          <a:p>
-            <a:pPr algn="l">
-              <a:lnSpc>
-                <a:spcPct val="100000"/>
-              </a:lnSpc>
-              <a:spcBef>
-                <a:spcPts val="0"/>
-              </a:spcBef>
-              <a:spcAft>
-                <a:spcPts val="100"/>
-              </a:spcAft>
-            </a:pPr>
-            <a:r>
-              <a:rPr sz="850" b="0">
-                <a:solidFill>
-                  <a:srgbClr val="222222"/>
-                </a:solidFill>
-                <a:latin typeface="맑은 고딕"/>
-              </a:rPr>
-              <a:t>위젯: 정비현황·사업장현황·에너지·오늘 일정·공지 — 순서·표시·레이아웃(gallery/bento) 사용자 설정</a:t>
-            </a:r>
-          </a:p>
-          <a:p>
-            <a:pPr algn="l">
-              <a:lnSpc>
-                <a:spcPct val="100000"/>
-              </a:lnSpc>
-              <a:spcBef>
-                <a:spcPts val="0"/>
-              </a:spcBef>
-              <a:spcAft>
-                <a:spcPts val="100"/>
-              </a:spcAft>
-            </a:pPr>
-            <a:r>
-              <a:rPr sz="850" b="0">
-                <a:solidFill>
-                  <a:srgbClr val="222222"/>
-                </a:solidFill>
-                <a:latin typeface="맑은 고딕"/>
-              </a:rPr>
-              <a:t>서버 상태 위젯: Render 배포·DB·디스크·메모리 (관리자 화면과 연동)</a:t>
-            </a:r>
-          </a:p>
-          <a:p>
-            <a:pPr algn="l">
-              <a:lnSpc>
-                <a:spcPct val="100000"/>
-              </a:lnSpc>
-              <a:spcBef>
-                <a:spcPts val="0"/>
-              </a:spcBef>
-              <a:spcAft>
-                <a:spcPts val="100"/>
-              </a:spcAft>
-            </a:pPr>
-            <a:r>
-              <a:rPr sz="950" b="1">
-                <a:solidFill>
-                  <a:srgbClr val="003D7A"/>
-                </a:solidFill>
-                <a:latin typeface="맑은 고딕"/>
-              </a:rPr>
-              <a:t>【주요설비 일정 /admin/schedules】</a:t>
-            </a:r>
-          </a:p>
-          <a:p>
-            <a:pPr algn="l">
-              <a:lnSpc>
-                <a:spcPct val="100000"/>
-              </a:lnSpc>
-              <a:spcBef>
-                <a:spcPts val="0"/>
-              </a:spcBef>
-              <a:spcAft>
-                <a:spcPts val="100"/>
-              </a:spcAft>
-            </a:pPr>
-            <a:r>
-              <a:rPr sz="850" b="0">
-                <a:solidFill>
-                  <a:srgbClr val="222222"/>
-                </a:solidFill>
-                <a:latin typeface="맑은 고딕"/>
-              </a:rPr>
-              <a:t>캘린더 등록·삭제 · 카테고리: 긴급/점검/작업/검수</a:t>
-            </a:r>
-          </a:p>
-          <a:p>
-            <a:pPr algn="l">
-              <a:lnSpc>
-                <a:spcPct val="100000"/>
-              </a:lnSpc>
-              <a:spcBef>
-                <a:spcPts val="0"/>
-              </a:spcBef>
-              <a:spcAft>
-                <a:spcPts val="100"/>
-              </a:spcAft>
-            </a:pPr>
-            <a:r>
-              <a:rPr sz="850" b="0">
-                <a:solidFill>
-                  <a:srgbClr val="222222"/>
-                </a:solidFill>
-                <a:latin typeface="맑은 고딕"/>
-              </a:rPr>
-              <a:t>Dashboard 「오늘 일정」 위젯과 연동</a:t>
+              <a:t>【계정관리 /admin/users — 시스템관리자】</a:t>
+            </a:r>
+          </a:p>
+          <a:p>
+            <a:pPr algn="l">
+              <a:lnSpc>
+                <a:spcPct val="100000"/>
+              </a:lnSpc>
+              <a:spcBef>
+                <a:spcPts val="0"/>
+              </a:spcBef>
+              <a:spcAft>
+                <a:spcPts val="100"/>
+              </a:spcAft>
+            </a:pPr>
+            <a:r>
+              <a:rPr sz="850" b="0">
+                <a:solidFill>
+                  <a:srgbClr val="222222"/>
+                </a:solidFill>
+                <a:latin typeface="맑은 고딕"/>
+              </a:rPr>
+              <a:t>탭으로 업무 구분(가입승인·계정 목록 등) · 사이드바에 승인 대기 건수 배지</a:t>
+            </a:r>
+          </a:p>
+          <a:p>
+            <a:pPr algn="l">
+              <a:lnSpc>
+                <a:spcPct val="100000"/>
+              </a:lnSpc>
+              <a:spcBef>
+                <a:spcPts val="0"/>
+              </a:spcBef>
+              <a:spcAft>
+                <a:spcPts val="100"/>
+              </a:spcAft>
+            </a:pPr>
+            <a:r>
+              <a:rPr sz="850" b="0">
+                <a:solidFill>
+                  <a:srgbClr val="222222"/>
+                </a:solidFill>
+                <a:latin typeface="맑은 고딕"/>
+              </a:rPr>
+              <a:t>계정 검색 · 단계적 목록(페이지) · 수정 후 작업하던 페이지 유지</a:t>
+            </a:r>
+          </a:p>
+          <a:p>
+            <a:pPr algn="l">
+              <a:lnSpc>
+                <a:spcPct val="100000"/>
+              </a:lnSpc>
+              <a:spcBef>
+                <a:spcPts val="0"/>
+              </a:spcBef>
+              <a:spcAft>
+                <a:spcPts val="100"/>
+              </a:spcAft>
+            </a:pPr>
+            <a:r>
+              <a:rPr sz="850" b="0">
+                <a:solidFill>
+                  <a:srgbClr val="222222"/>
+                </a:solidFill>
+                <a:latin typeface="맑은 고딕"/>
+              </a:rPr>
+              <a:t>계정 수정과 메뉴 권한 설정 분리 · 메뉴 접근 일괄 변경</a:t>
+            </a:r>
+          </a:p>
+          <a:p>
+            <a:pPr algn="l">
+              <a:lnSpc>
+                <a:spcPct val="100000"/>
+              </a:lnSpc>
+              <a:spcBef>
+                <a:spcPts val="0"/>
+              </a:spcBef>
+              <a:spcAft>
+                <a:spcPts val="100"/>
+              </a:spcAft>
+            </a:pPr>
+            <a:r>
+              <a:rPr sz="850" b="0">
+                <a:solidFill>
+                  <a:srgbClr val="222222"/>
+                </a:solidFill>
+                <a:latin typeface="맑은 고딕"/>
+              </a:rPr>
+              <a:t>역할 직접 추가·삭제(가입 선택 허용 여부 포함) · 섹션 역할(금호·백운·SDC·해수담수·운영지원)</a:t>
+            </a:r>
+          </a:p>
+          <a:p>
+            <a:pPr algn="l">
+              <a:lnSpc>
+                <a:spcPct val="100000"/>
+              </a:lnSpc>
+              <a:spcBef>
+                <a:spcPts val="0"/>
+              </a:spcBef>
+              <a:spcAft>
+                <a:spcPts val="100"/>
+              </a:spcAft>
+            </a:pPr>
+            <a:r>
+              <a:rPr sz="850" b="0">
+                <a:solidFill>
+                  <a:srgbClr val="222222"/>
+                </a:solidFill>
+                <a:latin typeface="맑은 고딕"/>
+              </a:rPr>
+              <a:t>협력사 연결(partner/외부업체) · 계정 삭제 · 가입 계정 초기 비밀번호 보안 강화</a:t>
+            </a:r>
+          </a:p>
+          <a:p>
+            <a:pPr algn="l">
+              <a:lnSpc>
+                <a:spcPct val="100000"/>
+              </a:lnSpc>
+              <a:spcBef>
+                <a:spcPts val="0"/>
+              </a:spcBef>
+              <a:spcAft>
+                <a:spcPts val="100"/>
+              </a:spcAft>
+            </a:pPr>
+            <a:r>
+              <a:rPr sz="850" b="0">
+                <a:solidFill>
+                  <a:srgbClr val="222222"/>
+                </a:solidFill>
+                <a:latin typeface="맑은 고딕"/>
+              </a:rPr>
+              <a:t>엑셀 내보내기: 권한·메뉴 상세 포함</a:t>
             </a:r>
           </a:p>
         </p:txBody>
@@ -4987,51 +4703,117 @@
                 </a:solidFill>
                 <a:latin typeface="맑은 고딕"/>
               </a:rPr>
-              <a:t>【공지사항 /admin/notices】</a:t>
-            </a:r>
-          </a:p>
-          <a:p>
-            <a:pPr algn="l">
-              <a:lnSpc>
-                <a:spcPct val="100000"/>
-              </a:lnSpc>
-              <a:spcBef>
-                <a:spcPts val="0"/>
-              </a:spcBef>
-              <a:spcAft>
-                <a:spcPts val="100"/>
-              </a:spcAft>
-            </a:pPr>
-            <a:r>
-              <a:rPr sz="850" b="0">
-                <a:solidFill>
-                  <a:srgbClr val="222222"/>
-                </a:solidFill>
-                <a:latin typeface="맑은 고딕"/>
-              </a:rPr>
-              <a:t>등록·삭제 · 카테고리: 긴급/안전/일반</a:t>
-            </a:r>
-          </a:p>
-          <a:p>
-            <a:pPr algn="l">
-              <a:lnSpc>
-                <a:spcPct val="100000"/>
-              </a:lnSpc>
-              <a:spcBef>
-                <a:spcPts val="0"/>
-              </a:spcBef>
-              <a:spcAft>
-                <a:spcPts val="100"/>
-              </a:spcAft>
-            </a:pPr>
-            <a:r>
-              <a:rPr sz="850" b="0">
-                <a:solidFill>
-                  <a:srgbClr val="222222"/>
-                </a:solidFill>
-                <a:latin typeface="맑은 고딕"/>
-              </a:rPr>
-              <a:t>Dashboard 공지 위젯 표시</a:t>
+              <a:t>【서버관리 /admin/server — 시스템관리자】</a:t>
+            </a:r>
+          </a:p>
+          <a:p>
+            <a:pPr algn="l">
+              <a:lnSpc>
+                <a:spcPct val="100000"/>
+              </a:lnSpc>
+              <a:spcBef>
+                <a:spcPts val="0"/>
+              </a:spcBef>
+              <a:spcAft>
+                <a:spcPts val="100"/>
+              </a:spcAft>
+            </a:pPr>
+            <a:r>
+              <a:rPr sz="850" b="0">
+                <a:solidFill>
+                  <a:srgbClr val="222222"/>
+                </a:solidFill>
+                <a:latin typeface="맑은 고딕"/>
+              </a:rPr>
+              <a:t>상태 30초 갱신: Render · DB · 디스크 · 메모리 · CPU</a:t>
+            </a:r>
+          </a:p>
+          <a:p>
+            <a:pPr algn="l">
+              <a:lnSpc>
+                <a:spcPct val="100000"/>
+              </a:lnSpc>
+              <a:spcBef>
+                <a:spcPts val="0"/>
+              </a:spcBef>
+              <a:spcAft>
+                <a:spcPts val="100"/>
+              </a:spcAft>
+            </a:pPr>
+            <a:r>
+              <a:rPr sz="850" b="0">
+                <a:solidFill>
+                  <a:srgbClr val="222222"/>
+                </a:solidFill>
+                <a:latin typeface="맑은 고딕"/>
+              </a:rPr>
+              <a:t>백업 ZIP /admin/server/backup.zip (files/ 일지·도면·업로드, excel/ 업무데이터·설비현황)</a:t>
+            </a:r>
+          </a:p>
+          <a:p>
+            <a:pPr algn="l">
+              <a:lnSpc>
+                <a:spcPct val="100000"/>
+              </a:lnSpc>
+              <a:spcBef>
+                <a:spcPts val="0"/>
+              </a:spcBef>
+              <a:spcAft>
+                <a:spcPts val="100"/>
+              </a:spcAft>
+            </a:pPr>
+            <a:r>
+              <a:rPr sz="850" b="0">
+                <a:solidFill>
+                  <a:srgbClr val="222222"/>
+                </a:solidFill>
+                <a:latin typeface="맑은 고딕"/>
+              </a:rPr>
+              <a:t>DB 원본 백업 /admin/server/database-backup.dump — 외부 보관용</a:t>
+            </a:r>
+          </a:p>
+          <a:p>
+            <a:pPr algn="l">
+              <a:lnSpc>
+                <a:spcPct val="100000"/>
+              </a:lnSpc>
+              <a:spcBef>
+                <a:spcPts val="0"/>
+              </a:spcBef>
+              <a:spcAft>
+                <a:spcPts val="100"/>
+              </a:spcAft>
+            </a:pPr>
+            <a:r>
+              <a:rPr sz="850" b="0">
+                <a:solidFill>
+                  <a:srgbClr val="222222"/>
+                </a:solidFill>
+                <a:latin typeface="맑은 고딕"/>
+              </a:rPr>
+              <a:t>접속·활동 로그 검색 /admin/server/access-logs · 검색 조건 기준 엑셀 다운로드</a:t>
+            </a:r>
+          </a:p>
+          <a:p>
+            <a:pPr algn="l">
+              <a:lnSpc>
+                <a:spcPct val="100000"/>
+              </a:lnSpc>
+              <a:spcBef>
+                <a:spcPts val="0"/>
+              </a:spcBef>
+              <a:spcAft>
+                <a:spcPts val="100"/>
+              </a:spcAft>
+            </a:pPr>
+            <a:r>
+              <a:rPr sz="850" b="0">
+                <a:solidFill>
+                  <a:srgbClr val="222222"/>
+                </a:solidFill>
+                <a:latin typeface="맑은 고딕"/>
+              </a:rPr>
+              <a:t>사용 매뉴얼 /admin/server/manual.pptx · 발표자료 /admin/server/presentation.pptx</a:t>
             </a:r>
           </a:p>
           <a:p>
@@ -5053,73 +4835,73 @@
                 </a:solidFill>
                 <a:latin typeface="맑은 고딕"/>
               </a:rPr>
-              <a:t>【운영 팁】</a:t>
-            </a:r>
-          </a:p>
-          <a:p>
-            <a:pPr algn="l">
-              <a:lnSpc>
-                <a:spcPct val="100000"/>
-              </a:lnSpc>
-              <a:spcBef>
-                <a:spcPts val="0"/>
-              </a:spcBef>
-              <a:spcAft>
-                <a:spcPts val="100"/>
-              </a:spcAft>
-            </a:pPr>
-            <a:r>
-              <a:rPr sz="850" b="0">
-                <a:solidFill>
-                  <a:srgbClr val="222222"/>
-                </a:solidFill>
-                <a:latin typeface="맑은 고딕"/>
-              </a:rPr>
-              <a:t>· 사이드바 메뉴는 역할·menu_access 미허용 시 /admin/account?error=no_menu</a:t>
-            </a:r>
-          </a:p>
-          <a:p>
-            <a:pPr algn="l">
-              <a:lnSpc>
-                <a:spcPct val="100000"/>
-              </a:lnSpc>
-              <a:spcBef>
-                <a:spcPts val="0"/>
-              </a:spcBef>
-              <a:spcAft>
-                <a:spcPts val="100"/>
-              </a:spcAft>
-            </a:pPr>
-            <a:r>
-              <a:rPr sz="850" b="0">
-                <a:solidFill>
-                  <a:srgbClr val="222222"/>
-                </a:solidFill>
-                <a:latin typeface="맑은 고딕"/>
-              </a:rPr>
-              <a:t>· 정비 3메뉴(정비섹션·D-1·시설섹션)에 신규 건수 배지 표시</a:t>
-            </a:r>
-          </a:p>
-          <a:p>
-            <a:pPr algn="l">
-              <a:lnSpc>
-                <a:spcPct val="100000"/>
-              </a:lnSpc>
-              <a:spcBef>
-                <a:spcPts val="0"/>
-              </a:spcBef>
-              <a:spcAft>
-                <a:spcPts val="100"/>
-              </a:spcAft>
-            </a:pPr>
-            <a:r>
-              <a:rPr sz="850" b="0">
-                <a:solidFill>
-                  <a:srgbClr val="222222"/>
-                </a:solidFill>
-                <a:latin typeface="맑은 고딕"/>
-              </a:rPr>
-              <a:t>· 내 계정에서 OpenAI API 키·모델(gpt-4o-mini 기본) 설정 → AI·위험성평가 공용</a:t>
+              <a:t>【QR·URL 부록 — {BASE}=PUBLIC_BASE_URL, 모두 로그인 필요】</a:t>
+            </a:r>
+          </a:p>
+          <a:p>
+            <a:pPr algn="l">
+              <a:lnSpc>
+                <a:spcPct val="100000"/>
+              </a:lnSpc>
+              <a:spcBef>
+                <a:spcPts val="0"/>
+              </a:spcBef>
+              <a:spcAft>
+                <a:spcPts val="100"/>
+              </a:spcAft>
+            </a:pPr>
+            <a:r>
+              <a:rPr sz="850" b="0">
+                <a:solidFill>
+                  <a:srgbClr val="222222"/>
+                </a:solidFill>
+                <a:latin typeface="맑은 고딕"/>
+              </a:rPr>
+              <a:t>설비 /eq/{code} · 설비 일지 /eq/{code}/log · 가로등 /lamp/{code}</a:t>
+            </a:r>
+          </a:p>
+          <a:p>
+            <a:pPr algn="l">
+              <a:lnSpc>
+                <a:spcPct val="100000"/>
+              </a:lnSpc>
+              <a:spcBef>
+                <a:spcPts val="0"/>
+              </a:spcBef>
+              <a:spcAft>
+                <a:spcPts val="100"/>
+              </a:spcAft>
+            </a:pPr>
+            <a:r>
+              <a:rPr sz="850" b="0">
+                <a:solidFill>
+                  <a:srgbClr val="222222"/>
+                </a:solidFill>
+                <a:latin typeface="맑은 고딕"/>
+              </a:rPr>
+              <a:t>점검일지 /{유형}/{code}/daily — hs·ccr·ccrf·swhq·swhall·hcenter·egym·bdorm·gtown·p1538·s53·bdae·bshop·bahall·rist·ggy</a:t>
+            </a:r>
+          </a:p>
+          <a:p>
+            <a:pPr algn="l">
+              <a:lnSpc>
+                <a:spcPct val="100000"/>
+              </a:lnSpc>
+              <a:spcBef>
+                <a:spcPts val="0"/>
+              </a:spcBef>
+              <a:spcAft>
+                <a:spcPts val="100"/>
+              </a:spcAft>
+            </a:pPr>
+            <a:r>
+              <a:rPr sz="950" b="1">
+                <a:solidFill>
+                  <a:srgbClr val="003D7A"/>
+                </a:solidFill>
+                <a:latin typeface="맑은 고딕"/>
+              </a:rPr>
+              <a:t>【다운로드】 서버관리 → 사용 매뉴얼 PPT 받기 · 문의: 시스템관리자</a:t>
             </a:r>
           </a:p>
         </p:txBody>
@@ -5154,7 +4936,7 @@
                 </a:solidFill>
                 <a:latin typeface="맑은 고딕"/>
               </a:rPr>
-              <a:t>3 / 10</a:t>
+              <a:t>12 / 12</a:t>
             </a:r>
           </a:p>
         </p:txBody>
@@ -5167,7 +4949,7 @@
 </p:sld>
 </file>
 
-<file path=ppt/slides/slide4.xml><?xml version="1.0" encoding="utf-8"?>
+<file path=ppt/slides/slide2.xml><?xml version="1.0" encoding="utf-8"?>
 <p:sld xmlns:a="http://schemas.openxmlformats.org/drawingml/2006/main" xmlns:p="http://schemas.openxmlformats.org/presentationml/2006/main" xmlns:r="http://schemas.openxmlformats.org/officeDocument/2006/relationships">
   <p:cSld>
     <p:spTree>
@@ -5250,7 +5032,7 @@
                 </a:solidFill>
                 <a:latin typeface="맑은 고딕"/>
               </a:rPr>
-              <a:t>03  사업장 · 건물 · 설비 · QR</a:t>
+              <a:t>01  시스템 개요 · 접속 · 역할 · 메뉴</a:t>
             </a:r>
           </a:p>
         </p:txBody>
@@ -5295,29 +5077,7 @@
                 </a:solidFill>
                 <a:latin typeface="맑은 고딕"/>
               </a:rPr>
-              <a:t>【사업장/건물 /admin/sites】</a:t>
-            </a:r>
-          </a:p>
-          <a:p>
-            <a:pPr algn="l">
-              <a:lnSpc>
-                <a:spcPct val="100000"/>
-              </a:lnSpc>
-              <a:spcBef>
-                <a:spcPts val="0"/>
-              </a:spcBef>
-              <a:spcAft>
-                <a:spcPts val="100"/>
-              </a:spcAft>
-            </a:pPr>
-            <a:r>
-              <a:rPr sz="850" b="0">
-                <a:solidFill>
-                  <a:srgbClr val="222222"/>
-                </a:solidFill>
-                <a:latin typeface="맑은 고딕"/>
-              </a:rPr>
-              <a:t>사업장·건물·층·구역 CRUD · 도면·표준서 파일 업로드</a:t>
+              <a:t>【시스템】 사업장·건물·설비 기준정보 → PM 점검 → 점검일지(웹) → 정비의뢰·D-1·작업허가·최종승인 → 정비실적, 자재·협력사·위험성평가·자료실·AI 분석</a:t>
             </a:r>
           </a:p>
           <a:p>
@@ -5339,117 +5099,183 @@
                 </a:solidFill>
                 <a:latin typeface="맑은 고딕"/>
               </a:rPr>
-              <a:t>【설비관리 /admin/equipment】</a:t>
-            </a:r>
-          </a:p>
-          <a:p>
-            <a:pPr algn="l">
-              <a:lnSpc>
-                <a:spcPct val="100000"/>
-              </a:lnSpc>
-              <a:spcBef>
-                <a:spcPts val="0"/>
-              </a:spcBef>
-              <a:spcAft>
-                <a:spcPts val="100"/>
-              </a:spcAft>
-            </a:pPr>
-            <a:r>
-              <a:rPr sz="850" b="0">
-                <a:solidFill>
-                  <a:srgbClr val="222222"/>
-                </a:solidFill>
-                <a:latin typeface="맑은 고딕"/>
-              </a:rPr>
-              <a:t>설비 등록·수정·삭제 · 사업장·건물별 트리 · 상세 스펙·정비·PM 이력</a:t>
-            </a:r>
-          </a:p>
-          <a:p>
-            <a:pPr algn="l">
-              <a:lnSpc>
-                <a:spcPct val="100000"/>
-              </a:lnSpc>
-              <a:spcBef>
-                <a:spcPts val="0"/>
-              </a:spcBef>
-              <a:spcAft>
-                <a:spcPts val="100"/>
-              </a:spcAft>
-            </a:pPr>
-            <a:r>
-              <a:rPr sz="850" b="0">
-                <a:solidFill>
-                  <a:srgbClr val="222222"/>
-                </a:solidFill>
-                <a:latin typeface="맑은 고딕"/>
-              </a:rPr>
-              <a:t>엑셀 Import/Export(전체·건물별) · UI export와 동일 형식</a:t>
-            </a:r>
-          </a:p>
-          <a:p>
-            <a:pPr algn="l">
-              <a:lnSpc>
-                <a:spcPct val="100000"/>
-              </a:lnSpc>
-              <a:spcBef>
-                <a:spcPts val="0"/>
-              </a:spcBef>
-              <a:spcAft>
-                <a:spcPts val="100"/>
-              </a:spcAft>
-            </a:pPr>
-            <a:r>
-              <a:rPr sz="850" b="0">
-                <a:solidFill>
-                  <a:srgbClr val="222222"/>
-                </a:solidFill>
-                <a:latin typeface="맑은 고딕"/>
-              </a:rPr>
-              <a:t>QR: 개별 PNG /admin/equipment/{id}/qr.png</a:t>
-            </a:r>
-          </a:p>
-          <a:p>
-            <a:pPr algn="l">
-              <a:lnSpc>
-                <a:spcPct val="100000"/>
-              </a:lnSpc>
-              <a:spcBef>
-                <a:spcPts val="0"/>
-              </a:spcBef>
-              <a:spcAft>
-                <a:spcPts val="100"/>
-              </a:spcAft>
-            </a:pPr>
-            <a:r>
-              <a:rPr sz="850" b="0">
-                <a:solidFill>
-                  <a:srgbClr val="222222"/>
-                </a:solidFill>
-                <a:latin typeface="맑은 고딕"/>
-              </a:rPr>
-              <a:t>건물 일괄 ZIP /admin/equipment/building/{building_id}/qr-zip</a:t>
-            </a:r>
-          </a:p>
-          <a:p>
-            <a:pPr algn="l">
-              <a:lnSpc>
-                <a:spcPct val="100000"/>
-              </a:lnSpc>
-              <a:spcBef>
-                <a:spcPts val="0"/>
-              </a:spcBef>
-              <a:spcAft>
-                <a:spcPts val="100"/>
-              </a:spcAft>
-            </a:pPr>
-            <a:r>
-              <a:rPr sz="850" b="0">
-                <a:solidFill>
-                  <a:srgbClr val="222222"/>
-                </a:solidFill>
-                <a:latin typeface="맑은 고딕"/>
-              </a:rPr>
-              <a:t>설비 화면에서 정비의뢰·PM·점검일지 바로 연계</a:t>
+              <a:t>【접속】 로그인 /admin/login (「자동 로그인」 체크 시 다음 접속부터 자동) · 가입 /admin/signup(관리자 승인 후 사용)</a:t>
+            </a:r>
+          </a:p>
+          <a:p>
+            <a:pPr algn="l">
+              <a:lnSpc>
+                <a:spcPct val="100000"/>
+              </a:lnSpc>
+              <a:spcBef>
+                <a:spcPts val="0"/>
+              </a:spcBef>
+              <a:spcAft>
+                <a:spcPts val="100"/>
+              </a:spcAft>
+            </a:pPr>
+            <a:r>
+              <a:rPr sz="950" b="1">
+                <a:solidFill>
+                  <a:srgbClr val="003D7A"/>
+                </a:solidFill>
+                <a:latin typeface="맑은 고딕"/>
+              </a:rPr>
+              <a:t>【보안】 QR 포함 모든 업무 화면은 로그인한 사용자에게만 제공 — 미로그인 시 로그인 후 원래 화면으로 복귀</a:t>
+            </a:r>
+          </a:p>
+          <a:p>
+            <a:pPr algn="l">
+              <a:lnSpc>
+                <a:spcPct val="100000"/>
+              </a:lnSpc>
+              <a:spcBef>
+                <a:spcPts val="0"/>
+              </a:spcBef>
+              <a:spcAft>
+                <a:spcPts val="100"/>
+              </a:spcAft>
+            </a:pPr>
+            <a:r>
+              <a:rPr sz="950" b="1">
+                <a:solidFill>
+                  <a:srgbClr val="003D7A"/>
+                </a:solidFill>
+                <a:latin typeface="맑은 고딕"/>
+              </a:rPr>
+              <a:t>【내 계정 /admin/account】 이름·연락처·비밀번호 변경, OpenAI API 키·모델, 비밀번호 확인 후 탈퇴(비활성화)</a:t>
+            </a:r>
+          </a:p>
+          <a:p>
+            <a:pPr algn="l">
+              <a:lnSpc>
+                <a:spcPct val="100000"/>
+              </a:lnSpc>
+              <a:spcBef>
+                <a:spcPts val="0"/>
+              </a:spcBef>
+              <a:spcAft>
+                <a:spcPts val="100"/>
+              </a:spcAft>
+            </a:pPr>
+            <a:r>
+              <a:rPr sz="950" b="1">
+                <a:solidFill>
+                  <a:srgbClr val="003D7A"/>
+                </a:solidFill>
+                <a:latin typeface="맑은 고딕"/>
+              </a:rPr>
+              <a:t>【역할】 시스템관리자 · 사업장관리자 · 그룹장 · 파트장 · 시설담당자 · 정비섹션 · 운영지원섹션 · 금호시설섹션 · 백운시설섹션 · SDC섹션 · 해수담수섹션 · 협력사 · 외부업체 · 조회전용 (+ 관리자 추가 역할)</a:t>
+            </a:r>
+          </a:p>
+          <a:p>
+            <a:pPr algn="l">
+              <a:lnSpc>
+                <a:spcPct val="100000"/>
+              </a:lnSpc>
+              <a:spcBef>
+                <a:spcPts val="0"/>
+              </a:spcBef>
+              <a:spcAft>
+                <a:spcPts val="100"/>
+              </a:spcAft>
+            </a:pPr>
+            <a:r>
+              <a:rPr sz="950" b="1">
+                <a:solidFill>
+                  <a:srgbClr val="003D7A"/>
+                </a:solidFill>
+                <a:latin typeface="맑은 고딕"/>
+              </a:rPr>
+              <a:t>【CRUD】 등록(C)·수정(E)·삭제(D) — 역할 기본값 + 계정별 조정</a:t>
+            </a:r>
+          </a:p>
+          <a:p>
+            <a:pPr algn="l">
+              <a:lnSpc>
+                <a:spcPct val="100000"/>
+              </a:lnSpc>
+              <a:spcBef>
+                <a:spcPts val="0"/>
+              </a:spcBef>
+              <a:spcAft>
+                <a:spcPts val="100"/>
+              </a:spcAft>
+            </a:pPr>
+            <a:r>
+              <a:rPr sz="950" b="1">
+                <a:solidFill>
+                  <a:srgbClr val="003D7A"/>
+                </a:solidFill>
+                <a:latin typeface="맑은 고딕"/>
+              </a:rPr>
+              <a:t>【관리자 전용】 서버관리·계정관리 = 시스템관리자만 · 주요설비 일정·공지사항은 사이드바에서 관리자에게만 표시</a:t>
+            </a:r>
+          </a:p>
+          <a:p>
+            <a:pPr algn="l">
+              <a:lnSpc>
+                <a:spcPct val="100000"/>
+              </a:lnSpc>
+              <a:spcBef>
+                <a:spcPts val="0"/>
+              </a:spcBef>
+              <a:spcAft>
+                <a:spcPts val="100"/>
+              </a:spcAft>
+            </a:pPr>
+            <a:r>
+              <a:rPr sz="950" b="1">
+                <a:solidFill>
+                  <a:srgbClr val="003D7A"/>
+                </a:solidFill>
+                <a:latin typeface="맑은 고딕"/>
+              </a:rPr>
+              <a:t>【협력사/외부업체】 설비·PM·점검일지·작업허가·정비실적·가로등·자료실 기본 차단, 지정 협력사 건만 처리</a:t>
+            </a:r>
+          </a:p>
+          <a:p>
+            <a:pPr algn="l">
+              <a:lnSpc>
+                <a:spcPct val="100000"/>
+              </a:lnSpc>
+              <a:spcBef>
+                <a:spcPts val="0"/>
+              </a:spcBef>
+              <a:spcAft>
+                <a:spcPts val="100"/>
+              </a:spcAft>
+            </a:pPr>
+            <a:r>
+              <a:rPr sz="950" b="1">
+                <a:solidFill>
+                  <a:srgbClr val="003D7A"/>
+                </a:solidFill>
+                <a:latin typeface="맑은 고딕"/>
+              </a:rPr>
+              <a:t>【조회전용】 읽기만 가능, 등록·수정·삭제 불가</a:t>
+            </a:r>
+          </a:p>
+          <a:p>
+            <a:pPr algn="l">
+              <a:lnSpc>
+                <a:spcPct val="100000"/>
+              </a:lnSpc>
+              <a:spcBef>
+                <a:spcPts val="0"/>
+              </a:spcBef>
+              <a:spcAft>
+                <a:spcPts val="100"/>
+              </a:spcAft>
+            </a:pPr>
+            <a:r>
+              <a:rPr sz="950" b="1">
+                <a:solidFill>
+                  <a:srgbClr val="003D7A"/>
+                </a:solidFill>
+                <a:latin typeface="맑은 고딕"/>
+              </a:rPr>
+              <a:t>【내 건물 · 나의 협력사】 계정별 담당 건물·협력사를 지정하면 설비·PM·점검일지·정비관리 화면이 그 범위로 표시</a:t>
             </a:r>
           </a:p>
         </p:txBody>
@@ -5494,161 +5320,469 @@
                 </a:solidFill>
                 <a:latin typeface="맑은 고딕"/>
               </a:rPr>
-              <a:t>【설비 QR · 현장(로그인 불필요)】</a:t>
-            </a:r>
-          </a:p>
-          <a:p>
-            <a:pPr algn="l">
-              <a:lnSpc>
-                <a:spcPct val="100000"/>
-              </a:lnSpc>
-              <a:spcBef>
-                <a:spcPts val="0"/>
-              </a:spcBef>
-              <a:spcAft>
-                <a:spcPts val="100"/>
-              </a:spcAft>
-            </a:pPr>
-            <a:r>
-              <a:rPr sz="850" b="0">
-                <a:solidFill>
-                  <a:srgbClr val="222222"/>
-                </a:solidFill>
-                <a:latin typeface="맑은 고딕"/>
-              </a:rPr>
-              <a:t>설비 상세: {BASE}/eq/{설비코드}</a:t>
-            </a:r>
-          </a:p>
-          <a:p>
-            <a:pPr algn="l">
-              <a:lnSpc>
-                <a:spcPct val="100000"/>
-              </a:lnSpc>
-              <a:spcBef>
-                <a:spcPts val="0"/>
-              </a:spcBef>
-              <a:spcAft>
-                <a:spcPts val="100"/>
-              </a:spcAft>
-            </a:pPr>
-            <a:r>
-              <a:rPr sz="850" b="0">
-                <a:solidFill>
-                  <a:srgbClr val="222222"/>
-                </a:solidFill>
-                <a:latin typeface="맑은 고딕"/>
-              </a:rPr>
-              <a:t>→ 모바일: 설비정보·정비의뢰·PM점검·일지작성</a:t>
-            </a:r>
-          </a:p>
-          <a:p>
-            <a:pPr algn="l">
-              <a:lnSpc>
-                <a:spcPct val="100000"/>
-              </a:lnSpc>
-              <a:spcBef>
-                <a:spcPts val="0"/>
-              </a:spcBef>
-              <a:spcAft>
-                <a:spcPts val="100"/>
-              </a:spcAft>
-            </a:pPr>
-            <a:r>
-              <a:rPr sz="850" b="0">
-                <a:solidFill>
-                  <a:srgbClr val="222222"/>
-                </a:solidFill>
-                <a:latin typeface="맑은 고딕"/>
-              </a:rPr>
-              <a:t>점검일지 작성: {BASE}/eq/{코드}/log</a:t>
-            </a:r>
-          </a:p>
-          <a:p>
-            <a:pPr algn="l">
-              <a:lnSpc>
-                <a:spcPct val="100000"/>
-              </a:lnSpc>
-              <a:spcBef>
-                <a:spcPts val="0"/>
-              </a:spcBef>
-              <a:spcAft>
-                <a:spcPts val="100"/>
-              </a:spcAft>
-            </a:pPr>
-            <a:r>
-              <a:rPr sz="850" b="0">
-                <a:solidFill>
-                  <a:srgbClr val="222222"/>
-                </a:solidFill>
-                <a:latin typeface="맑은 고딕"/>
-              </a:rPr>
-              <a:t>→ save/cursor/unlock/heartbeat API 지원</a:t>
-            </a:r>
-          </a:p>
-          <a:p>
-            <a:pPr algn="l">
-              <a:lnSpc>
-                <a:spcPct val="100000"/>
-              </a:lnSpc>
-              <a:spcBef>
-                <a:spcPts val="0"/>
-              </a:spcBef>
-              <a:spcAft>
-                <a:spcPts val="100"/>
-              </a:spcAft>
-            </a:pPr>
-            <a:r>
-              <a:rPr sz="850" b="0">
-                <a:solidFill>
-                  <a:srgbClr val="222222"/>
-                </a:solidFill>
-                <a:latin typeface="맑은 고딕"/>
-              </a:rPr>
-              <a:t>PM 현장점검: POST /eq/{코드}/pm-inspect (고장→정비의뢰)</a:t>
-            </a:r>
-          </a:p>
-          <a:p>
-            <a:pPr algn="l">
-              <a:lnSpc>
-                <a:spcPct val="100000"/>
-              </a:lnSpc>
-              <a:spcBef>
-                <a:spcPts val="0"/>
-              </a:spcBef>
-              <a:spcAft>
-                <a:spcPts val="100"/>
-              </a:spcAft>
-            </a:pPr>
-            <a:r>
-              <a:rPr sz="950" b="1">
-                <a:solidFill>
-                  <a:srgbClr val="003D7A"/>
-                </a:solidFill>
-                <a:latin typeface="맑은 고딕"/>
-              </a:rPr>
-              <a:t>【환경설정】 PUBLIC_BASE_URL = QR 도메인 고정(배포 URL과 일치 권장)</a:t>
-            </a:r>
-          </a:p>
-          <a:p>
-            <a:pPr algn="l">
-              <a:lnSpc>
-                <a:spcPct val="100000"/>
-              </a:lnSpc>
-              <a:spcBef>
-                <a:spcPts val="0"/>
-              </a:spcBef>
-              <a:spcAft>
-                <a:spcPts val="100"/>
-              </a:spcAft>
-            </a:pPr>
-            <a:r>
-              <a:rPr sz="950" b="1">
-                <a:solidFill>
-                  <a:srgbClr val="003D7A"/>
-                </a:solidFill>
-                <a:latin typeface="맑은 고딕"/>
-              </a:rPr>
-              <a:t>【백업 포함】 설비현황·설비상세 엑셀은 서버 ZIP 백업 excel/ 폴더에 포함</a:t>
+              <a:t>【메뉴 — PC 사이드바 (상단 명칭: 시설관리실 DX 시스템)】</a:t>
+            </a:r>
+          </a:p>
+          <a:p>
+            <a:pPr algn="l">
+              <a:lnSpc>
+                <a:spcPct val="100000"/>
+              </a:lnSpc>
+              <a:spcBef>
+                <a:spcPts val="0"/>
+              </a:spcBef>
+              <a:spcAft>
+                <a:spcPts val="100"/>
+              </a:spcAft>
+            </a:pPr>
+            <a:r>
+              <a:rPr sz="850" b="0">
+                <a:solidFill>
+                  <a:srgbClr val="222222"/>
+                </a:solidFill>
+                <a:latin typeface="맑은 고딕"/>
+              </a:rPr>
+              <a:t>대시보드 /admin/dashboard</a:t>
+            </a:r>
+          </a:p>
+          <a:p>
+            <a:pPr algn="l">
+              <a:lnSpc>
+                <a:spcPct val="100000"/>
+              </a:lnSpc>
+              <a:spcBef>
+                <a:spcPts val="0"/>
+              </a:spcBef>
+              <a:spcAft>
+                <a:spcPts val="100"/>
+              </a:spcAft>
+            </a:pPr>
+            <a:r>
+              <a:rPr sz="850" b="0">
+                <a:solidFill>
+                  <a:srgbClr val="222222"/>
+                </a:solidFill>
+                <a:latin typeface="맑은 고딕"/>
+              </a:rPr>
+              <a:t>주요설비 일정 /admin/schedules · 공지사항 /admin/notices (관리자)</a:t>
+            </a:r>
+          </a:p>
+          <a:p>
+            <a:pPr algn="l">
+              <a:lnSpc>
+                <a:spcPct val="100000"/>
+              </a:lnSpc>
+              <a:spcBef>
+                <a:spcPts val="0"/>
+              </a:spcBef>
+              <a:spcAft>
+                <a:spcPts val="100"/>
+              </a:spcAft>
+            </a:pPr>
+            <a:r>
+              <a:rPr sz="850" b="0">
+                <a:solidFill>
+                  <a:srgbClr val="222222"/>
+                </a:solidFill>
+                <a:latin typeface="맑은 고딕"/>
+              </a:rPr>
+              <a:t>사업장/건물 /admin/sites (사업장별 펼침)</a:t>
+            </a:r>
+          </a:p>
+          <a:p>
+            <a:pPr algn="l">
+              <a:lnSpc>
+                <a:spcPct val="100000"/>
+              </a:lnSpc>
+              <a:spcBef>
+                <a:spcPts val="0"/>
+              </a:spcBef>
+              <a:spcAft>
+                <a:spcPts val="100"/>
+              </a:spcAft>
+            </a:pPr>
+            <a:r>
+              <a:rPr sz="850" b="0">
+                <a:solidFill>
+                  <a:srgbClr val="222222"/>
+                </a:solidFill>
+                <a:latin typeface="맑은 고딕"/>
+              </a:rPr>
+              <a:t>설비관리 /admin/equipment (사업장 → 건물 중첩 펼침)</a:t>
+            </a:r>
+          </a:p>
+          <a:p>
+            <a:pPr algn="l">
+              <a:lnSpc>
+                <a:spcPct val="100000"/>
+              </a:lnSpc>
+              <a:spcBef>
+                <a:spcPts val="0"/>
+              </a:spcBef>
+              <a:spcAft>
+                <a:spcPts val="100"/>
+              </a:spcAft>
+            </a:pPr>
+            <a:r>
+              <a:rPr sz="850" b="0">
+                <a:solidFill>
+                  <a:srgbClr val="222222"/>
+                </a:solidFill>
+                <a:latin typeface="맑은 고딕"/>
+              </a:rPr>
+              <a:t>점검(PM) /admin/pm</a:t>
+            </a:r>
+          </a:p>
+          <a:p>
+            <a:pPr algn="l">
+              <a:lnSpc>
+                <a:spcPct val="100000"/>
+              </a:lnSpc>
+              <a:spcBef>
+                <a:spcPts val="0"/>
+              </a:spcBef>
+              <a:spcAft>
+                <a:spcPts val="100"/>
+              </a:spcAft>
+            </a:pPr>
+            <a:r>
+              <a:rPr sz="850" b="0">
+                <a:solidFill>
+                  <a:srgbClr val="222222"/>
+                </a:solidFill>
+                <a:latin typeface="맑은 고딕"/>
+              </a:rPr>
+              <a:t>점검일지 /admin/inspection-logs2 (구 점검일지2, 구 점검일지1 메뉴는 제거)</a:t>
+            </a:r>
+          </a:p>
+          <a:p>
+            <a:pPr algn="l">
+              <a:lnSpc>
+                <a:spcPct val="100000"/>
+              </a:lnSpc>
+              <a:spcBef>
+                <a:spcPts val="0"/>
+              </a:spcBef>
+              <a:spcAft>
+                <a:spcPts val="100"/>
+              </a:spcAft>
+            </a:pPr>
+            <a:r>
+              <a:rPr sz="850" b="0">
+                <a:solidFill>
+                  <a:srgbClr val="222222"/>
+                </a:solidFill>
+                <a:latin typeface="맑은 고딕"/>
+              </a:rPr>
+              <a:t>정비관리 /admin/maintenance/dashboard — 누르면 대시보드 + 하위메뉴 펼침</a:t>
+            </a:r>
+          </a:p>
+          <a:p>
+            <a:pPr algn="l">
+              <a:lnSpc>
+                <a:spcPct val="100000"/>
+              </a:lnSpc>
+              <a:spcBef>
+                <a:spcPts val="0"/>
+              </a:spcBef>
+              <a:spcAft>
+                <a:spcPts val="100"/>
+              </a:spcAft>
+            </a:pPr>
+            <a:r>
+              <a:rPr sz="850" b="0">
+                <a:solidFill>
+                  <a:srgbClr val="222222"/>
+                </a:solidFill>
+                <a:latin typeface="맑은 고딕"/>
+              </a:rPr>
+              <a:t>정비접수/승인 /admin/work-orders</a:t>
+            </a:r>
+          </a:p>
+          <a:p>
+            <a:pPr algn="l">
+              <a:lnSpc>
+                <a:spcPct val="100000"/>
+              </a:lnSpc>
+              <a:spcBef>
+                <a:spcPts val="0"/>
+              </a:spcBef>
+              <a:spcAft>
+                <a:spcPts val="100"/>
+              </a:spcAft>
+            </a:pPr>
+            <a:r>
+              <a:rPr sz="850" b="0">
+                <a:solidFill>
+                  <a:srgbClr val="222222"/>
+                </a:solidFill>
+                <a:latin typeface="맑은 고딕"/>
+              </a:rPr>
+              <a:t>정비 List(D-1) /admin/d1 (협력사별 하위메뉴)</a:t>
+            </a:r>
+          </a:p>
+          <a:p>
+            <a:pPr algn="l">
+              <a:lnSpc>
+                <a:spcPct val="100000"/>
+              </a:lnSpc>
+              <a:spcBef>
+                <a:spcPts val="0"/>
+              </a:spcBef>
+              <a:spcAft>
+                <a:spcPts val="100"/>
+              </a:spcAft>
+            </a:pPr>
+            <a:r>
+              <a:rPr sz="850" b="0">
+                <a:solidFill>
+                  <a:srgbClr val="222222"/>
+                </a:solidFill>
+                <a:latin typeface="맑은 고딕"/>
+              </a:rPr>
+              <a:t>작업허가/승인 /admin/facility-section</a:t>
+            </a:r>
+          </a:p>
+          <a:p>
+            <a:pPr algn="l">
+              <a:lnSpc>
+                <a:spcPct val="100000"/>
+              </a:lnSpc>
+              <a:spcBef>
+                <a:spcPts val="0"/>
+              </a:spcBef>
+              <a:spcAft>
+                <a:spcPts val="100"/>
+              </a:spcAft>
+            </a:pPr>
+            <a:r>
+              <a:rPr sz="850" b="0">
+                <a:solidFill>
+                  <a:srgbClr val="222222"/>
+                </a:solidFill>
+                <a:latin typeface="맑은 고딕"/>
+              </a:rPr>
+              <a:t>정비완료 최종승인 /admin/maintenance-final-approvals</a:t>
+            </a:r>
+          </a:p>
+          <a:p>
+            <a:pPr algn="l">
+              <a:lnSpc>
+                <a:spcPct val="100000"/>
+              </a:lnSpc>
+              <a:spcBef>
+                <a:spcPts val="0"/>
+              </a:spcBef>
+              <a:spcAft>
+                <a:spcPts val="100"/>
+              </a:spcAft>
+            </a:pPr>
+            <a:r>
+              <a:rPr sz="850" b="0">
+                <a:solidFill>
+                  <a:srgbClr val="222222"/>
+                </a:solidFill>
+                <a:latin typeface="맑은 고딕"/>
+              </a:rPr>
+              <a:t>정비실적(변동비) /admin/maintenance-performance</a:t>
+            </a:r>
+          </a:p>
+          <a:p>
+            <a:pPr algn="l">
+              <a:lnSpc>
+                <a:spcPct val="100000"/>
+              </a:lnSpc>
+              <a:spcBef>
+                <a:spcPts val="0"/>
+              </a:spcBef>
+              <a:spcAft>
+                <a:spcPts val="100"/>
+              </a:spcAft>
+            </a:pPr>
+            <a:r>
+              <a:rPr sz="850" b="0">
+                <a:solidFill>
+                  <a:srgbClr val="222222"/>
+                </a:solidFill>
+                <a:latin typeface="맑은 고딕"/>
+              </a:rPr>
+              <a:t>가로등 /admin/streetlamp/requests</a:t>
+            </a:r>
+          </a:p>
+          <a:p>
+            <a:pPr algn="l">
+              <a:lnSpc>
+                <a:spcPct val="100000"/>
+              </a:lnSpc>
+              <a:spcBef>
+                <a:spcPts val="0"/>
+              </a:spcBef>
+              <a:spcAft>
+                <a:spcPts val="100"/>
+              </a:spcAft>
+            </a:pPr>
+            <a:r>
+              <a:rPr sz="850" b="0">
+                <a:solidFill>
+                  <a:srgbClr val="222222"/>
+                </a:solidFill>
+                <a:latin typeface="맑은 고딕"/>
+              </a:rPr>
+              <a:t>AI 분석 /admin/ai-analysis</a:t>
+            </a:r>
+          </a:p>
+          <a:p>
+            <a:pPr algn="l">
+              <a:lnSpc>
+                <a:spcPct val="100000"/>
+              </a:lnSpc>
+              <a:spcBef>
+                <a:spcPts val="0"/>
+              </a:spcBef>
+              <a:spcAft>
+                <a:spcPts val="100"/>
+              </a:spcAft>
+            </a:pPr>
+            <a:r>
+              <a:rPr sz="850" b="0">
+                <a:solidFill>
+                  <a:srgbClr val="222222"/>
+                </a:solidFill>
+                <a:latin typeface="맑은 고딕"/>
+              </a:rPr>
+              <a:t>위험성평가 /admin/risk-assessment</a:t>
+            </a:r>
+          </a:p>
+          <a:p>
+            <a:pPr algn="l">
+              <a:lnSpc>
+                <a:spcPct val="100000"/>
+              </a:lnSpc>
+              <a:spcBef>
+                <a:spcPts val="0"/>
+              </a:spcBef>
+              <a:spcAft>
+                <a:spcPts val="100"/>
+              </a:spcAft>
+            </a:pPr>
+            <a:r>
+              <a:rPr sz="850" b="0">
+                <a:solidFill>
+                  <a:srgbClr val="222222"/>
+                </a:solidFill>
+                <a:latin typeface="맑은 고딕"/>
+              </a:rPr>
+              <a:t>자재관리 /admin/materials</a:t>
+            </a:r>
+          </a:p>
+          <a:p>
+            <a:pPr algn="l">
+              <a:lnSpc>
+                <a:spcPct val="100000"/>
+              </a:lnSpc>
+              <a:spcBef>
+                <a:spcPts val="0"/>
+              </a:spcBef>
+              <a:spcAft>
+                <a:spcPts val="100"/>
+              </a:spcAft>
+            </a:pPr>
+            <a:r>
+              <a:rPr sz="850" b="0">
+                <a:solidFill>
+                  <a:srgbClr val="222222"/>
+                </a:solidFill>
+                <a:latin typeface="맑은 고딕"/>
+              </a:rPr>
+              <a:t>자료실 /admin/library</a:t>
+            </a:r>
+          </a:p>
+          <a:p>
+            <a:pPr algn="l">
+              <a:lnSpc>
+                <a:spcPct val="100000"/>
+              </a:lnSpc>
+              <a:spcBef>
+                <a:spcPts val="0"/>
+              </a:spcBef>
+              <a:spcAft>
+                <a:spcPts val="100"/>
+              </a:spcAft>
+            </a:pPr>
+            <a:r>
+              <a:rPr sz="850" b="0">
+                <a:solidFill>
+                  <a:srgbClr val="222222"/>
+                </a:solidFill>
+                <a:latin typeface="맑은 고딕"/>
+              </a:rPr>
+              <a:t>협력사 /admin/partners</a:t>
+            </a:r>
+          </a:p>
+          <a:p>
+            <a:pPr algn="l">
+              <a:lnSpc>
+                <a:spcPct val="100000"/>
+              </a:lnSpc>
+              <a:spcBef>
+                <a:spcPts val="0"/>
+              </a:spcBef>
+              <a:spcAft>
+                <a:spcPts val="100"/>
+              </a:spcAft>
+            </a:pPr>
+            <a:r>
+              <a:rPr sz="850" b="0">
+                <a:solidFill>
+                  <a:srgbClr val="222222"/>
+                </a:solidFill>
+                <a:latin typeface="맑은 고딕"/>
+              </a:rPr>
+              <a:t>서버관리 /admin/server · 계정관리 /admin/users (관리자)</a:t>
+            </a:r>
+          </a:p>
+          <a:p>
+            <a:pPr algn="l">
+              <a:lnSpc>
+                <a:spcPct val="100000"/>
+              </a:lnSpc>
+              <a:spcBef>
+                <a:spcPts val="0"/>
+              </a:spcBef>
+              <a:spcAft>
+                <a:spcPts val="100"/>
+              </a:spcAft>
+            </a:pPr>
+            <a:r>
+              <a:rPr sz="850" b="0">
+                <a:solidFill>
+                  <a:srgbClr val="222222"/>
+                </a:solidFill>
+                <a:latin typeface="맑은 고딕"/>
+              </a:rPr>
+              <a:t>※ 메뉴 접근은 역할 기본값 + 계정별 메뉴 권한(개별·일괄 변경)</a:t>
+            </a:r>
+          </a:p>
+          <a:p>
+            <a:pPr algn="l">
+              <a:lnSpc>
+                <a:spcPct val="100000"/>
+              </a:lnSpc>
+              <a:spcBef>
+                <a:spcPts val="0"/>
+              </a:spcBef>
+              <a:spcAft>
+                <a:spcPts val="100"/>
+              </a:spcAft>
+            </a:pPr>
+            <a:r>
+              <a:rPr sz="850" b="0">
+                <a:solidFill>
+                  <a:srgbClr val="222222"/>
+                </a:solidFill>
+                <a:latin typeface="맑은 고딕"/>
+              </a:rPr>
+              <a:t>※ 정비관리 메뉴에 신규 건수 배지 — 새로고침 없이 자동 갱신</a:t>
             </a:r>
           </a:p>
         </p:txBody>
@@ -5683,7 +5817,7 @@
                 </a:solidFill>
                 <a:latin typeface="맑은 고딕"/>
               </a:rPr>
-              <a:t>4 / 10</a:t>
+              <a:t>2 / 12</a:t>
             </a:r>
           </a:p>
         </p:txBody>
@@ -5696,7 +5830,7 @@
 </p:sld>
 </file>
 
-<file path=ppt/slides/slide5.xml><?xml version="1.0" encoding="utf-8"?>
+<file path=ppt/slides/slide3.xml><?xml version="1.0" encoding="utf-8"?>
 <p:sld xmlns:a="http://schemas.openxmlformats.org/drawingml/2006/main" xmlns:p="http://schemas.openxmlformats.org/presentationml/2006/main" xmlns:r="http://schemas.openxmlformats.org/officeDocument/2006/relationships">
   <p:cSld>
     <p:spTree>
@@ -5779,7 +5913,7 @@
                 </a:solidFill>
                 <a:latin typeface="맑은 고딕"/>
               </a:rPr>
-              <a:t>04  점검(PM) · 점검일지1</a:t>
+              <a:t>02  대시보드 · 일정 · 공지</a:t>
             </a:r>
           </a:p>
         </p:txBody>
@@ -5824,117 +5958,205 @@
                 </a:solidFill>
                 <a:latin typeface="맑은 고딕"/>
               </a:rPr>
-              <a:t>【점검(PM) /admin/pm】</a:t>
-            </a:r>
-          </a:p>
-          <a:p>
-            <a:pPr algn="l">
-              <a:lnSpc>
-                <a:spcPct val="100000"/>
-              </a:lnSpc>
-              <a:spcBef>
-                <a:spcPts val="0"/>
-              </a:spcBef>
-              <a:spcAft>
-                <a:spcPts val="100"/>
-              </a:spcAft>
-            </a:pPr>
-            <a:r>
-              <a:rPr sz="850" b="0">
-                <a:solidFill>
-                  <a:srgbClr val="222222"/>
-                </a:solidFill>
-                <a:latin typeface="맑은 고딕"/>
-              </a:rPr>
-              <a:t>일정 등록: 매일/매주/매월/분기/반기/연간/사용자정의</a:t>
-            </a:r>
-          </a:p>
-          <a:p>
-            <a:pPr algn="l">
-              <a:lnSpc>
-                <a:spcPct val="100000"/>
-              </a:lnSpc>
-              <a:spcBef>
-                <a:spcPts val="0"/>
-              </a:spcBef>
-              <a:spcAft>
-                <a:spcPts val="100"/>
-              </a:spcAft>
-            </a:pPr>
-            <a:r>
-              <a:rPr sz="850" b="0">
-                <a:solidFill>
-                  <a:srgbClr val="222222"/>
-                </a:solidFill>
-                <a:latin typeface="맑은 고딕"/>
-              </a:rPr>
-              <a:t>점검 실행 POST .../schedules/{id}/inspect → 정상/주의/고장</a:t>
-            </a:r>
-          </a:p>
-          <a:p>
-            <a:pPr algn="l">
-              <a:lnSpc>
-                <a:spcPct val="100000"/>
-              </a:lnSpc>
-              <a:spcBef>
-                <a:spcPts val="0"/>
-              </a:spcBef>
-              <a:spcAft>
-                <a:spcPts val="100"/>
-              </a:spcAft>
-            </a:pPr>
-            <a:r>
-              <a:rPr sz="850" b="0">
-                <a:solidFill>
-                  <a:srgbClr val="222222"/>
-                </a:solidFill>
-                <a:latin typeface="맑은 고딕"/>
-              </a:rPr>
-              <a:t>지연·기한 필터 · 엑셀 Export /admin/pm/export</a:t>
-            </a:r>
-          </a:p>
-          <a:p>
-            <a:pPr algn="l">
-              <a:lnSpc>
-                <a:spcPct val="100000"/>
-              </a:lnSpc>
-              <a:spcBef>
-                <a:spcPts val="0"/>
-              </a:spcBef>
-              <a:spcAft>
-                <a:spcPts val="100"/>
-              </a:spcAft>
-            </a:pPr>
-            <a:r>
-              <a:rPr sz="850" b="0">
-                <a:solidFill>
-                  <a:srgbClr val="222222"/>
-                </a:solidFill>
-                <a:latin typeface="맑은 고딕"/>
-              </a:rPr>
-              <a:t>QR 현장: /eq/{코드} → PM 점검, 고장 시 정비의뢰 자동 연계 가능</a:t>
-            </a:r>
-          </a:p>
-          <a:p>
-            <a:pPr algn="l">
-              <a:lnSpc>
-                <a:spcPct val="100000"/>
-              </a:lnSpc>
-              <a:spcBef>
-                <a:spcPts val="0"/>
-              </a:spcBef>
-              <a:spcAft>
-                <a:spcPts val="100"/>
-              </a:spcAft>
-            </a:pPr>
-            <a:r>
-              <a:rPr sz="850" b="0">
-                <a:solidFill>
-                  <a:srgbClr val="222222"/>
-                </a:solidFill>
-                <a:latin typeface="맑은 고딕"/>
-              </a:rPr>
-              <a:t>설비 상세·PM 메뉴 양쪽에서 일정 등록 가능</a:t>
+              <a:t>【광양운영그룹 대시보드 /admin/dashboard】</a:t>
+            </a:r>
+          </a:p>
+          <a:p>
+            <a:pPr algn="l">
+              <a:lnSpc>
+                <a:spcPct val="100000"/>
+              </a:lnSpc>
+              <a:spcBef>
+                <a:spcPts val="0"/>
+              </a:spcBef>
+              <a:spcAft>
+                <a:spcPts val="100"/>
+              </a:spcAft>
+            </a:pPr>
+            <a:r>
+              <a:rPr sz="850" b="0">
+                <a:solidFill>
+                  <a:srgbClr val="222222"/>
+                </a:solidFill>
+                <a:latin typeface="맑은 고딕"/>
+              </a:rPr>
+              <a:t>PC 모니터 한 화면 구성 · 위젯별 ON/OFF · 순서 조정</a:t>
+            </a:r>
+          </a:p>
+          <a:p>
+            <a:pPr algn="l">
+              <a:lnSpc>
+                <a:spcPct val="100000"/>
+              </a:lnSpc>
+              <a:spcBef>
+                <a:spcPts val="0"/>
+              </a:spcBef>
+              <a:spcAft>
+                <a:spcPts val="100"/>
+              </a:spcAft>
+            </a:pPr>
+            <a:r>
+              <a:rPr sz="850" b="0">
+                <a:solidFill>
+                  <a:srgbClr val="222222"/>
+                </a:solidFill>
+                <a:latin typeface="맑은 고딕"/>
+              </a:rPr>
+              <a:t>KPI: 사업장·건물·설비 수, PM 지연, 정비의뢰·긴급정비·오늘작업 (숫자 = 클릭 시 목록과 동일 기준)</a:t>
+            </a:r>
+          </a:p>
+          <a:p>
+            <a:pPr algn="l">
+              <a:lnSpc>
+                <a:spcPct val="100000"/>
+              </a:lnSpc>
+              <a:spcBef>
+                <a:spcPts val="0"/>
+              </a:spcBef>
+              <a:spcAft>
+                <a:spcPts val="100"/>
+              </a:spcAft>
+            </a:pPr>
+            <a:r>
+              <a:rPr sz="850" b="0">
+                <a:solidFill>
+                  <a:srgbClr val="222222"/>
+                </a:solidFill>
+                <a:latin typeface="맑은 고딕"/>
+              </a:rPr>
+              <a:t>사업장 현황: 등록된 전체 사업장 카드(사진·요약) · 표시 항목(시설/설비/정비의뢰/미해결/완료) 설정 · 사업장명 클릭 → 안내도</a:t>
+            </a:r>
+          </a:p>
+          <a:p>
+            <a:pPr algn="l">
+              <a:lnSpc>
+                <a:spcPct val="100000"/>
+              </a:lnSpc>
+              <a:spcBef>
+                <a:spcPts val="0"/>
+              </a:spcBef>
+              <a:spcAft>
+                <a:spcPts val="100"/>
+              </a:spcAft>
+            </a:pPr>
+            <a:r>
+              <a:rPr sz="850" b="0">
+                <a:solidFill>
+                  <a:srgbClr val="222222"/>
+                </a:solidFill>
+                <a:latin typeface="맑은 고딕"/>
+              </a:rPr>
+              <a:t>설비 상태 현황: 점검(PM) 결과로 정상·주의·고장·정비중 집계 → 클릭 시 해당 설비 목록 /admin/dashboard/equipment-health</a:t>
+            </a:r>
+          </a:p>
+          <a:p>
+            <a:pPr algn="l">
+              <a:lnSpc>
+                <a:spcPct val="100000"/>
+              </a:lnSpc>
+              <a:spcBef>
+                <a:spcPts val="0"/>
+              </a:spcBef>
+              <a:spcAft>
+                <a:spcPts val="100"/>
+              </a:spcAft>
+            </a:pPr>
+            <a:r>
+              <a:rPr sz="850" b="0">
+                <a:solidFill>
+                  <a:srgbClr val="222222"/>
+                </a:solidFill>
+                <a:latin typeface="맑은 고딕"/>
+              </a:rPr>
+              <a:t>전력사용량(탭 전환형): 주택변전소 TR 3대(kWh·A·부하율) · 제철소본부 수전 · 중앙관제실 전일 전력 — 기준일·추세 기간 제목 표시</a:t>
+            </a:r>
+          </a:p>
+          <a:p>
+            <a:pPr algn="l">
+              <a:lnSpc>
+                <a:spcPct val="100000"/>
+              </a:lnSpc>
+              <a:spcBef>
+                <a:spcPts val="0"/>
+              </a:spcBef>
+              <a:spcAft>
+                <a:spcPts val="100"/>
+              </a:spcAft>
+            </a:pPr>
+            <a:r>
+              <a:rPr sz="850" b="0">
+                <a:solidFill>
+                  <a:srgbClr val="222222"/>
+                </a:solidFill>
+                <a:latin typeface="맑은 고딕"/>
+              </a:rPr>
+              <a:t>실시간 접속 현황: 현재 접속 중인 사용자</a:t>
+            </a:r>
+          </a:p>
+          <a:p>
+            <a:pPr algn="l">
+              <a:lnSpc>
+                <a:spcPct val="100000"/>
+              </a:lnSpc>
+              <a:spcBef>
+                <a:spcPts val="0"/>
+              </a:spcBef>
+              <a:spcAft>
+                <a:spcPts val="100"/>
+              </a:spcAft>
+            </a:pPr>
+            <a:r>
+              <a:rPr sz="850" b="0">
+                <a:solidFill>
+                  <a:srgbClr val="222222"/>
+                </a:solidFill>
+                <a:latin typeface="맑은 고딕"/>
+              </a:rPr>
+              <a:t>정비의뢰 현황 · 오늘 일정 · 공지(본문 바로 보기, 카드에서 바로 수정)</a:t>
+            </a:r>
+          </a:p>
+          <a:p>
+            <a:pPr algn="l">
+              <a:lnSpc>
+                <a:spcPct val="100000"/>
+              </a:lnSpc>
+              <a:spcBef>
+                <a:spcPts val="0"/>
+              </a:spcBef>
+              <a:spcAft>
+                <a:spcPts val="100"/>
+              </a:spcAft>
+            </a:pPr>
+            <a:r>
+              <a:rPr sz="950" b="1">
+                <a:solidFill>
+                  <a:srgbClr val="003D7A"/>
+                </a:solidFill>
+                <a:latin typeface="맑은 고딕"/>
+              </a:rPr>
+              <a:t>【대시보드 설정 — 시스템관리자만】</a:t>
+            </a:r>
+          </a:p>
+          <a:p>
+            <a:pPr algn="l">
+              <a:lnSpc>
+                <a:spcPct val="100000"/>
+              </a:lnSpc>
+              <a:spcBef>
+                <a:spcPts val="0"/>
+              </a:spcBef>
+              <a:spcAft>
+                <a:spcPts val="100"/>
+              </a:spcAft>
+            </a:pPr>
+            <a:r>
+              <a:rPr sz="850" b="0">
+                <a:solidFill>
+                  <a:srgbClr val="222222"/>
+                </a:solidFill>
+                <a:latin typeface="맑은 고딕"/>
+              </a:rPr>
+              <a:t>화면 구성(새 대시보드 / 기존 운영 보드) 선택 · 위젯 표시 · 사업장 순서·아이콘 사진 개별 변경</a:t>
             </a:r>
           </a:p>
         </p:txBody>
@@ -5979,95 +6201,51 @@
                 </a:solidFill>
                 <a:latin typeface="맑은 고딕"/>
               </a:rPr>
-              <a:t>【점검일지1 — 엑셀 /admin/inspection-logs】</a:t>
-            </a:r>
-          </a:p>
-          <a:p>
-            <a:pPr algn="l">
-              <a:lnSpc>
-                <a:spcPct val="100000"/>
-              </a:lnSpc>
-              <a:spcBef>
-                <a:spcPts val="0"/>
-              </a:spcBef>
-              <a:spcAft>
-                <a:spcPts val="100"/>
-              </a:spcAft>
-            </a:pPr>
-            <a:r>
-              <a:rPr sz="850" b="0">
-                <a:solidFill>
-                  <a:srgbClr val="222222"/>
-                </a:solidFill>
-                <a:latin typeface="맑은 고딕"/>
-              </a:rPr>
-              <a:t>건물별 점검일지 등록 → 엑셀 업로드</a:t>
-            </a:r>
-          </a:p>
-          <a:p>
-            <a:pPr algn="l">
-              <a:lnSpc>
-                <a:spcPct val="100000"/>
-              </a:lnSpc>
-              <a:spcBef>
-                <a:spcPts val="0"/>
-              </a:spcBef>
-              <a:spcAft>
-                <a:spcPts val="100"/>
-              </a:spcAft>
-            </a:pPr>
-            <a:r>
-              <a:rPr sz="850" b="0">
-                <a:solidFill>
-                  <a:srgbClr val="222222"/>
-                </a:solidFill>
-                <a:latin typeface="맑은 고딕"/>
-              </a:rPr>
-              <a:t>OnlyOffice 또는 레거시 편집기 웹 편집</a:t>
-            </a:r>
-          </a:p>
-          <a:p>
-            <a:pPr algn="l">
-              <a:lnSpc>
-                <a:spcPct val="100000"/>
-              </a:lnSpc>
-              <a:spcBef>
-                <a:spcPts val="0"/>
-              </a:spcBef>
-              <a:spcAft>
-                <a:spcPts val="100"/>
-              </a:spcAft>
-            </a:pPr>
-            <a:r>
-              <a:rPr sz="850" b="0">
-                <a:solidFill>
-                  <a:srgbClr val="222222"/>
-                </a:solidFill>
-                <a:latin typeface="맑은 고딕"/>
-              </a:rPr>
-              <a:t>QR 일지: {BASE}/eq/{코드}/log (설비 QR와 동일 경로)</a:t>
-            </a:r>
-          </a:p>
-          <a:p>
-            <a:pPr algn="l">
-              <a:lnSpc>
-                <a:spcPct val="100000"/>
-              </a:lnSpc>
-              <a:spcBef>
-                <a:spcPts val="0"/>
-              </a:spcBef>
-              <a:spcAft>
-                <a:spcPts val="100"/>
-              </a:spcAft>
-            </a:pPr>
-            <a:r>
-              <a:rPr sz="850" b="0">
-                <a:solidFill>
-                  <a:srgbClr val="222222"/>
-                </a:solidFill>
-                <a:latin typeface="맑은 고딕"/>
-              </a:rPr>
-              <a:t>건물 add/remove 시 invalidate_nav_cache → 사이드바 즉시 반영</a:t>
+              <a:t>【주요설비 일정 /admin/schedules】</a:t>
+            </a:r>
+          </a:p>
+          <a:p>
+            <a:pPr algn="l">
+              <a:lnSpc>
+                <a:spcPct val="100000"/>
+              </a:lnSpc>
+              <a:spcBef>
+                <a:spcPts val="0"/>
+              </a:spcBef>
+              <a:spcAft>
+                <a:spcPts val="100"/>
+              </a:spcAft>
+            </a:pPr>
+            <a:r>
+              <a:rPr sz="850" b="0">
+                <a:solidFill>
+                  <a:srgbClr val="222222"/>
+                </a:solidFill>
+                <a:latin typeface="맑은 고딕"/>
+              </a:rPr>
+              <a:t>월 캘린더 등록·삭제 · 이전/다음 달 이동 · 카테고리: 긴급/점검/작업/검수</a:t>
+            </a:r>
+          </a:p>
+          <a:p>
+            <a:pPr algn="l">
+              <a:lnSpc>
+                <a:spcPct val="100000"/>
+              </a:lnSpc>
+              <a:spcBef>
+                <a:spcPts val="0"/>
+              </a:spcBef>
+              <a:spcAft>
+                <a:spcPts val="100"/>
+              </a:spcAft>
+            </a:pPr>
+            <a:r>
+              <a:rPr sz="850" b="0">
+                <a:solidFill>
+                  <a:srgbClr val="222222"/>
+                </a:solidFill>
+                <a:latin typeface="맑은 고딕"/>
+              </a:rPr>
+              <a:t>대시보드 「오늘 일정」 위젯과 연동</a:t>
             </a:r>
           </a:p>
           <a:p>
@@ -6089,29 +6267,139 @@
                 </a:solidFill>
                 <a:latin typeface="맑은 고딕"/>
               </a:rPr>
-              <a:t>【점검일지1 vs 2】</a:t>
-            </a:r>
-          </a:p>
-          <a:p>
-            <a:pPr algn="l">
-              <a:lnSpc>
-                <a:spcPct val="100000"/>
-              </a:lnSpc>
-              <a:spcBef>
-                <a:spcPts val="0"/>
-              </a:spcBef>
-              <a:spcAft>
-                <a:spcPts val="100"/>
-              </a:spcAft>
-            </a:pPr>
-            <a:r>
-              <a:rPr sz="850" b="0">
-                <a:solidFill>
-                  <a:srgbClr val="222222"/>
-                </a:solidFill>
-                <a:latin typeface="맑은 고딕"/>
-              </a:rPr>
-              <a:t>1=건물별 엑셀 파일·OnlyOffice / 2=건물명 유형별 웹폼·자동집계·QR 1일입력</a:t>
+              <a:t>【공지사항 /admin/notices】</a:t>
+            </a:r>
+          </a:p>
+          <a:p>
+            <a:pPr algn="l">
+              <a:lnSpc>
+                <a:spcPct val="100000"/>
+              </a:lnSpc>
+              <a:spcBef>
+                <a:spcPts val="0"/>
+              </a:spcBef>
+              <a:spcAft>
+                <a:spcPts val="100"/>
+              </a:spcAft>
+            </a:pPr>
+            <a:r>
+              <a:rPr sz="850" b="0">
+                <a:solidFill>
+                  <a:srgbClr val="222222"/>
+                </a:solidFill>
+                <a:latin typeface="맑은 고딕"/>
+              </a:rPr>
+              <a:t>등록·삭제·수정(삭제 없이 바로 정정) · 카테고리: 긴급/안전/일반</a:t>
+            </a:r>
+          </a:p>
+          <a:p>
+            <a:pPr algn="l">
+              <a:lnSpc>
+                <a:spcPct val="100000"/>
+              </a:lnSpc>
+              <a:spcBef>
+                <a:spcPts val="0"/>
+              </a:spcBef>
+              <a:spcAft>
+                <a:spcPts val="100"/>
+              </a:spcAft>
+            </a:pPr>
+            <a:r>
+              <a:rPr sz="850" b="0">
+                <a:solidFill>
+                  <a:srgbClr val="222222"/>
+                </a:solidFill>
+                <a:latin typeface="맑은 고딕"/>
+              </a:rPr>
+              <a:t>대시보드 공지 카드에서 본문 확인·현재 위치에서 수정</a:t>
+            </a:r>
+          </a:p>
+          <a:p>
+            <a:pPr algn="l">
+              <a:lnSpc>
+                <a:spcPct val="100000"/>
+              </a:lnSpc>
+              <a:spcBef>
+                <a:spcPts val="0"/>
+              </a:spcBef>
+              <a:spcAft>
+                <a:spcPts val="100"/>
+              </a:spcAft>
+            </a:pPr>
+            <a:r>
+              <a:rPr sz="950" b="1">
+                <a:solidFill>
+                  <a:srgbClr val="003D7A"/>
+                </a:solidFill>
+                <a:latin typeface="맑은 고딕"/>
+              </a:rPr>
+              <a:t>【운영 팁】</a:t>
+            </a:r>
+          </a:p>
+          <a:p>
+            <a:pPr algn="l">
+              <a:lnSpc>
+                <a:spcPct val="100000"/>
+              </a:lnSpc>
+              <a:spcBef>
+                <a:spcPts val="0"/>
+              </a:spcBef>
+              <a:spcAft>
+                <a:spcPts val="100"/>
+              </a:spcAft>
+            </a:pPr>
+            <a:r>
+              <a:rPr sz="850" b="0">
+                <a:solidFill>
+                  <a:srgbClr val="222222"/>
+                </a:solidFill>
+                <a:latin typeface="맑은 고딕"/>
+              </a:rPr>
+              <a:t>· 메뉴 권한이 없으면 /admin/account?error=no_menu 로 안내</a:t>
+            </a:r>
+          </a:p>
+          <a:p>
+            <a:pPr algn="l">
+              <a:lnSpc>
+                <a:spcPct val="100000"/>
+              </a:lnSpc>
+              <a:spcBef>
+                <a:spcPts val="0"/>
+              </a:spcBef>
+              <a:spcAft>
+                <a:spcPts val="100"/>
+              </a:spcAft>
+            </a:pPr>
+            <a:r>
+              <a:rPr sz="850" b="0">
+                <a:solidFill>
+                  <a:srgbClr val="222222"/>
+                </a:solidFill>
+                <a:latin typeface="맑은 고딕"/>
+              </a:rPr>
+              <a:t>· 사이드바 펼침 메뉴는 하나만 열림(다른 메뉴를 열면 기존 펼침이 닫힘)</a:t>
+            </a:r>
+          </a:p>
+          <a:p>
+            <a:pPr algn="l">
+              <a:lnSpc>
+                <a:spcPct val="100000"/>
+              </a:lnSpc>
+              <a:spcBef>
+                <a:spcPts val="0"/>
+              </a:spcBef>
+              <a:spcAft>
+                <a:spcPts val="100"/>
+              </a:spcAft>
+            </a:pPr>
+            <a:r>
+              <a:rPr sz="850" b="0">
+                <a:solidFill>
+                  <a:srgbClr val="222222"/>
+                </a:solidFill>
+                <a:latin typeface="맑은 고딕"/>
+              </a:rPr>
+              <a:t>· 내 계정에서 OpenAI API 키·모델 설정 → AI 분석·위험성평가 공용</a:t>
             </a:r>
           </a:p>
         </p:txBody>
@@ -6146,7 +6434,7 @@
                 </a:solidFill>
                 <a:latin typeface="맑은 고딕"/>
               </a:rPr>
-              <a:t>5 / 10</a:t>
+              <a:t>3 / 12</a:t>
             </a:r>
           </a:p>
         </p:txBody>
@@ -6159,7 +6447,7 @@
 </p:sld>
 </file>
 
-<file path=ppt/slides/slide6.xml><?xml version="1.0" encoding="utf-8"?>
+<file path=ppt/slides/slide4.xml><?xml version="1.0" encoding="utf-8"?>
 <p:sld xmlns:a="http://schemas.openxmlformats.org/drawingml/2006/main" xmlns:p="http://schemas.openxmlformats.org/presentationml/2006/main" xmlns:r="http://schemas.openxmlformats.org/officeDocument/2006/relationships">
   <p:cSld>
     <p:spTree>
@@ -6242,7 +6530,7 @@
                 </a:solidFill>
                 <a:latin typeface="맑은 고딕"/>
               </a:rPr>
-              <a:t>05  점검일지2 — 웹 운영일보 (4유형)</a:t>
+              <a:t>03  사업장/건물 · 설비관리</a:t>
             </a:r>
           </a:p>
         </p:txBody>
@@ -6287,227 +6575,139 @@
                 </a:solidFill>
                 <a:latin typeface="맑은 고딕"/>
               </a:rPr>
-              <a:t>【공통 /admin/inspection-logs2】</a:t>
-            </a:r>
-          </a:p>
-          <a:p>
-            <a:pPr algn="l">
-              <a:lnSpc>
-                <a:spcPct val="100000"/>
-              </a:lnSpc>
-              <a:spcBef>
-                <a:spcPts val="0"/>
-              </a:spcBef>
-              <a:spcAft>
-                <a:spcPts val="100"/>
-              </a:spcAft>
-            </a:pPr>
-            <a:r>
-              <a:rPr sz="850" b="0">
-                <a:solidFill>
-                  <a:srgbClr val="222222"/>
-                </a:solidFill>
-                <a:latin typeface="맑은 고딕"/>
-              </a:rPr>
-              <a:t>건물 등록 POST .../buildings → 건물명으로 유형 자동 판별·전용 화면</a:t>
-            </a:r>
-          </a:p>
-          <a:p>
-            <a:pPr algn="l">
-              <a:lnSpc>
-                <a:spcPct val="100000"/>
-              </a:lnSpc>
-              <a:spcBef>
-                <a:spcPts val="0"/>
-              </a:spcBef>
-              <a:spcAft>
-                <a:spcPts val="100"/>
-              </a:spcAft>
-            </a:pPr>
-            <a:r>
-              <a:rPr sz="850" b="0">
-                <a:solidFill>
-                  <a:srgbClr val="222222"/>
-                </a:solidFill>
-                <a:latin typeface="맑은 고딕"/>
-              </a:rPr>
-              <a:t>1일 입력·저장 · 일 마감 close-day(엑셀 아카이브) · 월보/년보 Export</a:t>
-            </a:r>
-          </a:p>
-          <a:p>
-            <a:pPr algn="l">
-              <a:lnSpc>
-                <a:spcPct val="100000"/>
-              </a:lnSpc>
-              <a:spcBef>
-                <a:spcPts val="0"/>
-              </a:spcBef>
-              <a:spcAft>
-                <a:spcPts val="100"/>
-              </a:spcAft>
-            </a:pPr>
-            <a:r>
-              <a:rPr sz="850" b="0">
-                <a:solidFill>
-                  <a:srgbClr val="222222"/>
-                </a:solidFill>
-                <a:latin typeface="맑은 고딕"/>
-              </a:rPr>
-              <a:t>QR 1일 입력(로그인 불필요) · QR PNG 각 화면에서 다운로드</a:t>
-            </a:r>
-          </a:p>
-          <a:p>
-            <a:pPr algn="l">
-              <a:lnSpc>
-                <a:spcPct val="100000"/>
-              </a:lnSpc>
-              <a:spcBef>
-                <a:spcPts val="0"/>
-              </a:spcBef>
-              <a:spcAft>
-                <a:spcPts val="100"/>
-              </a:spcAft>
-            </a:pPr>
-            <a:r>
-              <a:rPr sz="850" b="0">
-                <a:solidFill>
-                  <a:srgbClr val="222222"/>
-                </a:solidFill>
-                <a:latin typeface="맑은 고딕"/>
-              </a:rPr>
-              <a:t>리다이렉트 우선: 주택변전소→제철소본부→중앙관제실(설비)→중앙관제실</a:t>
-            </a:r>
-          </a:p>
-          <a:p>
-            <a:pPr algn="l">
-              <a:lnSpc>
-                <a:spcPct val="100000"/>
-              </a:lnSpc>
-              <a:spcBef>
-                <a:spcPts val="0"/>
-              </a:spcBef>
-              <a:spcAft>
-                <a:spcPts val="100"/>
-              </a:spcAft>
-            </a:pPr>
-            <a:r>
-              <a:rPr sz="950" b="1">
-                <a:solidFill>
-                  <a:srgbClr val="003D7A"/>
-                </a:solidFill>
-                <a:latin typeface="맑은 고딕"/>
-              </a:rPr>
-              <a:t>【주택변전소】명에 '주택변전소' 포함</a:t>
-            </a:r>
-          </a:p>
-          <a:p>
-            <a:pPr algn="l">
-              <a:lnSpc>
-                <a:spcPct val="100000"/>
-              </a:lnSpc>
-              <a:spcBef>
-                <a:spcPts val="0"/>
-              </a:spcBef>
-              <a:spcAft>
-                <a:spcPts val="100"/>
-              </a:spcAft>
-            </a:pPr>
-            <a:r>
-              <a:rPr sz="850" b="0">
-                <a:solidFill>
-                  <a:srgbClr val="222222"/>
-                </a:solidFill>
-                <a:latin typeface="맑은 고딕"/>
-              </a:rPr>
-              <a:t>관리 .../housing · QR {BASE}/hs/{code}/daily</a:t>
-            </a:r>
-          </a:p>
-          <a:p>
-            <a:pPr algn="l">
-              <a:lnSpc>
-                <a:spcPct val="100000"/>
-              </a:lnSpc>
-              <a:spcBef>
-                <a:spcPts val="0"/>
-              </a:spcBef>
-              <a:spcAft>
-                <a:spcPts val="100"/>
-              </a:spcAft>
-            </a:pPr>
-            <a:r>
-              <a:rPr sz="850" b="0">
-                <a:solidFill>
-                  <a:srgbClr val="222222"/>
-                </a:solidFill>
-                <a:latin typeface="맑은 고딕"/>
-              </a:rPr>
-              <a:t>전력·운전 자동집계 · 월보/년보 kWh · 아카이브 download</a:t>
-            </a:r>
-          </a:p>
-          <a:p>
-            <a:pPr algn="l">
-              <a:lnSpc>
-                <a:spcPct val="100000"/>
-              </a:lnSpc>
-              <a:spcBef>
-                <a:spcPts val="0"/>
-              </a:spcBef>
-              <a:spcAft>
-                <a:spcPts val="100"/>
-              </a:spcAft>
-            </a:pPr>
-            <a:r>
-              <a:rPr sz="950" b="1">
-                <a:solidFill>
-                  <a:srgbClr val="003D7A"/>
-                </a:solidFill>
-                <a:latin typeface="맑은 고딕"/>
-              </a:rPr>
-              <a:t>【중앙관제실】명 '중앙관제실'(설비 제외)</a:t>
-            </a:r>
-          </a:p>
-          <a:p>
-            <a:pPr algn="l">
-              <a:lnSpc>
-                <a:spcPct val="100000"/>
-              </a:lnSpc>
-              <a:spcBef>
-                <a:spcPts val="0"/>
-              </a:spcBef>
-              <a:spcAft>
-                <a:spcPts val="100"/>
-              </a:spcAft>
-            </a:pPr>
-            <a:r>
-              <a:rPr sz="850" b="0">
-                <a:solidFill>
-                  <a:srgbClr val="222222"/>
-                </a:solidFill>
-                <a:latin typeface="맑은 고딕"/>
-              </a:rPr>
-              <a:t>관리 .../central-control-room · QR {BASE}/ccr/{code}/daily</a:t>
-            </a:r>
-          </a:p>
-          <a:p>
-            <a:pPr algn="l">
-              <a:lnSpc>
-                <a:spcPct val="100000"/>
-              </a:lnSpc>
-              <a:spcBef>
-                <a:spcPts val="0"/>
-              </a:spcBef>
-              <a:spcAft>
-                <a:spcPts val="100"/>
-              </a:spcAft>
-            </a:pPr>
-            <a:r>
-              <a:rPr sz="850" b="0">
-                <a:solidFill>
-                  <a:srgbClr val="222222"/>
-                </a:solidFill>
-                <a:latin typeface="맑은 고딕"/>
-              </a:rPr>
-              <a:t>일·월·년 Export · 아카이브</a:t>
+              <a:t>【사업장/건물 /admin/sites】</a:t>
+            </a:r>
+          </a:p>
+          <a:p>
+            <a:pPr algn="l">
+              <a:lnSpc>
+                <a:spcPct val="100000"/>
+              </a:lnSpc>
+              <a:spcBef>
+                <a:spcPts val="0"/>
+              </a:spcBef>
+              <a:spcAft>
+                <a:spcPts val="100"/>
+              </a:spcAft>
+            </a:pPr>
+            <a:r>
+              <a:rPr sz="850" b="0">
+                <a:solidFill>
+                  <a:srgbClr val="222222"/>
+                </a:solidFill>
+                <a:latin typeface="맑은 고딕"/>
+              </a:rPr>
+              <a:t>메인: 사업장 탭 선택형 사진 그리드 — 마우스 올림만으로 사업장 사진 ↔ 안내도 전환</a:t>
+            </a:r>
+          </a:p>
+          <a:p>
+            <a:pPr algn="l">
+              <a:lnSpc>
+                <a:spcPct val="100000"/>
+              </a:lnSpc>
+              <a:spcBef>
+                <a:spcPts val="0"/>
+              </a:spcBef>
+              <a:spcAft>
+                <a:spcPts val="100"/>
+              </a:spcAft>
+            </a:pPr>
+            <a:r>
+              <a:rPr sz="850" b="0">
+                <a:solidFill>
+                  <a:srgbClr val="222222"/>
+                </a:solidFill>
+                <a:latin typeface="맑은 고딕"/>
+              </a:rPr>
+              <a:t>안내도: 이미지·PDF 업로드, 건물 바로가기(핫스팟) 위치 수정·추가 → 클릭 시 건물 현황</a:t>
+            </a:r>
+          </a:p>
+          <a:p>
+            <a:pPr algn="l">
+              <a:lnSpc>
+                <a:spcPct val="100000"/>
+              </a:lnSpc>
+              <a:spcBef>
+                <a:spcPts val="0"/>
+              </a:spcBef>
+              <a:spcAft>
+                <a:spcPts val="100"/>
+              </a:spcAft>
+            </a:pPr>
+            <a:r>
+              <a:rPr sz="850" b="0">
+                <a:solidFill>
+                  <a:srgbClr val="222222"/>
+                </a:solidFill>
+                <a:latin typeface="맑은 고딕"/>
+              </a:rPr>
+              <a:t>바로가기에 마우스 올리면 건물 첨부 사진 미리보기 · 사진·안내도는 DB 저장(재배포 후 유지)</a:t>
+            </a:r>
+          </a:p>
+          <a:p>
+            <a:pPr algn="l">
+              <a:lnSpc>
+                <a:spcPct val="100000"/>
+              </a:lnSpc>
+              <a:spcBef>
+                <a:spcPts val="0"/>
+              </a:spcBef>
+              <a:spcAft>
+                <a:spcPts val="100"/>
+              </a:spcAft>
+            </a:pPr>
+            <a:r>
+              <a:rPr sz="850" b="0">
+                <a:solidFill>
+                  <a:srgbClr val="222222"/>
+                </a:solidFill>
+                <a:latin typeface="맑은 고딕"/>
+              </a:rPr>
+              <a:t>사이드바: 사업장 펼침 → 건물 목록(가나다·숫자·영문 순) · 메뉴 클릭 시 항상 첫 화면</a:t>
+            </a:r>
+          </a:p>
+          <a:p>
+            <a:pPr algn="l">
+              <a:lnSpc>
+                <a:spcPct val="100000"/>
+              </a:lnSpc>
+              <a:spcBef>
+                <a:spcPts val="0"/>
+              </a:spcBef>
+              <a:spcAft>
+                <a:spcPts val="100"/>
+              </a:spcAft>
+            </a:pPr>
+            <a:r>
+              <a:rPr sz="850" b="0">
+                <a:solidFill>
+                  <a:srgbClr val="222222"/>
+                </a:solidFill>
+                <a:latin typeface="맑은 고딕"/>
+              </a:rPr>
+              <a:t>건물 상세: 대표 사진 · 층·구역 · 도면·표준서 파일 · 「설비관리로 이동」 버튼</a:t>
+            </a:r>
+          </a:p>
+          <a:p>
+            <a:pPr algn="l">
+              <a:lnSpc>
+                <a:spcPct val="100000"/>
+              </a:lnSpc>
+              <a:spcBef>
+                <a:spcPts val="0"/>
+              </a:spcBef>
+              <a:spcAft>
+                <a:spcPts val="100"/>
+              </a:spcAft>
+            </a:pPr>
+            <a:r>
+              <a:rPr sz="850" b="0">
+                <a:solidFill>
+                  <a:srgbClr val="222222"/>
+                </a:solidFill>
+                <a:latin typeface="맑은 고딕"/>
+              </a:rPr>
+              <a:t>공공시설물 상세 현황: 원본 이미지 + 엑셀 일괄 갱신</a:t>
             </a:r>
           </a:p>
         </p:txBody>
@@ -6552,51 +6752,139 @@
                 </a:solidFill>
                 <a:latin typeface="맑은 고딕"/>
               </a:rPr>
-              <a:t>【중앙관제실(설비)】명 '중앙관제실(설비)'</a:t>
-            </a:r>
-          </a:p>
-          <a:p>
-            <a:pPr algn="l">
-              <a:lnSpc>
-                <a:spcPct val="100000"/>
-              </a:lnSpc>
-              <a:spcBef>
-                <a:spcPts val="0"/>
-              </a:spcBef>
-              <a:spcAft>
-                <a:spcPts val="100"/>
-              </a:spcAft>
-            </a:pPr>
-            <a:r>
-              <a:rPr sz="850" b="0">
-                <a:solidFill>
-                  <a:srgbClr val="222222"/>
-                </a:solidFill>
-                <a:latin typeface="맑은 고딕"/>
-              </a:rPr>
-              <a:t>관리 .../ccr-facility · QR {BASE}/ccrf/{code}/daily</a:t>
-            </a:r>
-          </a:p>
-          <a:p>
-            <a:pPr algn="l">
-              <a:lnSpc>
-                <a:spcPct val="100000"/>
-              </a:lnSpc>
-              <a:spcBef>
-                <a:spcPts val="0"/>
-              </a:spcBef>
-              <a:spcAft>
-                <a:spcPts val="100"/>
-              </a:spcAft>
-            </a:pPr>
-            <a:r>
-              <a:rPr sz="850" b="0">
-                <a:solidFill>
-                  <a:srgbClr val="222222"/>
-                </a:solidFill>
-                <a:latin typeface="맑은 고딕"/>
-              </a:rPr>
-              <a:t>설비별 운전·점검 항목 · daily Export</a:t>
+              <a:t>【설비관리 /admin/equipment】</a:t>
+            </a:r>
+          </a:p>
+          <a:p>
+            <a:pPr algn="l">
+              <a:lnSpc>
+                <a:spcPct val="100000"/>
+              </a:lnSpc>
+              <a:spcBef>
+                <a:spcPts val="0"/>
+              </a:spcBef>
+              <a:spcAft>
+                <a:spcPts val="100"/>
+              </a:spcAft>
+            </a:pPr>
+            <a:r>
+              <a:rPr sz="850" b="0">
+                <a:solidFill>
+                  <a:srgbClr val="222222"/>
+                </a:solidFill>
+                <a:latin typeface="맑은 고딕"/>
+              </a:rPr>
+              <a:t>첫 화면: 실데이터 대시보드(건물별 설비·정비·점검) · 내 건물 범위(접힘형 표시줄)</a:t>
+            </a:r>
+          </a:p>
+          <a:p>
+            <a:pPr algn="l">
+              <a:lnSpc>
+                <a:spcPct val="100000"/>
+              </a:lnSpc>
+              <a:spcBef>
+                <a:spcPts val="0"/>
+              </a:spcBef>
+              <a:spcAft>
+                <a:spcPts val="100"/>
+              </a:spcAft>
+            </a:pPr>
+            <a:r>
+              <a:rPr sz="850" b="0">
+                <a:solidFill>
+                  <a:srgbClr val="222222"/>
+                </a:solidFill>
+                <a:latin typeface="맑은 고딕"/>
+              </a:rPr>
+              <a:t>사이드바: 사업장 → 건물 중첩 펼침, 선택한 사업장·건물만 표시</a:t>
+            </a:r>
+          </a:p>
+          <a:p>
+            <a:pPr algn="l">
+              <a:lnSpc>
+                <a:spcPct val="100000"/>
+              </a:lnSpc>
+              <a:spcBef>
+                <a:spcPts val="0"/>
+              </a:spcBef>
+              <a:spcAft>
+                <a:spcPts val="100"/>
+              </a:spcAft>
+            </a:pPr>
+            <a:r>
+              <a:rPr sz="850" b="0">
+                <a:solidFill>
+                  <a:srgbClr val="222222"/>
+                </a:solidFill>
+                <a:latin typeface="맑은 고딕"/>
+              </a:rPr>
+              <a:t>설비 등록·수정·삭제 · 상세(엑셀 양식) 우측에 설비 사진 등록·표시 · 정비·PM 이력</a:t>
+            </a:r>
+          </a:p>
+          <a:p>
+            <a:pPr algn="l">
+              <a:lnSpc>
+                <a:spcPct val="100000"/>
+              </a:lnSpc>
+              <a:spcBef>
+                <a:spcPts val="0"/>
+              </a:spcBef>
+              <a:spcAft>
+                <a:spcPts val="100"/>
+              </a:spcAft>
+            </a:pPr>
+            <a:r>
+              <a:rPr sz="850" b="0">
+                <a:solidFill>
+                  <a:srgbClr val="222222"/>
+                </a:solidFill>
+                <a:latin typeface="맑은 고딕"/>
+              </a:rPr>
+              <a:t>엑셀 Import/Export(전체·건물별): 시트 코드 열 사용, 건물명 접두로 최종 코드 생성</a:t>
+            </a:r>
+          </a:p>
+          <a:p>
+            <a:pPr algn="l">
+              <a:lnSpc>
+                <a:spcPct val="100000"/>
+              </a:lnSpc>
+              <a:spcBef>
+                <a:spcPts val="0"/>
+              </a:spcBef>
+              <a:spcAft>
+                <a:spcPts val="100"/>
+              </a:spcAft>
+            </a:pPr>
+            <a:r>
+              <a:rPr sz="850" b="0">
+                <a:solidFill>
+                  <a:srgbClr val="222222"/>
+                </a:solidFill>
+                <a:latin typeface="맑은 고딕"/>
+              </a:rPr>
+              <a:t>엑셀 버튼 옆 「마지막 import 일시 · 실행자」 표시 — 누가 설비현황을 덮어썼는지 추적</a:t>
+            </a:r>
+          </a:p>
+          <a:p>
+            <a:pPr algn="l">
+              <a:lnSpc>
+                <a:spcPct val="100000"/>
+              </a:lnSpc>
+              <a:spcBef>
+                <a:spcPts val="0"/>
+              </a:spcBef>
+              <a:spcAft>
+                <a:spcPts val="100"/>
+              </a:spcAft>
+            </a:pPr>
+            <a:r>
+              <a:rPr sz="850" b="0">
+                <a:solidFill>
+                  <a:srgbClr val="222222"/>
+                </a:solidFill>
+                <a:latin typeface="맑은 고딕"/>
+              </a:rPr>
+              <a:t>QR: 개별 PNG /admin/equipment/{id}/qr.png · 건물 일괄 ZIP .../building/{id}/qr-zip</a:t>
             </a:r>
           </a:p>
           <a:p>
@@ -6618,73 +6906,51 @@
                 </a:solidFill>
                 <a:latin typeface="맑은 고딕"/>
               </a:rPr>
-              <a:t>【제철소본부】명 '제철소본부'</a:t>
-            </a:r>
-          </a:p>
-          <a:p>
-            <a:pPr algn="l">
-              <a:lnSpc>
-                <a:spcPct val="100000"/>
-              </a:lnSpc>
-              <a:spcBef>
-                <a:spcPts val="0"/>
-              </a:spcBef>
-              <a:spcAft>
-                <a:spcPts val="100"/>
-              </a:spcAft>
-            </a:pPr>
-            <a:r>
-              <a:rPr sz="850" b="0">
-                <a:solidFill>
-                  <a:srgbClr val="222222"/>
-                </a:solidFill>
-                <a:latin typeface="맑은 고딕"/>
-              </a:rPr>
-              <a:t>관리 .../steelworks-hq · QR {BASE}/swhq/{code}/daily</a:t>
-            </a:r>
-          </a:p>
-          <a:p>
-            <a:pPr algn="l">
-              <a:lnSpc>
-                <a:spcPct val="100000"/>
-              </a:lnSpc>
-              <a:spcBef>
-                <a:spcPts val="0"/>
-              </a:spcBef>
-              <a:spcAft>
-                <a:spcPts val="100"/>
-              </a:spcAft>
-            </a:pPr>
-            <a:r>
-              <a:rPr sz="850" b="0">
-                <a:solidFill>
-                  <a:srgbClr val="222222"/>
-                </a:solidFill>
-                <a:latin typeface="맑은 고딕"/>
-              </a:rPr>
-              <a:t>NO.1/NO.2 수전 배율 12000 · 일사용량 kWh 자동계산</a:t>
-            </a:r>
-          </a:p>
-          <a:p>
-            <a:pPr algn="l">
-              <a:lnSpc>
-                <a:spcPct val="100000"/>
-              </a:lnSpc>
-              <a:spcBef>
-                <a:spcPts val="0"/>
-              </a:spcBef>
-              <a:spcAft>
-                <a:spcPts val="100"/>
-              </a:spcAft>
-            </a:pPr>
-            <a:r>
-              <a:rPr sz="850" b="0">
-                <a:solidFill>
-                  <a:srgbClr val="222222"/>
-                </a:solidFill>
-                <a:latin typeface="맑은 고딕"/>
-              </a:rPr>
-              <a:t>전일 월누계 기반 일일·월누계 재계산(recompute_daily/finalize)</a:t>
+              <a:t>【설비 → 정비의뢰】</a:t>
+            </a:r>
+          </a:p>
+          <a:p>
+            <a:pPr algn="l">
+              <a:lnSpc>
+                <a:spcPct val="100000"/>
+              </a:lnSpc>
+              <a:spcBef>
+                <a:spcPts val="0"/>
+              </a:spcBef>
+              <a:spcAft>
+                <a:spcPts val="100"/>
+              </a:spcAft>
+            </a:pPr>
+            <a:r>
+              <a:rPr sz="850" b="0">
+                <a:solidFill>
+                  <a:srgbClr val="222222"/>
+                </a:solidFill>
+                <a:latin typeface="맑은 고딕"/>
+              </a:rPr>
+              <a:t>내용·우선순위(긴급 우선 정렬)·사진 첨부 · 협력사 지정 필수(미지정 시 접수 불가)</a:t>
+            </a:r>
+          </a:p>
+          <a:p>
+            <a:pPr algn="l">
+              <a:lnSpc>
+                <a:spcPct val="100000"/>
+              </a:lnSpc>
+              <a:spcBef>
+                <a:spcPts val="0"/>
+              </a:spcBef>
+              <a:spcAft>
+                <a:spcPts val="100"/>
+              </a:spcAft>
+            </a:pPr>
+            <a:r>
+              <a:rPr sz="850" b="0">
+                <a:solidFill>
+                  <a:srgbClr val="222222"/>
+                </a:solidFill>
+                <a:latin typeface="맑은 고딕"/>
+              </a:rPr>
+              <a:t>협력사 선택 시 D-1 잠재위험·안전대책을 접수 전에 확인·수정</a:t>
             </a:r>
           </a:p>
           <a:p>
@@ -6706,29 +6972,51 @@
                 </a:solidFill>
                 <a:latin typeface="맑은 고딕"/>
               </a:rPr>
-              <a:t>【미매칭】 inspection_log2_detail.html 일반 상세</a:t>
-            </a:r>
-          </a:p>
-          <a:p>
-            <a:pPr algn="l">
-              <a:lnSpc>
-                <a:spcPct val="100000"/>
-              </a:lnSpc>
-              <a:spcBef>
-                <a:spcPts val="0"/>
-              </a:spcBef>
-              <a:spcAft>
-                <a:spcPts val="100"/>
-              </a:spcAft>
-            </a:pPr>
-            <a:r>
-              <a:rPr sz="950" b="1">
-                <a:solidFill>
-                  <a:srgbClr val="003D7A"/>
-                </a:solidFill>
-                <a:latin typeface="맑은 고딕"/>
-              </a:rPr>
-              <a:t>【AI 연동】 주택변전소 월별 전력 _gather_housing_monthly_reports</a:t>
+              <a:t>【설비 QR 현장 /eq/{설비코드}】 (로그인 필요)</a:t>
+            </a:r>
+          </a:p>
+          <a:p>
+            <a:pPr algn="l">
+              <a:lnSpc>
+                <a:spcPct val="100000"/>
+              </a:lnSpc>
+              <a:spcBef>
+                <a:spcPts val="0"/>
+              </a:spcBef>
+              <a:spcAft>
+                <a:spcPts val="100"/>
+              </a:spcAft>
+            </a:pPr>
+            <a:r>
+              <a:rPr sz="850" b="0">
+                <a:solidFill>
+                  <a:srgbClr val="222222"/>
+                </a:solidFill>
+                <a:latin typeface="맑은 고딕"/>
+              </a:rPr>
+              <a:t>설비정보 · 정비의뢰 · PM 점검(고장→정비의뢰) · 점검일지 작성(건물 유형별 1일 입력으로 연결)</a:t>
+            </a:r>
+          </a:p>
+          <a:p>
+            <a:pPr algn="l">
+              <a:lnSpc>
+                <a:spcPct val="100000"/>
+              </a:lnSpc>
+              <a:spcBef>
+                <a:spcPts val="0"/>
+              </a:spcBef>
+              <a:spcAft>
+                <a:spcPts val="100"/>
+              </a:spcAft>
+            </a:pPr>
+            <a:r>
+              <a:rPr sz="850" b="0">
+                <a:solidFill>
+                  <a:srgbClr val="222222"/>
+                </a:solidFill>
+                <a:latin typeface="맑은 고딕"/>
+              </a:rPr>
+              <a:t>PUBLIC_BASE_URL = QR 도메인 고정(배포 URL과 일치 권장)</a:t>
             </a:r>
           </a:p>
         </p:txBody>
@@ -6763,7 +7051,7 @@
                 </a:solidFill>
                 <a:latin typeface="맑은 고딕"/>
               </a:rPr>
-              <a:t>6 / 10</a:t>
+              <a:t>4 / 12</a:t>
             </a:r>
           </a:p>
         </p:txBody>
@@ -6776,7 +7064,7 @@
 </p:sld>
 </file>
 
-<file path=ppt/slides/slide7.xml><?xml version="1.0" encoding="utf-8"?>
+<file path=ppt/slides/slide5.xml><?xml version="1.0" encoding="utf-8"?>
 <p:sld xmlns:a="http://schemas.openxmlformats.org/drawingml/2006/main" xmlns:p="http://schemas.openxmlformats.org/presentationml/2006/main" xmlns:r="http://schemas.openxmlformats.org/officeDocument/2006/relationships">
   <p:cSld>
     <p:spTree>
@@ -6859,7 +7147,7 @@
                 </a:solidFill>
                 <a:latin typeface="맑은 고딕"/>
               </a:rPr>
-              <a:t>06  정비 프로세스 (정비섹션 · D-1 · 시설섹션)</a:t>
+              <a:t>04  점검(PM)</a:t>
             </a:r>
           </a:p>
         </p:txBody>
@@ -6904,139 +7192,139 @@
                 </a:solidFill>
                 <a:latin typeface="맑은 고딕"/>
               </a:rPr>
-              <a:t>【흐름】</a:t>
-            </a:r>
-          </a:p>
-          <a:p>
-            <a:pPr algn="l">
-              <a:lnSpc>
-                <a:spcPct val="100000"/>
-              </a:lnSpc>
-              <a:spcBef>
-                <a:spcPts val="0"/>
-              </a:spcBef>
-              <a:spcAft>
-                <a:spcPts val="100"/>
-              </a:spcAft>
-            </a:pPr>
-            <a:r>
-              <a:rPr sz="850" b="0">
-                <a:solidFill>
-                  <a:srgbClr val="222222"/>
-                </a:solidFill>
-                <a:latin typeface="맑은 고딕"/>
-              </a:rPr>
-              <a:t>설비QR·관리화면·수동 → 정비의뢰(received) → 배정(assigned)</a:t>
-            </a:r>
-          </a:p>
-          <a:p>
-            <a:pPr algn="l">
-              <a:lnSpc>
-                <a:spcPct val="100000"/>
-              </a:lnSpc>
-              <a:spcBef>
-                <a:spcPts val="0"/>
-              </a:spcBef>
-              <a:spcAft>
-                <a:spcPts val="100"/>
-              </a:spcAft>
-            </a:pPr>
-            <a:r>
-              <a:rPr sz="850" b="0">
-                <a:solidFill>
-                  <a:srgbClr val="222222"/>
-                </a:solidFill>
-                <a:latin typeface="맑은 고딕"/>
-              </a:rPr>
-              <a:t>→ D-1승인 → D-1보드 → 작업허가요청 → 시설승인(permit)</a:t>
-            </a:r>
-          </a:p>
-          <a:p>
-            <a:pPr algn="l">
-              <a:lnSpc>
-                <a:spcPct val="100000"/>
-              </a:lnSpc>
-              <a:spcBef>
-                <a:spcPts val="0"/>
-              </a:spcBef>
-              <a:spcAft>
-                <a:spcPts val="100"/>
-              </a:spcAft>
-            </a:pPr>
-            <a:r>
-              <a:rPr sz="850" b="0">
-                <a:solidFill>
-                  <a:srgbClr val="222222"/>
-                </a:solidFill>
-                <a:latin typeface="맑은 고딕"/>
-              </a:rPr>
-              <a:t>→ in_progress → completed → verified → closed</a:t>
-            </a:r>
-          </a:p>
-          <a:p>
-            <a:pPr algn="l">
-              <a:lnSpc>
-                <a:spcPct val="100000"/>
-              </a:lnSpc>
-              <a:spcBef>
-                <a:spcPts val="0"/>
-              </a:spcBef>
-              <a:spcAft>
-                <a:spcPts val="100"/>
-              </a:spcAft>
-            </a:pPr>
-            <a:r>
-              <a:rPr sz="950" b="1">
-                <a:solidFill>
-                  <a:srgbClr val="003D7A"/>
-                </a:solidFill>
-                <a:latin typeface="맑은 고딕"/>
-              </a:rPr>
-              <a:t>【정비접수/승인 /admin/work-orders】</a:t>
-            </a:r>
-          </a:p>
-          <a:p>
-            <a:pPr algn="l">
-              <a:lnSpc>
-                <a:spcPct val="100000"/>
-              </a:lnSpc>
-              <a:spcBef>
-                <a:spcPts val="0"/>
-              </a:spcBef>
-              <a:spcAft>
-                <a:spcPts val="100"/>
-              </a:spcAft>
-            </a:pPr>
-            <a:r>
-              <a:rPr sz="850" b="0">
-                <a:solidFill>
-                  <a:srgbClr val="222222"/>
-                </a:solidFill>
-                <a:latin typeface="맑은 고딕"/>
-              </a:rPr>
-              <a:t>목록·상태필터·상세 · D-1승인·일괄D-1승인(approve-d1)</a:t>
-            </a:r>
-          </a:p>
-          <a:p>
-            <a:pPr algn="l">
-              <a:lnSpc>
-                <a:spcPct val="100000"/>
-              </a:lnSpc>
-              <a:spcBef>
-                <a:spcPts val="0"/>
-              </a:spcBef>
-              <a:spcAft>
-                <a:spcPts val="100"/>
-              </a:spcAft>
-            </a:pPr>
-            <a:r>
-              <a:rPr sz="850" b="0">
-                <a:solidFill>
-                  <a:srgbClr val="222222"/>
-                </a:solidFill>
-                <a:latin typeface="맑은 고딕"/>
-              </a:rPr>
-              <a:t>작업허가 요청 request-approval → 시설섹션 전달 · 엑셀 Export</a:t>
+              <a:t>【점검(PM) /admin/pm】</a:t>
+            </a:r>
+          </a:p>
+          <a:p>
+            <a:pPr algn="l">
+              <a:lnSpc>
+                <a:spcPct val="100000"/>
+              </a:lnSpc>
+              <a:spcBef>
+                <a:spcPts val="0"/>
+              </a:spcBef>
+              <a:spcAft>
+                <a:spcPts val="100"/>
+              </a:spcAft>
+            </a:pPr>
+            <a:r>
+              <a:rPr sz="850" b="0">
+                <a:solidFill>
+                  <a:srgbClr val="222222"/>
+                </a:solidFill>
+                <a:latin typeface="맑은 고딕"/>
+              </a:rPr>
+              <a:t>첫 화면: 대시보드 — 오늘 점검 현황, 기한 도래·주의·고장 현황을 한눈에</a:t>
+            </a:r>
+          </a:p>
+          <a:p>
+            <a:pPr algn="l">
+              <a:lnSpc>
+                <a:spcPct val="100000"/>
+              </a:lnSpc>
+              <a:spcBef>
+                <a:spcPts val="0"/>
+              </a:spcBef>
+              <a:spcAft>
+                <a:spcPts val="100"/>
+              </a:spcAft>
+            </a:pPr>
+            <a:r>
+              <a:rPr sz="850" b="0">
+                <a:solidFill>
+                  <a:srgbClr val="222222"/>
+                </a:solidFill>
+                <a:latin typeface="맑은 고딕"/>
+              </a:rPr>
+              <a:t>내 건물 설정: 담당 건물만 보이도록 계정별 범위 지정(접힘형 표시줄)</a:t>
+            </a:r>
+          </a:p>
+          <a:p>
+            <a:pPr algn="l">
+              <a:lnSpc>
+                <a:spcPct val="100000"/>
+              </a:lnSpc>
+              <a:spcBef>
+                <a:spcPts val="0"/>
+              </a:spcBef>
+              <a:spcAft>
+                <a:spcPts val="100"/>
+              </a:spcAft>
+            </a:pPr>
+            <a:r>
+              <a:rPr sz="850" b="0">
+                <a:solidFill>
+                  <a:srgbClr val="222222"/>
+                </a:solidFill>
+                <a:latin typeface="맑은 고딕"/>
+              </a:rPr>
+              <a:t>일정 등록 주기: 매일/매주/매월/분기/반기/연간/사용자정의</a:t>
+            </a:r>
+          </a:p>
+          <a:p>
+            <a:pPr algn="l">
+              <a:lnSpc>
+                <a:spcPct val="100000"/>
+              </a:lnSpc>
+              <a:spcBef>
+                <a:spcPts val="0"/>
+              </a:spcBef>
+              <a:spcAft>
+                <a:spcPts val="100"/>
+              </a:spcAft>
+            </a:pPr>
+            <a:r>
+              <a:rPr sz="850" b="0">
+                <a:solidFill>
+                  <a:srgbClr val="222222"/>
+                </a:solidFill>
+                <a:latin typeface="맑은 고딕"/>
+              </a:rPr>
+              <a:t>점검 실행 → 결과 정상/주의/고장 기록 · 고장 시 정비의뢰 연계</a:t>
+            </a:r>
+          </a:p>
+          <a:p>
+            <a:pPr algn="l">
+              <a:lnSpc>
+                <a:spcPct val="100000"/>
+              </a:lnSpc>
+              <a:spcBef>
+                <a:spcPts val="0"/>
+              </a:spcBef>
+              <a:spcAft>
+                <a:spcPts val="100"/>
+              </a:spcAft>
+            </a:pPr>
+            <a:r>
+              <a:rPr sz="850" b="0">
+                <a:solidFill>
+                  <a:srgbClr val="222222"/>
+                </a:solidFill>
+                <a:latin typeface="맑은 고딕"/>
+              </a:rPr>
+              <a:t>지연·기한 필터 · 엑셀 Export /admin/pm/export</a:t>
+            </a:r>
+          </a:p>
+          <a:p>
+            <a:pPr algn="l">
+              <a:lnSpc>
+                <a:spcPct val="100000"/>
+              </a:lnSpc>
+              <a:spcBef>
+                <a:spcPts val="0"/>
+              </a:spcBef>
+              <a:spcAft>
+                <a:spcPts val="100"/>
+              </a:spcAft>
+            </a:pPr>
+            <a:r>
+              <a:rPr sz="850" b="0">
+                <a:solidFill>
+                  <a:srgbClr val="222222"/>
+                </a:solidFill>
+                <a:latin typeface="맑은 고딕"/>
+              </a:rPr>
+              <a:t>설비 상세 · PM 메뉴 양쪽에서 일정 등록 가능</a:t>
             </a:r>
           </a:p>
         </p:txBody>
@@ -7081,51 +7369,51 @@
                 </a:solidFill>
                 <a:latin typeface="맑은 고딕"/>
               </a:rPr>
-              <a:t>【정비 List(D-1) /admin/d1】</a:t>
-            </a:r>
-          </a:p>
-          <a:p>
-            <a:pPr algn="l">
-              <a:lnSpc>
-                <a:spcPct val="100000"/>
-              </a:lnSpc>
-              <a:spcBef>
-                <a:spcPts val="0"/>
-              </a:spcBef>
-              <a:spcAft>
-                <a:spcPts val="100"/>
-              </a:spcAft>
-            </a:pPr>
-            <a:r>
-              <a:rPr sz="850" b="0">
-                <a:solidFill>
-                  <a:srgbClr val="222222"/>
-                </a:solidFill>
-                <a:latin typeface="맑은 고딕"/>
-              </a:rPr>
-              <a:t>D-1 계획 보드 · 협력사별 필터(partner_id)</a:t>
-            </a:r>
-          </a:p>
-          <a:p>
-            <a:pPr algn="l">
-              <a:lnSpc>
-                <a:spcPct val="100000"/>
-              </a:lnSpc>
-              <a:spcBef>
-                <a:spcPts val="0"/>
-              </a:spcBef>
-              <a:spcAft>
-                <a:spcPts val="100"/>
-              </a:spcAft>
-            </a:pPr>
-            <a:r>
-              <a:rPr sz="850" b="0">
-                <a:solidFill>
-                  <a:srgbClr val="222222"/>
-                </a:solidFill>
-                <a:latin typeface="맑은 고딕"/>
-              </a:rPr>
-              <a:t>단계: draft→review→approved→JSA→TBM→permit→진행→완료 (advance)</a:t>
+              <a:t>【현장 QR 점검】</a:t>
+            </a:r>
+          </a:p>
+          <a:p>
+            <a:pPr algn="l">
+              <a:lnSpc>
+                <a:spcPct val="100000"/>
+              </a:lnSpc>
+              <a:spcBef>
+                <a:spcPts val="0"/>
+              </a:spcBef>
+              <a:spcAft>
+                <a:spcPts val="100"/>
+              </a:spcAft>
+            </a:pPr>
+            <a:r>
+              <a:rPr sz="850" b="0">
+                <a:solidFill>
+                  <a:srgbClr val="222222"/>
+                </a:solidFill>
+                <a:latin typeface="맑은 고딕"/>
+              </a:rPr>
+              <a:t>/eq/{코드} → PM 점검 → POST /eq/{코드}/pm-inspect</a:t>
+            </a:r>
+          </a:p>
+          <a:p>
+            <a:pPr algn="l">
+              <a:lnSpc>
+                <a:spcPct val="100000"/>
+              </a:lnSpc>
+              <a:spcBef>
+                <a:spcPts val="0"/>
+              </a:spcBef>
+              <a:spcAft>
+                <a:spcPts val="100"/>
+              </a:spcAft>
+            </a:pPr>
+            <a:r>
+              <a:rPr sz="850" b="0">
+                <a:solidFill>
+                  <a:srgbClr val="222222"/>
+                </a:solidFill>
+                <a:latin typeface="맑은 고딕"/>
+              </a:rPr>
+              <a:t>고장 판정 시 정비의뢰 자동 연계 가능</a:t>
             </a:r>
           </a:p>
           <a:p>
@@ -7147,51 +7435,51 @@
                 </a:solidFill>
                 <a:latin typeface="맑은 고딕"/>
               </a:rPr>
-              <a:t>【작업허가/승인 /admin/facility-section】</a:t>
-            </a:r>
-          </a:p>
-          <a:p>
-            <a:pPr algn="l">
-              <a:lnSpc>
-                <a:spcPct val="100000"/>
-              </a:lnSpc>
-              <a:spcBef>
-                <a:spcPts val="0"/>
-              </a:spcBef>
-              <a:spcAft>
-                <a:spcPts val="100"/>
-              </a:spcAft>
-            </a:pPr>
-            <a:r>
-              <a:rPr sz="850" b="0">
-                <a:solidFill>
-                  <a:srgbClr val="222222"/>
-                </a:solidFill>
-                <a:latin typeface="맑은 고딕"/>
-              </a:rPr>
-              <a:t>보드: day_before(전일)·today·scheduled·all</a:t>
-            </a:r>
-          </a:p>
-          <a:p>
-            <a:pPr algn="l">
-              <a:lnSpc>
-                <a:spcPct val="100000"/>
-              </a:lnSpc>
-              <a:spcBef>
-                <a:spcPts val="0"/>
-              </a:spcBef>
-              <a:spcAft>
-                <a:spcPts val="100"/>
-              </a:spcAft>
-            </a:pPr>
-            <a:r>
-              <a:rPr sz="850" b="0">
-                <a:solidFill>
-                  <a:srgbClr val="222222"/>
-                </a:solidFill>
-                <a:latin typeface="맑은 고딕"/>
-              </a:rPr>
-              <a:t>작업허가·일괄승인 · 협력사별 위험등급·기본값</a:t>
+              <a:t>【대시보드 연동】</a:t>
+            </a:r>
+          </a:p>
+          <a:p>
+            <a:pPr algn="l">
+              <a:lnSpc>
+                <a:spcPct val="100000"/>
+              </a:lnSpc>
+              <a:spcBef>
+                <a:spcPts val="0"/>
+              </a:spcBef>
+              <a:spcAft>
+                <a:spcPts val="100"/>
+              </a:spcAft>
+            </a:pPr>
+            <a:r>
+              <a:rPr sz="850" b="0">
+                <a:solidFill>
+                  <a:srgbClr val="222222"/>
+                </a:solidFill>
+                <a:latin typeface="맑은 고딕"/>
+              </a:rPr>
+              <a:t>PM 점검 결과가 메인 대시보드 「설비 상태 현황」(정상·주의·고장·정비중) 집계 기준</a:t>
+            </a:r>
+          </a:p>
+          <a:p>
+            <a:pPr algn="l">
+              <a:lnSpc>
+                <a:spcPct val="100000"/>
+              </a:lnSpc>
+              <a:spcBef>
+                <a:spcPts val="0"/>
+              </a:spcBef>
+              <a:spcAft>
+                <a:spcPts val="100"/>
+              </a:spcAft>
+            </a:pPr>
+            <a:r>
+              <a:rPr sz="850" b="0">
+                <a:solidFill>
+                  <a:srgbClr val="222222"/>
+                </a:solidFill>
+                <a:latin typeface="맑은 고딕"/>
+              </a:rPr>
+              <a:t>정비의뢰 삭제 시 PM '점검진행중'이 남지 않도록 정리</a:t>
             </a:r>
           </a:p>
           <a:p>
@@ -7213,51 +7501,51 @@
                 </a:solidFill>
                 <a:latin typeface="맑은 고딕"/>
               </a:rPr>
-              <a:t>【배지】 maint_nav_badges — 3메뉴 신규 건수</a:t>
-            </a:r>
-          </a:p>
-          <a:p>
-            <a:pPr algn="l">
-              <a:lnSpc>
-                <a:spcPct val="100000"/>
-              </a:lnSpc>
-              <a:spcBef>
-                <a:spcPts val="0"/>
-              </a:spcBef>
-              <a:spcAft>
-                <a:spcPts val="100"/>
-              </a:spcAft>
-            </a:pPr>
-            <a:r>
-              <a:rPr sz="950" b="1">
-                <a:solidFill>
-                  <a:srgbClr val="003D7A"/>
-                </a:solidFill>
-                <a:latin typeface="맑은 고딕"/>
-              </a:rPr>
-              <a:t>【협력사 연계】 /admin/partners 코드·담당자·계약종료</a:t>
-            </a:r>
-          </a:p>
-          <a:p>
-            <a:pPr algn="l">
-              <a:lnSpc>
-                <a:spcPct val="100000"/>
-              </a:lnSpc>
-              <a:spcBef>
-                <a:spcPts val="0"/>
-              </a:spcBef>
-              <a:spcAft>
-                <a:spcPts val="100"/>
-              </a:spcAft>
-            </a:pPr>
-            <a:r>
-              <a:rPr sz="850" b="0">
-                <a:solidFill>
-                  <a:srgbClr val="222222"/>
-                </a:solidFill>
-                <a:latin typeface="맑은 고딕"/>
-              </a:rPr>
-              <a:t>partner/external 계정: partner_id·company_name</a:t>
+              <a:t>【운영 팁】</a:t>
+            </a:r>
+          </a:p>
+          <a:p>
+            <a:pPr algn="l">
+              <a:lnSpc>
+                <a:spcPct val="100000"/>
+              </a:lnSpc>
+              <a:spcBef>
+                <a:spcPts val="0"/>
+              </a:spcBef>
+              <a:spcAft>
+                <a:spcPts val="100"/>
+              </a:spcAft>
+            </a:pPr>
+            <a:r>
+              <a:rPr sz="850" b="0">
+                <a:solidFill>
+                  <a:srgbClr val="222222"/>
+                </a:solidFill>
+                <a:latin typeface="맑은 고딕"/>
+              </a:rPr>
+              <a:t>· 주의·고장은 다음 점검 전까지 정비의뢰로 처리 상황을 추적</a:t>
+            </a:r>
+          </a:p>
+          <a:p>
+            <a:pPr algn="l">
+              <a:lnSpc>
+                <a:spcPct val="100000"/>
+              </a:lnSpc>
+              <a:spcBef>
+                <a:spcPts val="0"/>
+              </a:spcBef>
+              <a:spcAft>
+                <a:spcPts val="100"/>
+              </a:spcAft>
+            </a:pPr>
+            <a:r>
+              <a:rPr sz="850" b="0">
+                <a:solidFill>
+                  <a:srgbClr val="222222"/>
+                </a:solidFill>
+                <a:latin typeface="맑은 고딕"/>
+              </a:rPr>
+              <a:t>· 내 건물이 비어 있으면 전체 건물 표시 — 새 건물은 내 건물에 추가해야 보임</a:t>
             </a:r>
           </a:p>
         </p:txBody>
@@ -7292,7 +7580,7 @@
                 </a:solidFill>
                 <a:latin typeface="맑은 고딕"/>
               </a:rPr>
-              <a:t>7 / 10</a:t>
+              <a:t>5 / 12</a:t>
             </a:r>
           </a:p>
         </p:txBody>
@@ -7305,7 +7593,7 @@
 </p:sld>
 </file>
 
-<file path=ppt/slides/slide8.xml><?xml version="1.0" encoding="utf-8"?>
+<file path=ppt/slides/slide6.xml><?xml version="1.0" encoding="utf-8"?>
 <p:sld xmlns:a="http://schemas.openxmlformats.org/drawingml/2006/main" xmlns:p="http://schemas.openxmlformats.org/presentationml/2006/main" xmlns:r="http://schemas.openxmlformats.org/officeDocument/2006/relationships">
   <p:cSld>
     <p:spTree>
@@ -7388,7 +7676,7 @@
                 </a:solidFill>
                 <a:latin typeface="맑은 고딕"/>
               </a:rPr>
-              <a:t>07  자재 · 협력사 · 위험성평가 · 가로등</a:t>
+              <a:t>05  점검일지 — 공통 기능</a:t>
             </a:r>
           </a:p>
         </p:txBody>
@@ -7433,51 +7721,117 @@
                 </a:solidFill>
                 <a:latin typeface="맑은 고딕"/>
               </a:rPr>
-              <a:t>【자재 /admin/materials?popup=1】</a:t>
-            </a:r>
-          </a:p>
-          <a:p>
-            <a:pPr algn="l">
-              <a:lnSpc>
-                <a:spcPct val="100000"/>
-              </a:lnSpc>
-              <a:spcBef>
-                <a:spcPts val="0"/>
-              </a:spcBef>
-              <a:spcAft>
-                <a:spcPts val="100"/>
-              </a:spcAft>
-            </a:pPr>
-            <a:r>
-              <a:rPr sz="850" b="0">
-                <a:solidFill>
-                  <a:srgbClr val="222222"/>
-                </a:solidFill>
-                <a:latin typeface="맑은 고딕"/>
-              </a:rPr>
-              <a:t>품목·입고(stock-in)·출고(stock-out)·그룹·재고로그</a:t>
-            </a:r>
-          </a:p>
-          <a:p>
-            <a:pPr algn="l">
-              <a:lnSpc>
-                <a:spcPct val="100000"/>
-              </a:lnSpc>
-              <a:spcBef>
-                <a:spcPts val="0"/>
-              </a:spcBef>
-              <a:spcAft>
-                <a:spcPts val="100"/>
-              </a:spcAft>
-            </a:pPr>
-            <a:r>
-              <a:rPr sz="850" b="0">
-                <a:solidFill>
-                  <a:srgbClr val="222222"/>
-                </a:solidFill>
-                <a:latin typeface="맑은 고딕"/>
-              </a:rPr>
-              <a:t>Import/Export · reset · 설비화면 팝업 연동</a:t>
+              <a:t>【점검일지 /admin/inspection-logs2】 (구 점검일지2 → 점검일지로 통합)</a:t>
+            </a:r>
+          </a:p>
+          <a:p>
+            <a:pPr algn="l">
+              <a:lnSpc>
+                <a:spcPct val="100000"/>
+              </a:lnSpc>
+              <a:spcBef>
+                <a:spcPts val="0"/>
+              </a:spcBef>
+              <a:spcAft>
+                <a:spcPts val="100"/>
+              </a:spcAft>
+            </a:pPr>
+            <a:r>
+              <a:rPr sz="850" b="0">
+                <a:solidFill>
+                  <a:srgbClr val="222222"/>
+                </a:solidFill>
+                <a:latin typeface="맑은 고딕"/>
+              </a:rPr>
+              <a:t>첫 화면: 대시보드형 — 계정별 내 건물만 표시, 건물별 작성 현황</a:t>
+            </a:r>
+          </a:p>
+          <a:p>
+            <a:pPr algn="l">
+              <a:lnSpc>
+                <a:spcPct val="100000"/>
+              </a:lnSpc>
+              <a:spcBef>
+                <a:spcPts val="0"/>
+              </a:spcBef>
+              <a:spcAft>
+                <a:spcPts val="100"/>
+              </a:spcAft>
+            </a:pPr>
+            <a:r>
+              <a:rPr sz="850" b="0">
+                <a:solidFill>
+                  <a:srgbClr val="222222"/>
+                </a:solidFill>
+                <a:latin typeface="맑은 고딕"/>
+              </a:rPr>
+              <a:t>건물 등록 시 건물명으로 일지 유형 자동 판별 → 전용 웹 운영일보 화면</a:t>
+            </a:r>
+          </a:p>
+          <a:p>
+            <a:pPr algn="l">
+              <a:lnSpc>
+                <a:spcPct val="100000"/>
+              </a:lnSpc>
+              <a:spcBef>
+                <a:spcPts val="0"/>
+              </a:spcBef>
+              <a:spcAft>
+                <a:spcPts val="100"/>
+              </a:spcAft>
+            </a:pPr>
+            <a:r>
+              <a:rPr sz="850" b="0">
+                <a:solidFill>
+                  <a:srgbClr val="222222"/>
+                </a:solidFill>
+                <a:latin typeface="맑은 고딕"/>
+              </a:rPr>
+              <a:t>1일 입력·저장 · 일 마감(엑셀 아카이브) · 일/월/년 엑셀 Export</a:t>
+            </a:r>
+          </a:p>
+          <a:p>
+            <a:pPr algn="l">
+              <a:lnSpc>
+                <a:spcPct val="100000"/>
+              </a:lnSpc>
+              <a:spcBef>
+                <a:spcPts val="0"/>
+              </a:spcBef>
+              <a:spcAft>
+                <a:spcPts val="100"/>
+              </a:spcAft>
+            </a:pPr>
+            <a:r>
+              <a:rPr sz="850" b="0">
+                <a:solidFill>
+                  <a:srgbClr val="222222"/>
+                </a:solidFill>
+                <a:latin typeface="맑은 고딕"/>
+              </a:rPr>
+              <a:t>1일 엑셀 다운로드 = 화면 양식 그대로 저장</a:t>
+            </a:r>
+          </a:p>
+          <a:p>
+            <a:pPr algn="l">
+              <a:lnSpc>
+                <a:spcPct val="100000"/>
+              </a:lnSpc>
+              <a:spcBef>
+                <a:spcPts val="0"/>
+              </a:spcBef>
+              <a:spcAft>
+                <a:spcPts val="100"/>
+              </a:spcAft>
+            </a:pPr>
+            <a:r>
+              <a:rPr sz="850" b="0">
+                <a:solidFill>
+                  <a:srgbClr val="222222"/>
+                </a:solidFill>
+                <a:latin typeface="맑은 고딕"/>
+              </a:rPr>
+              <a:t>작성자와 관계없이 권한 있는 사용자 누구나 수정 가능</a:t>
             </a:r>
           </a:p>
           <a:p>
@@ -7499,95 +7853,117 @@
                 </a:solidFill>
                 <a:latin typeface="맑은 고딕"/>
               </a:rPr>
-              <a:t>【협력사 /admin/partners】</a:t>
-            </a:r>
-          </a:p>
-          <a:p>
-            <a:pPr algn="l">
-              <a:lnSpc>
-                <a:spcPct val="100000"/>
-              </a:lnSpc>
-              <a:spcBef>
-                <a:spcPts val="0"/>
-              </a:spcBef>
-              <a:spcAft>
-                <a:spcPts val="100"/>
-              </a:spcAft>
-            </a:pPr>
-            <a:r>
-              <a:rPr sz="850" b="0">
-                <a:solidFill>
-                  <a:srgbClr val="222222"/>
-                </a:solidFill>
-                <a:latin typeface="맑은 고딕"/>
-              </a:rPr>
-              <a:t>코드·담당자·계약종료 · D-1·시설·정비 필터</a:t>
-            </a:r>
-          </a:p>
-          <a:p>
-            <a:pPr algn="l">
-              <a:lnSpc>
-                <a:spcPct val="100000"/>
-              </a:lnSpc>
-              <a:spcBef>
-                <a:spcPts val="0"/>
-              </a:spcBef>
-              <a:spcAft>
-                <a:spcPts val="100"/>
-              </a:spcAft>
-            </a:pPr>
-            <a:r>
-              <a:rPr sz="950" b="1">
-                <a:solidFill>
-                  <a:srgbClr val="003D7A"/>
-                </a:solidFill>
-                <a:latin typeface="맑은 고딕"/>
-              </a:rPr>
-              <a:t>【위험성평가 /admin/risk-assessment】</a:t>
-            </a:r>
-          </a:p>
-          <a:p>
-            <a:pPr algn="l">
-              <a:lnSpc>
-                <a:spcPct val="100000"/>
-              </a:lnSpc>
-              <a:spcBef>
-                <a:spcPts val="0"/>
-              </a:spcBef>
-              <a:spcAft>
-                <a:spcPts val="100"/>
-              </a:spcAft>
-            </a:pPr>
-            <a:r>
-              <a:rPr sz="850" b="0">
-                <a:solidFill>
-                  <a:srgbClr val="222222"/>
-                </a:solidFill>
-                <a:latin typeface="맑은 고딕"/>
-              </a:rPr>
-              <a:t>작업명+4M+1E(인·기계·재료·방법·환경) · 대분류·프리셋</a:t>
-            </a:r>
-          </a:p>
-          <a:p>
-            <a:pPr algn="l">
-              <a:lnSpc>
-                <a:spcPct val="100000"/>
-              </a:lnSpc>
-              <a:spcBef>
-                <a:spcPts val="0"/>
-              </a:spcBef>
-              <a:spcAft>
-                <a:spcPts val="100"/>
-              </a:spcAft>
-            </a:pPr>
-            <a:r>
-              <a:rPr sz="850" b="0">
-                <a:solidFill>
-                  <a:srgbClr val="222222"/>
-                </a:solidFill>
-                <a:latin typeface="맑은 고딕"/>
-              </a:rPr>
-              <a:t>AI 보조 assess(use_ai) · 문서 학습 learn · HTML/Excel export</a:t>
+              <a:t>【엑셀처럼 입력 — 1일 입력 화면】</a:t>
+            </a:r>
+          </a:p>
+          <a:p>
+            <a:pPr algn="l">
+              <a:lnSpc>
+                <a:spcPct val="100000"/>
+              </a:lnSpc>
+              <a:spcBef>
+                <a:spcPts val="0"/>
+              </a:spcBef>
+              <a:spcAft>
+                <a:spcPts val="100"/>
+              </a:spcAft>
+            </a:pPr>
+            <a:r>
+              <a:rPr sz="850" b="0">
+                <a:solidFill>
+                  <a:srgbClr val="222222"/>
+                </a:solidFill>
+                <a:latin typeface="맑은 고딕"/>
+              </a:rPr>
+              <a:t>드래그로 여러 칸 선택 · Ctrl+C 복사 · 엑셀에서 복사한 표 Ctrl+V 붙여넣기</a:t>
+            </a:r>
+          </a:p>
+          <a:p>
+            <a:pPr algn="l">
+              <a:lnSpc>
+                <a:spcPct val="100000"/>
+              </a:lnSpc>
+              <a:spcBef>
+                <a:spcPts val="0"/>
+              </a:spcBef>
+              <a:spcAft>
+                <a:spcPts val="100"/>
+              </a:spcAft>
+            </a:pPr>
+            <a:r>
+              <a:rPr sz="850" b="0">
+                <a:solidFill>
+                  <a:srgbClr val="222222"/>
+                </a:solidFill>
+                <a:latin typeface="맑은 고딕"/>
+              </a:rPr>
+              <a:t>선택 후 Delete/Backspace 일괄 비우기 · 입력·붙여넣기·삭제 후 자동 저장</a:t>
+            </a:r>
+          </a:p>
+          <a:p>
+            <a:pPr algn="l">
+              <a:lnSpc>
+                <a:spcPct val="100000"/>
+              </a:lnSpc>
+              <a:spcBef>
+                <a:spcPts val="0"/>
+              </a:spcBef>
+              <a:spcAft>
+                <a:spcPts val="100"/>
+              </a:spcAft>
+            </a:pPr>
+            <a:r>
+              <a:rPr sz="850" b="0">
+                <a:solidFill>
+                  <a:srgbClr val="222222"/>
+                </a:solidFill>
+                <a:latin typeface="맑은 고딕"/>
+              </a:rPr>
+              <a:t>전일지침: 금일지침 → 다음날 전일지침 자동 이월 + 전일지침 수기 수정 가능</a:t>
+            </a:r>
+          </a:p>
+          <a:p>
+            <a:pPr algn="l">
+              <a:lnSpc>
+                <a:spcPct val="100000"/>
+              </a:lnSpc>
+              <a:spcBef>
+                <a:spcPts val="0"/>
+              </a:spcBef>
+              <a:spcAft>
+                <a:spcPts val="100"/>
+              </a:spcAft>
+            </a:pPr>
+            <a:r>
+              <a:rPr sz="850" b="0">
+                <a:solidFill>
+                  <a:srgbClr val="222222"/>
+                </a:solidFill>
+                <a:latin typeface="맑은 고딕"/>
+              </a:rPr>
+              <a:t>월누계: 매달 1일부터 그날까지 합계(달이 바뀌면 다시 누계) · 입력 즉시 재계산</a:t>
+            </a:r>
+          </a:p>
+          <a:p>
+            <a:pPr algn="l">
+              <a:lnSpc>
+                <a:spcPct val="100000"/>
+              </a:lnSpc>
+              <a:spcBef>
+                <a:spcPts val="0"/>
+              </a:spcBef>
+              <a:spcAft>
+                <a:spcPts val="100"/>
+              </a:spcAft>
+            </a:pPr>
+            <a:r>
+              <a:rPr sz="850" b="0">
+                <a:solidFill>
+                  <a:srgbClr val="222222"/>
+                </a:solidFill>
+                <a:latin typeface="맑은 고딕"/>
+              </a:rPr>
+              <a:t>계량 배율 자동 반영(예: 제철소본부 수전 ×12000, 중앙관제실 INCOMING ×9600)</a:t>
             </a:r>
           </a:p>
         </p:txBody>
@@ -7632,95 +8008,7 @@
                 </a:solidFill>
                 <a:latin typeface="맑은 고딕"/>
               </a:rPr>
-              <a:t>【가로등】</a:t>
-            </a:r>
-          </a:p>
-          <a:p>
-            <a:pPr algn="l">
-              <a:lnSpc>
-                <a:spcPct val="100000"/>
-              </a:lnSpc>
-              <a:spcBef>
-                <a:spcPts val="0"/>
-              </a:spcBef>
-              <a:spcAft>
-                <a:spcPts val="100"/>
-              </a:spcAft>
-            </a:pPr>
-            <a:r>
-              <a:rPr sz="850" b="0">
-                <a:solidFill>
-                  <a:srgbClr val="222222"/>
-                </a:solidFill>
-                <a:latin typeface="맑은 고딕"/>
-              </a:rPr>
-              <a:t>공개: {BASE}/lamp/{코드} → 유형선택·접수 · /status 조회</a:t>
-            </a:r>
-          </a:p>
-          <a:p>
-            <a:pPr algn="l">
-              <a:lnSpc>
-                <a:spcPct val="100000"/>
-              </a:lnSpc>
-              <a:spcBef>
-                <a:spcPts val="0"/>
-              </a:spcBef>
-              <a:spcAft>
-                <a:spcPts val="100"/>
-              </a:spcAft>
-            </a:pPr>
-            <a:r>
-              <a:rPr sz="850" b="0">
-                <a:solidFill>
-                  <a:srgbClr val="222222"/>
-                </a:solidFill>
-                <a:latin typeface="맑은 고딕"/>
-              </a:rPr>
-              <a:t>관리: /admin/streetlamp/requests 목록·상태·삭제·Export</a:t>
-            </a:r>
-          </a:p>
-          <a:p>
-            <a:pPr algn="l">
-              <a:lnSpc>
-                <a:spcPct val="100000"/>
-              </a:lnSpc>
-              <a:spcBef>
-                <a:spcPts val="0"/>
-              </a:spcBef>
-              <a:spcAft>
-                <a:spcPts val="100"/>
-              </a:spcAft>
-            </a:pPr>
-            <a:r>
-              <a:rPr sz="850" b="0">
-                <a:solidFill>
-                  <a:srgbClr val="222222"/>
-                </a:solidFill>
-                <a:latin typeface="맑은 고딕"/>
-              </a:rPr>
-              <a:t>QR ZIP /admin/streetlamp/qr-zip · 설정 SMS/메일</a:t>
-            </a:r>
-          </a:p>
-          <a:p>
-            <a:pPr algn="l">
-              <a:lnSpc>
-                <a:spcPct val="100000"/>
-              </a:lnSpc>
-              <a:spcBef>
-                <a:spcPts val="0"/>
-              </a:spcBef>
-              <a:spcAft>
-                <a:spcPts val="100"/>
-              </a:spcAft>
-            </a:pPr>
-            <a:r>
-              <a:rPr sz="850" b="0">
-                <a:solidFill>
-                  <a:srgbClr val="222222"/>
-                </a:solidFill>
-                <a:latin typeface="맑은 고딕"/>
-              </a:rPr>
-              <a:t>CSV import · cron /cron/streetlamp/daily-report</a:t>
+              <a:t>【고정 문구 수정】 문구 수정 모드에서 화면의 고정 글씨를 직접 클릭해 수정·저장</a:t>
             </a:r>
           </a:p>
           <a:p>
@@ -7742,95 +8030,183 @@
                 </a:solidFill>
                 <a:latin typeface="맑은 고딕"/>
               </a:rPr>
-              <a:t>【권한 요약】</a:t>
-            </a:r>
-          </a:p>
-          <a:p>
-            <a:pPr algn="l">
-              <a:lnSpc>
-                <a:spcPct val="100000"/>
-              </a:lnSpc>
-              <a:spcBef>
-                <a:spcPts val="0"/>
-              </a:spcBef>
-              <a:spcAft>
-                <a:spcPts val="100"/>
-              </a:spcAft>
-            </a:pPr>
-            <a:r>
-              <a:rPr sz="850" b="0">
-                <a:solidFill>
-                  <a:srgbClr val="222222"/>
-                </a:solidFill>
-                <a:latin typeface="맑은 고딕"/>
-              </a:rPr>
-              <a:t>system_admin: 전메뉴+서버+계정</a:t>
-            </a:r>
-          </a:p>
-          <a:p>
-            <a:pPr algn="l">
-              <a:lnSpc>
-                <a:spcPct val="100000"/>
-              </a:lnSpc>
-              <a:spcBef>
-                <a:spcPts val="0"/>
-              </a:spcBef>
-              <a:spcAft>
-                <a:spcPts val="100"/>
-              </a:spcAft>
-            </a:pPr>
-            <a:r>
-              <a:rPr sz="850" b="0">
-                <a:solidFill>
-                  <a:srgbClr val="222222"/>
-                </a:solidFill>
-                <a:latin typeface="맑은 고딕"/>
-              </a:rPr>
-              <a:t>site_admin~facility_manager: users/server 제외 C/E/D</a:t>
-            </a:r>
-          </a:p>
-          <a:p>
-            <a:pPr algn="l">
-              <a:lnSpc>
-                <a:spcPct val="100000"/>
-              </a:lnSpc>
-              <a:spcBef>
-                <a:spcPts val="0"/>
-              </a:spcBef>
-              <a:spcAft>
-                <a:spcPts val="100"/>
-              </a:spcAft>
-            </a:pPr>
-            <a:r>
-              <a:rPr sz="850" b="0">
-                <a:solidFill>
-                  <a:srgbClr val="222222"/>
-                </a:solidFill>
-                <a:latin typeface="맑은 고딕"/>
-              </a:rPr>
-              <a:t>partner/external: 정비·D-1·자재·협력사·AI·위험성 등, E만</a:t>
-            </a:r>
-          </a:p>
-          <a:p>
-            <a:pPr algn="l">
-              <a:lnSpc>
-                <a:spcPct val="100000"/>
-              </a:lnSpc>
-              <a:spcBef>
-                <a:spcPts val="0"/>
-              </a:spcBef>
-              <a:spcAft>
-                <a:spcPts val="100"/>
-              </a:spcAft>
-            </a:pPr>
-            <a:r>
-              <a:rPr sz="850" b="0">
-                <a:solidFill>
-                  <a:srgbClr val="222222"/>
-                </a:solidFill>
-                <a:latin typeface="맑은 고딕"/>
-              </a:rPr>
-              <a:t>viewer: 조회만</a:t>
+              <a:t>【과거 일지 자료】 건물별 기존 일지 파일 보관 · 선택/전체 ZIP 다운로드</a:t>
+            </a:r>
+          </a:p>
+          <a:p>
+            <a:pPr algn="l">
+              <a:lnSpc>
+                <a:spcPct val="100000"/>
+              </a:lnSpc>
+              <a:spcBef>
+                <a:spcPts val="0"/>
+              </a:spcBef>
+              <a:spcAft>
+                <a:spcPts val="100"/>
+              </a:spcAft>
+            </a:pPr>
+            <a:r>
+              <a:rPr sz="950" b="1">
+                <a:solidFill>
+                  <a:srgbClr val="003D7A"/>
+                </a:solidFill>
+                <a:latin typeface="맑은 고딕"/>
+              </a:rPr>
+              <a:t>【특이사항】 하루 한 행 목록(일지 줄바꿈 그대로) · 검색 · 엑셀 출력</a:t>
+            </a:r>
+          </a:p>
+          <a:p>
+            <a:pPr algn="l">
+              <a:lnSpc>
+                <a:spcPct val="100000"/>
+              </a:lnSpc>
+              <a:spcBef>
+                <a:spcPts val="0"/>
+              </a:spcBef>
+              <a:spcAft>
+                <a:spcPts val="100"/>
+              </a:spcAft>
+            </a:pPr>
+            <a:r>
+              <a:rPr sz="950" b="1">
+                <a:solidFill>
+                  <a:srgbClr val="003D7A"/>
+                </a:solidFill>
+                <a:latin typeface="맑은 고딕"/>
+              </a:rPr>
+              <a:t>【QR 1일 입력】 각 일지 화면에서 QR PNG 다운로드 → 현장 모바일 입력(로그인 필요)</a:t>
+            </a:r>
+          </a:p>
+          <a:p>
+            <a:pPr algn="l">
+              <a:lnSpc>
+                <a:spcPct val="100000"/>
+              </a:lnSpc>
+              <a:spcBef>
+                <a:spcPts val="0"/>
+              </a:spcBef>
+              <a:spcAft>
+                <a:spcPts val="100"/>
+              </a:spcAft>
+            </a:pPr>
+            <a:r>
+              <a:rPr sz="850" b="0">
+                <a:solidFill>
+                  <a:srgbClr val="222222"/>
+                </a:solidFill>
+                <a:latin typeface="맑은 고딕"/>
+              </a:rPr>
+              <a:t>설비 QR /eq/{코드}/log 도 해당 건물 일지로 연결</a:t>
+            </a:r>
+          </a:p>
+          <a:p>
+            <a:pPr algn="l">
+              <a:lnSpc>
+                <a:spcPct val="100000"/>
+              </a:lnSpc>
+              <a:spcBef>
+                <a:spcPts val="0"/>
+              </a:spcBef>
+              <a:spcAft>
+                <a:spcPts val="100"/>
+              </a:spcAft>
+            </a:pPr>
+            <a:r>
+              <a:rPr sz="950" b="1">
+                <a:solidFill>
+                  <a:srgbClr val="003D7A"/>
+                </a:solidFill>
+                <a:latin typeface="맑은 고딕"/>
+              </a:rPr>
+              <a:t>【전용 양식이 없는 건물】 일반 상세 화면 + 일/월/년 엑셀 다운로드</a:t>
+            </a:r>
+          </a:p>
+          <a:p>
+            <a:pPr algn="l">
+              <a:lnSpc>
+                <a:spcPct val="100000"/>
+              </a:lnSpc>
+              <a:spcBef>
+                <a:spcPts val="0"/>
+              </a:spcBef>
+              <a:spcAft>
+                <a:spcPts val="100"/>
+              </a:spcAft>
+            </a:pPr>
+            <a:r>
+              <a:rPr sz="950" b="1">
+                <a:solidFill>
+                  <a:srgbClr val="003D7A"/>
+                </a:solidFill>
+                <a:latin typeface="맑은 고딕"/>
+              </a:rPr>
+              <a:t>【AI 연동】 점검일지 월보(중앙관제실·주택변전소 등) 계산 결과를 AI 분석 근거로 사용</a:t>
+            </a:r>
+          </a:p>
+          <a:p>
+            <a:pPr algn="l">
+              <a:lnSpc>
+                <a:spcPct val="100000"/>
+              </a:lnSpc>
+              <a:spcBef>
+                <a:spcPts val="0"/>
+              </a:spcBef>
+              <a:spcAft>
+                <a:spcPts val="100"/>
+              </a:spcAft>
+            </a:pPr>
+            <a:r>
+              <a:rPr sz="950" b="1">
+                <a:solidFill>
+                  <a:srgbClr val="003D7A"/>
+                </a:solidFill>
+                <a:latin typeface="맑은 고딕"/>
+              </a:rPr>
+              <a:t>【운영 팁】</a:t>
+            </a:r>
+          </a:p>
+          <a:p>
+            <a:pPr algn="l">
+              <a:lnSpc>
+                <a:spcPct val="100000"/>
+              </a:lnSpc>
+              <a:spcBef>
+                <a:spcPts val="0"/>
+              </a:spcBef>
+              <a:spcAft>
+                <a:spcPts val="100"/>
+              </a:spcAft>
+            </a:pPr>
+            <a:r>
+              <a:rPr sz="850" b="0">
+                <a:solidFill>
+                  <a:srgbClr val="222222"/>
+                </a:solidFill>
+                <a:latin typeface="맑은 고딕"/>
+              </a:rPr>
+              <a:t>· 붙여넣기는 선택 시작 칸(또는 포커스 칸)부터 채워짐</a:t>
+            </a:r>
+          </a:p>
+          <a:p>
+            <a:pPr algn="l">
+              <a:lnSpc>
+                <a:spcPct val="100000"/>
+              </a:lnSpc>
+              <a:spcBef>
+                <a:spcPts val="0"/>
+              </a:spcBef>
+              <a:spcAft>
+                <a:spcPts val="100"/>
+              </a:spcAft>
+            </a:pPr>
+            <a:r>
+              <a:rPr sz="850" b="0">
+                <a:solidFill>
+                  <a:srgbClr val="222222"/>
+                </a:solidFill>
+                <a:latin typeface="맑은 고딕"/>
+              </a:rPr>
+              <a:t>· 연동 항목(예: 전기실 지침 → 전력 금일지침)은 수기 수정값을 덮어쓰지 않음</a:t>
             </a:r>
           </a:p>
         </p:txBody>
@@ -7865,7 +8241,7 @@
                 </a:solidFill>
                 <a:latin typeface="맑은 고딕"/>
               </a:rPr>
-              <a:t>8 / 10</a:t>
+              <a:t>6 / 12</a:t>
             </a:r>
           </a:p>
         </p:txBody>
@@ -7878,7 +8254,7 @@
 </p:sld>
 </file>
 
-<file path=ppt/slides/slide9.xml><?xml version="1.0" encoding="utf-8"?>
+<file path=ppt/slides/slide7.xml><?xml version="1.0" encoding="utf-8"?>
 <p:sld xmlns:a="http://schemas.openxmlformats.org/drawingml/2006/main" xmlns:p="http://schemas.openxmlformats.org/presentationml/2006/main" xmlns:r="http://schemas.openxmlformats.org/officeDocument/2006/relationships">
   <p:cSld>
     <p:spTree>
@@ -7961,7 +8337,7 @@
                 </a:solidFill>
                 <a:latin typeface="맑은 고딕"/>
               </a:rPr>
-              <a:t>08  AI 분석 · GPT 대화</a:t>
+              <a:t>06  점검일지 — 건물 유형 · QR 경로</a:t>
             </a:r>
           </a:p>
         </p:txBody>
@@ -8006,161 +8382,183 @@
                 </a:solidFill>
                 <a:latin typeface="맑은 고딕"/>
               </a:rPr>
-              <a:t>【AI 분석 /admin/ai-analysis】</a:t>
-            </a:r>
-          </a:p>
-          <a:p>
-            <a:pPr algn="l">
-              <a:lnSpc>
-                <a:spcPct val="100000"/>
-              </a:lnSpc>
-              <a:spcBef>
-                <a:spcPts val="0"/>
-              </a:spcBef>
-              <a:spcAft>
-                <a:spcPts val="100"/>
-              </a:spcAft>
-            </a:pPr>
-            <a:r>
-              <a:rPr sz="850" b="0">
-                <a:solidFill>
-                  <a:srgbClr val="222222"/>
-                </a:solidFill>
-                <a:latin typeface="맑은 고딕"/>
-              </a:rPr>
-              <a:t>질의 POST /admin/ai-analysis/ask</a:t>
-            </a:r>
-          </a:p>
-          <a:p>
-            <a:pPr algn="l">
-              <a:lnSpc>
-                <a:spcPct val="100000"/>
-              </a:lnSpc>
-              <a:spcBef>
-                <a:spcPts val="0"/>
-              </a:spcBef>
-              <a:spcAft>
-                <a:spcPts val="100"/>
-              </a:spcAft>
-            </a:pPr>
-            <a:r>
-              <a:rPr sz="850" b="0">
-                <a:solidFill>
-                  <a:srgbClr val="222222"/>
-                </a:solidFill>
-                <a:latin typeface="맑은 고딕"/>
-              </a:rPr>
-              <a:t>· 집계모드: DB스냅샷 즉시답(API키 불필요)</a:t>
-            </a:r>
-          </a:p>
-          <a:p>
-            <a:pPr algn="l">
-              <a:lnSpc>
-                <a:spcPct val="100000"/>
-              </a:lnSpc>
-              <a:spcBef>
-                <a:spcPts val="0"/>
-              </a:spcBef>
-              <a:spcAft>
-                <a:spcPts val="100"/>
-              </a:spcAft>
-            </a:pPr>
-            <a:r>
-              <a:rPr sz="850" b="0">
-                <a:solidFill>
-                  <a:srgbClr val="222222"/>
-                </a:solidFill>
-                <a:latin typeface="맑은 고딕"/>
-              </a:rPr>
-              <a:t>· GPT상세(mode=detail): 전체컨텍스트+GPT</a:t>
-            </a:r>
-          </a:p>
-          <a:p>
-            <a:pPr algn="l">
-              <a:lnSpc>
-                <a:spcPct val="100000"/>
-              </a:lnSpc>
-              <a:spcBef>
-                <a:spcPts val="0"/>
-              </a:spcBef>
-              <a:spcAft>
-                <a:spcPts val="100"/>
-              </a:spcAft>
-            </a:pPr>
-            <a:r>
-              <a:rPr sz="950" b="1">
-                <a:solidFill>
-                  <a:srgbClr val="003D7A"/>
-                </a:solidFill>
-                <a:latin typeface="맑은 고딕"/>
-              </a:rPr>
-              <a:t>【데이터범위 gather_context】</a:t>
-            </a:r>
-          </a:p>
-          <a:p>
-            <a:pPr algn="l">
-              <a:lnSpc>
-                <a:spcPct val="100000"/>
-              </a:lnSpc>
-              <a:spcBef>
-                <a:spcPts val="0"/>
-              </a:spcBef>
-              <a:spcAft>
-                <a:spcPts val="100"/>
-              </a:spcAft>
-            </a:pPr>
-            <a:r>
-              <a:rPr sz="850" b="0">
-                <a:solidFill>
-                  <a:srgbClr val="222222"/>
-                </a:solidFill>
-                <a:latin typeface="맑은 고딕"/>
-              </a:rPr>
-              <a:t>사업장·건물·설비·정비·PM·D-1·협력사·점검일지1/2</a:t>
-            </a:r>
-          </a:p>
-          <a:p>
-            <a:pPr algn="l">
-              <a:lnSpc>
-                <a:spcPct val="100000"/>
-              </a:lnSpc>
-              <a:spcBef>
-                <a:spcPts val="0"/>
-              </a:spcBef>
-              <a:spcAft>
-                <a:spcPts val="100"/>
-              </a:spcAft>
-            </a:pPr>
-            <a:r>
-              <a:rPr sz="850" b="0">
-                <a:solidFill>
-                  <a:srgbClr val="222222"/>
-                </a:solidFill>
-                <a:latin typeface="맑은 고딕"/>
-              </a:rPr>
-              <a:t>자재·공지·일정·가로등·주택변전소 월보전력 등</a:t>
-            </a:r>
-          </a:p>
-          <a:p>
-            <a:pPr algn="l">
-              <a:lnSpc>
-                <a:spcPct val="100000"/>
-              </a:lnSpc>
-              <a:spcBef>
-                <a:spcPts val="0"/>
-              </a:spcBef>
-              <a:spcAft>
-                <a:spcPts val="100"/>
-              </a:spcAft>
-            </a:pPr>
-            <a:r>
-              <a:rPr sz="850" b="0">
-                <a:solidFill>
-                  <a:srgbClr val="222222"/>
-                </a:solidFill>
-                <a:latin typeface="맑은 고딕"/>
-              </a:rPr>
-              <a:t>의도분류: 설비·정비·PM·가로등·D-1·협력사·점검일지·자재·전체현황</a:t>
+              <a:t>【건물명 → 전용 일지 (관리 화면 /admin/inspection-logs2/{건물ID}/…)】</a:t>
+            </a:r>
+          </a:p>
+          <a:p>
+            <a:pPr algn="l">
+              <a:lnSpc>
+                <a:spcPct val="100000"/>
+              </a:lnSpc>
+              <a:spcBef>
+                <a:spcPts val="0"/>
+              </a:spcBef>
+              <a:spcAft>
+                <a:spcPts val="100"/>
+              </a:spcAft>
+            </a:pPr>
+            <a:r>
+              <a:rPr sz="850" b="0">
+                <a:solidFill>
+                  <a:srgbClr val="222222"/>
+                </a:solidFill>
+                <a:latin typeface="맑은 고딕"/>
+              </a:rPr>
+              <a:t>주택변전소 — 전력·운전일지·변압기온도 · 월보/년보 kWh · QR /hs/{code}/daily</a:t>
+            </a:r>
+          </a:p>
+          <a:p>
+            <a:pPr algn="l">
+              <a:lnSpc>
+                <a:spcPct val="100000"/>
+              </a:lnSpc>
+              <a:spcBef>
+                <a:spcPts val="0"/>
+              </a:spcBef>
+              <a:spcAft>
+                <a:spcPts val="100"/>
+              </a:spcAft>
+            </a:pPr>
+            <a:r>
+              <a:rPr sz="850" b="0">
+                <a:solidFill>
+                  <a:srgbClr val="222222"/>
+                </a:solidFill>
+                <a:latin typeface="맑은 고딕"/>
+              </a:rPr>
+              <a:t>중앙관제실 — 전기 일보(압연/수전 INCOMING) · QR /ccr/{code}/daily</a:t>
+            </a:r>
+          </a:p>
+          <a:p>
+            <a:pPr algn="l">
+              <a:lnSpc>
+                <a:spcPct val="100000"/>
+              </a:lnSpc>
+              <a:spcBef>
+                <a:spcPts val="0"/>
+              </a:spcBef>
+              <a:spcAft>
+                <a:spcPts val="100"/>
+              </a:spcAft>
+            </a:pPr>
+            <a:r>
+              <a:rPr sz="850" b="0">
+                <a:solidFill>
+                  <a:srgbClr val="222222"/>
+                </a:solidFill>
+                <a:latin typeface="맑은 고딕"/>
+              </a:rPr>
+              <a:t>중앙관제실(설비) — 중앙관제실 하위로 통합, 공조·보일러·냉방 가동시간·열량·유량 · QR /ccrf/{code}/daily</a:t>
+            </a:r>
+          </a:p>
+          <a:p>
+            <a:pPr algn="l">
+              <a:lnSpc>
+                <a:spcPct val="100000"/>
+              </a:lnSpc>
+              <a:spcBef>
+                <a:spcPts val="0"/>
+              </a:spcBef>
+              <a:spcAft>
+                <a:spcPts val="100"/>
+              </a:spcAft>
+            </a:pPr>
+            <a:r>
+              <a:rPr sz="850" b="0">
+                <a:solidFill>
+                  <a:srgbClr val="222222"/>
+                </a:solidFill>
+                <a:latin typeface="맑은 고딕"/>
+              </a:rPr>
+              <a:t>제철소본부 — 현장 엑셀 양식 동일 운영일보, NO.1·2 수전 ×12000 · QR /swhq/{code}/daily</a:t>
+            </a:r>
+          </a:p>
+          <a:p>
+            <a:pPr algn="l">
+              <a:lnSpc>
+                <a:spcPct val="100000"/>
+              </a:lnSpc>
+              <a:spcBef>
+                <a:spcPts val="0"/>
+              </a:spcBef>
+              <a:spcAft>
+                <a:spcPts val="100"/>
+              </a:spcAft>
+            </a:pPr>
+            <a:r>
+              <a:rPr sz="850" b="0">
+                <a:solidFill>
+                  <a:srgbClr val="222222"/>
+                </a:solidFill>
+                <a:latin typeface="맑은 고딕"/>
+              </a:rPr>
+              <a:t>제철회관 — 유틸리티·난방 · QR /swhall/{code}/daily</a:t>
+            </a:r>
+          </a:p>
+          <a:p>
+            <a:pPr algn="l">
+              <a:lnSpc>
+                <a:spcPct val="100000"/>
+              </a:lnSpc>
+              <a:spcBef>
+                <a:spcPts val="0"/>
+              </a:spcBef>
+              <a:spcAft>
+                <a:spcPts val="100"/>
+              </a:spcAft>
+            </a:pPr>
+            <a:r>
+              <a:rPr sz="850" b="0">
+                <a:solidFill>
+                  <a:srgbClr val="222222"/>
+                </a:solidFill>
+                <a:latin typeface="맑은 고딕"/>
+              </a:rPr>
+              <a:t>휴먼센터 — 냉·난방, 전력 배율 전 날짜 공통, 전기실 지침 자동 입력 · QR /hcenter/{code}/daily</a:t>
+            </a:r>
+          </a:p>
+          <a:p>
+            <a:pPr algn="l">
+              <a:lnSpc>
+                <a:spcPct val="100000"/>
+              </a:lnSpc>
+              <a:spcBef>
+                <a:spcPts val="0"/>
+              </a:spcBef>
+              <a:spcAft>
+                <a:spcPts val="100"/>
+              </a:spcAft>
+            </a:pPr>
+            <a:r>
+              <a:rPr sz="850" b="0">
+                <a:solidFill>
+                  <a:srgbClr val="222222"/>
+                </a:solidFill>
+                <a:latin typeface="맑은 고딕"/>
+              </a:rPr>
+              <a:t>어울림체육관 — 전기설비 시간별 G/S 2줄 · QR /egym/{code}/daily</a:t>
+            </a:r>
+          </a:p>
+          <a:p>
+            <a:pPr algn="l">
+              <a:lnSpc>
+                <a:spcPct val="100000"/>
+              </a:lnSpc>
+              <a:spcBef>
+                <a:spcPts val="0"/>
+              </a:spcBef>
+              <a:spcAft>
+                <a:spcPts val="100"/>
+              </a:spcAft>
+            </a:pPr>
+            <a:r>
+              <a:rPr sz="850" b="0">
+                <a:solidFill>
+                  <a:srgbClr val="222222"/>
+                </a:solidFill>
+                <a:latin typeface="맑은 고딕"/>
+              </a:rPr>
+              <a:t>백운생활관 — QR /bdorm/{code}/daily</a:t>
             </a:r>
           </a:p>
         </p:txBody>
@@ -8199,167 +8597,211 @@
               </a:spcAft>
             </a:pPr>
             <a:r>
+              <a:rPr sz="850" b="0">
+                <a:solidFill>
+                  <a:srgbClr val="222222"/>
+                </a:solidFill>
+                <a:latin typeface="맑은 고딕"/>
+              </a:rPr>
+              <a:t>기가타운 — 기계설비·급탕/소화설비 원본 양식, 공조 급기/환기온도 · QR /gtown/{code}/daily</a:t>
+            </a:r>
+          </a:p>
+          <a:p>
+            <a:pPr algn="l">
+              <a:lnSpc>
+                <a:spcPct val="100000"/>
+              </a:lnSpc>
+              <a:spcBef>
+                <a:spcPts val="0"/>
+              </a:spcBef>
+              <a:spcAft>
+                <a:spcPts val="100"/>
+              </a:spcAft>
+            </a:pPr>
+            <a:r>
+              <a:rPr sz="850" b="0">
+                <a:solidFill>
+                  <a:srgbClr val="222222"/>
+                </a:solidFill>
+                <a:latin typeface="맑은 고딕"/>
+              </a:rPr>
+              <a:t>PARK1538 — 전기실 Main VCB(HV-2) 점검표 · QR /p1538/{code}/daily</a:t>
+            </a:r>
+          </a:p>
+          <a:p>
+            <a:pPr algn="l">
+              <a:lnSpc>
+                <a:spcPct val="100000"/>
+              </a:lnSpc>
+              <a:spcBef>
+                <a:spcPts val="0"/>
+              </a:spcBef>
+              <a:spcAft>
+                <a:spcPts val="100"/>
+              </a:spcAft>
+            </a:pPr>
+            <a:r>
+              <a:rPr sz="850" b="0">
+                <a:solidFill>
+                  <a:srgbClr val="222222"/>
+                </a:solidFill>
+                <a:latin typeface="맑은 고딕"/>
+              </a:rPr>
+              <a:t>53서브(53Sub-station) — QR /s53/{code}/daily</a:t>
+            </a:r>
+          </a:p>
+          <a:p>
+            <a:pPr algn="l">
+              <a:lnSpc>
+                <a:spcPct val="100000"/>
+              </a:lnSpc>
+              <a:spcBef>
+                <a:spcPts val="0"/>
+              </a:spcBef>
+              <a:spcAft>
+                <a:spcPts val="100"/>
+              </a:spcAft>
+            </a:pPr>
+            <a:r>
+              <a:rPr sz="850" b="0">
+                <a:solidFill>
+                  <a:srgbClr val="222222"/>
+                </a:solidFill>
+                <a:latin typeface="맑은 고딕"/>
+              </a:rPr>
+              <a:t>백운대 — 전력 일사용량 =(금일-전일)×900 · QR /bdae/{code}/daily</a:t>
+            </a:r>
+          </a:p>
+          <a:p>
+            <a:pPr algn="l">
+              <a:lnSpc>
+                <a:spcPct val="100000"/>
+              </a:lnSpc>
+              <a:spcBef>
+                <a:spcPts val="0"/>
+              </a:spcBef>
+              <a:spcAft>
+                <a:spcPts val="100"/>
+              </a:spcAft>
+            </a:pPr>
+            <a:r>
+              <a:rPr sz="850" b="0">
+                <a:solidFill>
+                  <a:srgbClr val="222222"/>
+                </a:solidFill>
+                <a:latin typeface="맑은 고딕"/>
+              </a:rPr>
+              <a:t>백운쇼핑센터 — 전력 중간+최대+경부하 합산, 중온수 급탕/냉동기 · QR /bshop/{code}/daily</a:t>
+            </a:r>
+          </a:p>
+          <a:p>
+            <a:pPr algn="l">
+              <a:lnSpc>
+                <a:spcPct val="100000"/>
+              </a:lnSpc>
+              <a:spcBef>
+                <a:spcPts val="0"/>
+              </a:spcBef>
+              <a:spcAft>
+                <a:spcPts val="100"/>
+              </a:spcAft>
+            </a:pPr>
+            <a:r>
+              <a:rPr sz="850" b="0">
+                <a:solidFill>
+                  <a:srgbClr val="222222"/>
+                </a:solidFill>
+                <a:latin typeface="맑은 고딕"/>
+              </a:rPr>
+              <a:t>백운아트홀 — QR /bahall/{code}/daily</a:t>
+            </a:r>
+          </a:p>
+          <a:p>
+            <a:pPr algn="l">
+              <a:lnSpc>
+                <a:spcPct val="100000"/>
+              </a:lnSpc>
+              <a:spcBef>
+                <a:spcPts val="0"/>
+              </a:spcBef>
+              <a:spcAft>
+                <a:spcPts val="100"/>
+              </a:spcAft>
+            </a:pPr>
+            <a:r>
+              <a:rPr sz="850" b="0">
+                <a:solidFill>
+                  <a:srgbClr val="222222"/>
+                </a:solidFill>
+                <a:latin typeface="맑은 고딕"/>
+              </a:rPr>
+              <a:t>RIST — 연구동 전력(금일지침 → 연구동 1행 자동기록), 실험동 TR 온도 #1~#3 · QR /rist/{code}/daily</a:t>
+            </a:r>
+          </a:p>
+          <a:p>
+            <a:pPr algn="l">
+              <a:lnSpc>
+                <a:spcPct val="100000"/>
+              </a:lnSpc>
+              <a:spcBef>
+                <a:spcPts val="0"/>
+              </a:spcBef>
+              <a:spcAft>
+                <a:spcPts val="100"/>
+              </a:spcAft>
+            </a:pPr>
+            <a:r>
+              <a:rPr sz="850" b="0">
+                <a:solidFill>
+                  <a:srgbClr val="222222"/>
+                </a:solidFill>
+                <a:latin typeface="맑은 고딕"/>
+              </a:rPr>
+              <a:t>GROUND광양 — QR /ggy/{code}/daily</a:t>
+            </a:r>
+          </a:p>
+          <a:p>
+            <a:pPr algn="l">
+              <a:lnSpc>
+                <a:spcPct val="100000"/>
+              </a:lnSpc>
+              <a:spcBef>
+                <a:spcPts val="0"/>
+              </a:spcBef>
+              <a:spcAft>
+                <a:spcPts val="100"/>
+              </a:spcAft>
+            </a:pPr>
+            <a:r>
               <a:rPr sz="950" b="1">
                 <a:solidFill>
                   <a:srgbClr val="003D7A"/>
                 </a:solidFill>
                 <a:latin typeface="맑은 고딕"/>
               </a:rPr>
-              <a:t>【GPT 대화 /admin/ai-analysis/chat】</a:t>
-            </a:r>
-          </a:p>
-          <a:p>
-            <a:pPr algn="l">
-              <a:lnSpc>
-                <a:spcPct val="100000"/>
-              </a:lnSpc>
-              <a:spcBef>
-                <a:spcPts val="0"/>
-              </a:spcBef>
-              <a:spcAft>
-                <a:spcPts val="100"/>
-              </a:spcAft>
-            </a:pPr>
-            <a:r>
-              <a:rPr sz="850" b="0">
-                <a:solidFill>
-                  <a:srgbClr val="222222"/>
-                </a:solidFill>
-                <a:latin typeface="맑은 고딕"/>
-              </a:rPr>
-              <a:t>세션 최대 20턴 · 의도별 DB섹션 강화조회</a:t>
-            </a:r>
-          </a:p>
-          <a:p>
-            <a:pPr algn="l">
-              <a:lnSpc>
-                <a:spcPct val="100000"/>
-              </a:lnSpc>
-              <a:spcBef>
-                <a:spcPts val="0"/>
-              </a:spcBef>
-              <a:spcAft>
-                <a:spcPts val="100"/>
-              </a:spcAft>
-            </a:pPr>
-            <a:r>
-              <a:rPr sz="850" b="0">
-                <a:solidFill>
-                  <a:srgbClr val="222222"/>
-                </a:solidFill>
-                <a:latin typeface="맑은 고딕"/>
-              </a:rPr>
-              <a:t>GPT응답 + evidence(집계근거) 병행</a:t>
-            </a:r>
-          </a:p>
-          <a:p>
-            <a:pPr algn="l">
-              <a:lnSpc>
-                <a:spcPct val="100000"/>
-              </a:lnSpc>
-              <a:spcBef>
-                <a:spcPts val="0"/>
-              </a:spcBef>
-              <a:spcAft>
-                <a:spcPts val="100"/>
-              </a:spcAft>
-            </a:pPr>
-            <a:r>
-              <a:rPr sz="850" b="0">
-                <a:solidFill>
-                  <a:srgbClr val="222222"/>
-                </a:solidFill>
-                <a:latin typeface="맑은 고딕"/>
-              </a:rPr>
-              <a:t>API키 미설정: 버튼활성+안내박스(비활성 아님)</a:t>
-            </a:r>
-          </a:p>
-          <a:p>
-            <a:pPr algn="l">
-              <a:lnSpc>
-                <a:spcPct val="100000"/>
-              </a:lnSpc>
-              <a:spcBef>
-                <a:spcPts val="0"/>
-              </a:spcBef>
-              <a:spcAft>
-                <a:spcPts val="100"/>
-              </a:spcAft>
-            </a:pPr>
-            <a:r>
-              <a:rPr sz="950" b="1">
-                <a:solidFill>
-                  <a:srgbClr val="003D7A"/>
-                </a:solidFill>
-                <a:latin typeface="맑은 고딕"/>
-              </a:rPr>
-              <a:t>【설정 POST /admin/ai-analysis/ai-settings】</a:t>
-            </a:r>
-          </a:p>
-          <a:p>
-            <a:pPr algn="l">
-              <a:lnSpc>
-                <a:spcPct val="100000"/>
-              </a:lnSpc>
-              <a:spcBef>
-                <a:spcPts val="0"/>
-              </a:spcBef>
-              <a:spcAft>
-                <a:spcPts val="100"/>
-              </a:spcAft>
-            </a:pPr>
-            <a:r>
-              <a:rPr sz="850" b="0">
-                <a:solidFill>
-                  <a:srgbClr val="222222"/>
-                </a:solidFill>
-                <a:latin typeface="맑은 고딕"/>
-              </a:rPr>
-              <a:t>openai_api_key · openai_model(기본 gpt-4o-mini)</a:t>
-            </a:r>
-          </a:p>
-          <a:p>
-            <a:pPr algn="l">
-              <a:lnSpc>
-                <a:spcPct val="100000"/>
-              </a:lnSpc>
-              <a:spcBef>
-                <a:spcPts val="0"/>
-              </a:spcBef>
-              <a:spcAft>
-                <a:spcPts val="100"/>
-              </a:spcAft>
-            </a:pPr>
-            <a:r>
-              <a:rPr sz="850" b="0">
-                <a:solidFill>
-                  <a:srgbClr val="222222"/>
-                </a:solidFill>
-                <a:latin typeface="맑은 고딕"/>
-              </a:rPr>
-              <a:t>내 계정 /admin/account 에서도 동일 키 설정</a:t>
-            </a:r>
-          </a:p>
-          <a:p>
-            <a:pPr algn="l">
-              <a:lnSpc>
-                <a:spcPct val="100000"/>
-              </a:lnSpc>
-              <a:spcBef>
-                <a:spcPts val="0"/>
-              </a:spcBef>
-              <a:spcAft>
-                <a:spcPts val="100"/>
-              </a:spcAft>
-            </a:pPr>
-            <a:r>
-              <a:rPr sz="950" b="1">
-                <a:solidFill>
-                  <a:srgbClr val="003D7A"/>
-                </a:solidFill>
-                <a:latin typeface="맑은 고딕"/>
-              </a:rPr>
-              <a:t>【위험성평가 AI】 동일 API키 공유 · assess·learn 별도 메뉴</a:t>
+              <a:t>【QR 공통】 {BASE}=PUBLIC_BASE_URL · {code}=건물 일지 코드</a:t>
+            </a:r>
+          </a:p>
+          <a:p>
+            <a:pPr algn="l">
+              <a:lnSpc>
+                <a:spcPct val="100000"/>
+              </a:lnSpc>
+              <a:spcBef>
+                <a:spcPts val="0"/>
+              </a:spcBef>
+              <a:spcAft>
+                <a:spcPts val="100"/>
+              </a:spcAft>
+            </a:pPr>
+            <a:r>
+              <a:rPr sz="850" b="0">
+                <a:solidFill>
+                  <a:srgbClr val="222222"/>
+                </a:solidFill>
+                <a:latin typeface="맑은 고딕"/>
+              </a:rPr>
+              <a:t>모든 QR 화면은 로그인 필요 — 현장 모바일도 계정으로 로그인 후 입력</a:t>
             </a:r>
           </a:p>
         </p:txBody>
@@ -8394,7 +8836,1307 @@
                 </a:solidFill>
                 <a:latin typeface="맑은 고딕"/>
               </a:rPr>
-              <a:t>9 / 10</a:t>
+              <a:t>7 / 12</a:t>
+            </a:r>
+          </a:p>
+        </p:txBody>
+      </p:sp>
+    </p:spTree>
+  </p:cSld>
+  <p:clrMapOvr>
+    <a:masterClrMapping/>
+  </p:clrMapOvr>
+</p:sld>
+</file>
+
+<file path=ppt/slides/slide8.xml><?xml version="1.0" encoding="utf-8"?>
+<p:sld xmlns:a="http://schemas.openxmlformats.org/drawingml/2006/main" xmlns:p="http://schemas.openxmlformats.org/presentationml/2006/main" xmlns:r="http://schemas.openxmlformats.org/officeDocument/2006/relationships">
+  <p:cSld>
+    <p:spTree>
+      <p:nvGrpSpPr>
+        <p:cNvPr id="1" name=""/>
+        <p:cNvGrpSpPr/>
+        <p:nvPr/>
+      </p:nvGrpSpPr>
+      <p:grpSpPr/>
+      <p:sp>
+        <p:nvSpPr>
+          <p:cNvPr id="2" name="Rectangle 1"/>
+          <p:cNvSpPr/>
+          <p:nvPr/>
+        </p:nvSpPr>
+        <p:spPr>
+          <a:xfrm>
+            <a:off x="0" y="0"/>
+            <a:ext cx="12191695" cy="73152"/>
+          </a:xfrm>
+          <a:prstGeom prst="rect">
+            <a:avLst/>
+          </a:prstGeom>
+          <a:solidFill>
+            <a:srgbClr val="007ACC"/>
+          </a:solidFill>
+          <a:ln>
+            <a:noFill/>
+          </a:ln>
+        </p:spPr>
+        <p:style>
+          <a:lnRef idx="1">
+            <a:schemeClr val="accent1"/>
+          </a:lnRef>
+          <a:fillRef idx="3">
+            <a:schemeClr val="accent1"/>
+          </a:fillRef>
+          <a:effectRef idx="2">
+            <a:schemeClr val="accent1"/>
+          </a:effectRef>
+          <a:fontRef idx="minor">
+            <a:schemeClr val="lt1"/>
+          </a:fontRef>
+        </p:style>
+        <p:txBody>
+          <a:bodyPr rtlCol="0" anchor="ctr"/>
+          <a:lstStyle/>
+          <a:p>
+            <a:pPr algn="ctr"/>
+          </a:p>
+        </p:txBody>
+      </p:sp>
+      <p:sp>
+        <p:nvSpPr>
+          <p:cNvPr id="3" name="TextBox 2"/>
+          <p:cNvSpPr txBox="1"/>
+          <p:nvPr/>
+        </p:nvSpPr>
+        <p:spPr>
+          <a:xfrm>
+            <a:off x="411480" y="256032"/>
+            <a:ext cx="11338560" cy="502920"/>
+          </a:xfrm>
+          <a:prstGeom prst="rect">
+            <a:avLst/>
+          </a:prstGeom>
+          <a:noFill/>
+        </p:spPr>
+        <p:txBody>
+          <a:bodyPr wrap="none" anchor="ctr">
+            <a:spAutoFit/>
+          </a:bodyPr>
+          <a:lstStyle/>
+          <a:p>
+            <a:pPr algn="l"/>
+            <a:r>
+              <a:rPr sz="1700" b="1">
+                <a:solidFill>
+                  <a:srgbClr val="003D7A"/>
+                </a:solidFill>
+                <a:latin typeface="맑은 고딕"/>
+              </a:rPr>
+              <a:t>07  정비관리 — 업무 흐름 · 역할 · 마감시각</a:t>
+            </a:r>
+          </a:p>
+        </p:txBody>
+      </p:sp>
+      <p:sp>
+        <p:nvSpPr>
+          <p:cNvPr id="4" name="TextBox 3"/>
+          <p:cNvSpPr txBox="1"/>
+          <p:nvPr/>
+        </p:nvSpPr>
+        <p:spPr>
+          <a:xfrm>
+            <a:off x="411480" y="804672"/>
+            <a:ext cx="5623560" cy="5623560"/>
+          </a:xfrm>
+          <a:prstGeom prst="rect">
+            <a:avLst/>
+          </a:prstGeom>
+          <a:noFill/>
+        </p:spPr>
+        <p:txBody>
+          <a:bodyPr wrap="square" lIns="25400" rIns="25400" tIns="12700" bIns="12700">
+            <a:spAutoFit/>
+          </a:bodyPr>
+          <a:lstStyle/>
+          <a:p>
+            <a:pPr algn="l">
+              <a:lnSpc>
+                <a:spcPct val="100000"/>
+              </a:lnSpc>
+              <a:spcBef>
+                <a:spcPts val="0"/>
+              </a:spcBef>
+              <a:spcAft>
+                <a:spcPts val="100"/>
+              </a:spcAft>
+            </a:pPr>
+            <a:r>
+              <a:rPr sz="950" b="1">
+                <a:solidFill>
+                  <a:srgbClr val="003D7A"/>
+                </a:solidFill>
+                <a:latin typeface="맑은 고딕"/>
+              </a:rPr>
+              <a:t>【흐름】</a:t>
+            </a:r>
+          </a:p>
+          <a:p>
+            <a:pPr algn="l">
+              <a:lnSpc>
+                <a:spcPct val="100000"/>
+              </a:lnSpc>
+              <a:spcBef>
+                <a:spcPts val="0"/>
+              </a:spcBef>
+              <a:spcAft>
+                <a:spcPts val="100"/>
+              </a:spcAft>
+            </a:pPr>
+            <a:r>
+              <a:rPr sz="850" b="0">
+                <a:solidFill>
+                  <a:srgbClr val="222222"/>
+                </a:solidFill>
+                <a:latin typeface="맑은 고딕"/>
+              </a:rPr>
+              <a:t>① 정비의뢰(설비관리·정비접수 「＋ 정비의뢰」·설비 QR) — 협력사 지정 필수</a:t>
+            </a:r>
+          </a:p>
+          <a:p>
+            <a:pPr algn="l">
+              <a:lnSpc>
+                <a:spcPct val="100000"/>
+              </a:lnSpc>
+              <a:spcBef>
+                <a:spcPts val="0"/>
+              </a:spcBef>
+              <a:spcAft>
+                <a:spcPts val="100"/>
+              </a:spcAft>
+            </a:pPr>
+            <a:r>
+              <a:rPr sz="850" b="0">
+                <a:solidFill>
+                  <a:srgbClr val="222222"/>
+                </a:solidFill>
+                <a:latin typeface="맑은 고딕"/>
+              </a:rPr>
+              <a:t>② 정비섹션: 업체 지정 확인 · D-1 승인 (매일 16:00 이전까지) · 반려 시 의뢰자에게 알림</a:t>
+            </a:r>
+          </a:p>
+          <a:p>
+            <a:pPr algn="l">
+              <a:lnSpc>
+                <a:spcPct val="100000"/>
+              </a:lnSpc>
+              <a:spcBef>
+                <a:spcPts val="0"/>
+              </a:spcBef>
+              <a:spcAft>
+                <a:spcPts val="100"/>
+              </a:spcAft>
+            </a:pPr>
+            <a:r>
+              <a:rPr sz="850" b="0">
+                <a:solidFill>
+                  <a:srgbClr val="222222"/>
+                </a:solidFill>
+                <a:latin typeface="맑은 고딕"/>
+              </a:rPr>
+              <a:t>③ 협력사: 예정일 입력 · 작업허가 요청 (16:30 이전까지)</a:t>
+            </a:r>
+          </a:p>
+          <a:p>
+            <a:pPr algn="l">
+              <a:lnSpc>
+                <a:spcPct val="100000"/>
+              </a:lnSpc>
+              <a:spcBef>
+                <a:spcPts val="0"/>
+              </a:spcBef>
+              <a:spcAft>
+                <a:spcPts val="100"/>
+              </a:spcAft>
+            </a:pPr>
+            <a:r>
+              <a:rPr sz="850" b="0">
+                <a:solidFill>
+                  <a:srgbClr val="222222"/>
+                </a:solidFill>
+                <a:latin typeface="맑은 고딕"/>
+              </a:rPr>
+              <a:t>④ 시설섹션 관리감독자: 작업허가 승인 (18:00 이전까지) → 진행중</a:t>
+            </a:r>
+          </a:p>
+          <a:p>
+            <a:pPr algn="l">
+              <a:lnSpc>
+                <a:spcPct val="100000"/>
+              </a:lnSpc>
+              <a:spcBef>
+                <a:spcPts val="0"/>
+              </a:spcBef>
+              <a:spcAft>
+                <a:spcPts val="100"/>
+              </a:spcAft>
+            </a:pPr>
+            <a:r>
+              <a:rPr sz="850" b="0">
+                <a:solidFill>
+                  <a:srgbClr val="222222"/>
+                </a:solidFill>
+                <a:latin typeface="맑은 고딕"/>
+              </a:rPr>
+              <a:t>⑤ 작업완료 요청: 협력사 완료 → 완료확인 대기 / 시설섹션 직원 완료처리 → 즉시 완료</a:t>
+            </a:r>
+          </a:p>
+          <a:p>
+            <a:pPr algn="l">
+              <a:lnSpc>
+                <a:spcPct val="100000"/>
+              </a:lnSpc>
+              <a:spcBef>
+                <a:spcPts val="0"/>
+              </a:spcBef>
+              <a:spcAft>
+                <a:spcPts val="100"/>
+              </a:spcAft>
+            </a:pPr>
+            <a:r>
+              <a:rPr sz="850" b="0">
+                <a:solidFill>
+                  <a:srgbClr val="222222"/>
+                </a:solidFill>
+                <a:latin typeface="맑은 고딕"/>
+              </a:rPr>
+              <a:t>⑥ 최종승인: 협력사 완료 건 확정 → 완료 + 정비이력 기록 (반려 시 진행중으로 복귀)</a:t>
+            </a:r>
+          </a:p>
+          <a:p>
+            <a:pPr algn="l">
+              <a:lnSpc>
+                <a:spcPct val="100000"/>
+              </a:lnSpc>
+              <a:spcBef>
+                <a:spcPts val="0"/>
+              </a:spcBef>
+              <a:spcAft>
+                <a:spcPts val="100"/>
+              </a:spcAft>
+            </a:pPr>
+            <a:r>
+              <a:rPr sz="950" b="1">
+                <a:solidFill>
+                  <a:srgbClr val="003D7A"/>
+                </a:solidFill>
+                <a:latin typeface="맑은 고딕"/>
+              </a:rPr>
+              <a:t>【상태】 접수 → 배정 → D-1 승인 → 작업허가 요청 → 진행중 → 완료확인 대기 → 완료</a:t>
+            </a:r>
+          </a:p>
+          <a:p>
+            <a:pPr algn="l">
+              <a:lnSpc>
+                <a:spcPct val="100000"/>
+              </a:lnSpc>
+              <a:spcBef>
+                <a:spcPts val="0"/>
+              </a:spcBef>
+              <a:spcAft>
+                <a:spcPts val="100"/>
+              </a:spcAft>
+            </a:pPr>
+            <a:r>
+              <a:rPr sz="950" b="1">
+                <a:solidFill>
+                  <a:srgbClr val="003D7A"/>
+                </a:solidFill>
+                <a:latin typeface="맑은 고딕"/>
+              </a:rPr>
+              <a:t>【정비의뢰 상세】 작업정보 · 위험등급·잠재위험·안전대책 · 첨부 사진</a:t>
+            </a:r>
+          </a:p>
+          <a:p>
+            <a:pPr algn="l">
+              <a:lnSpc>
+                <a:spcPct val="100000"/>
+              </a:lnSpc>
+              <a:spcBef>
+                <a:spcPts val="0"/>
+              </a:spcBef>
+              <a:spcAft>
+                <a:spcPts val="100"/>
+              </a:spcAft>
+            </a:pPr>
+            <a:r>
+              <a:rPr sz="950" b="1">
+                <a:solidFill>
+                  <a:srgbClr val="003D7A"/>
+                </a:solidFill>
+                <a:latin typeface="맑은 고딕"/>
+              </a:rPr>
+              <a:t>【사진 첨부】 의뢰자·지정 협력사 계정이 첨부·삭제 · 자동 축소(약 500KB) · 1년 보관, 필요 시 영구보관</a:t>
+            </a:r>
+          </a:p>
+        </p:txBody>
+      </p:sp>
+      <p:sp>
+        <p:nvSpPr>
+          <p:cNvPr id="5" name="TextBox 4"/>
+          <p:cNvSpPr txBox="1"/>
+          <p:nvPr/>
+        </p:nvSpPr>
+        <p:spPr>
+          <a:xfrm>
+            <a:off x="6355080" y="804672"/>
+            <a:ext cx="5623560" cy="5623560"/>
+          </a:xfrm>
+          <a:prstGeom prst="rect">
+            <a:avLst/>
+          </a:prstGeom>
+          <a:noFill/>
+        </p:spPr>
+        <p:txBody>
+          <a:bodyPr wrap="square" lIns="25400" rIns="25400" tIns="12700" bIns="12700">
+            <a:spAutoFit/>
+          </a:bodyPr>
+          <a:lstStyle/>
+          <a:p>
+            <a:pPr algn="l">
+              <a:lnSpc>
+                <a:spcPct val="100000"/>
+              </a:lnSpc>
+              <a:spcBef>
+                <a:spcPts val="0"/>
+              </a:spcBef>
+              <a:spcAft>
+                <a:spcPts val="100"/>
+              </a:spcAft>
+            </a:pPr>
+            <a:r>
+              <a:rPr sz="950" b="1">
+                <a:solidFill>
+                  <a:srgbClr val="003D7A"/>
+                </a:solidFill>
+                <a:latin typeface="맑은 고딕"/>
+              </a:rPr>
+              <a:t>【역할별 1페이지 사용 설명서 /admin/maintenance/guide】</a:t>
+            </a:r>
+          </a:p>
+          <a:p>
+            <a:pPr algn="l">
+              <a:lnSpc>
+                <a:spcPct val="100000"/>
+              </a:lnSpc>
+              <a:spcBef>
+                <a:spcPts val="0"/>
+              </a:spcBef>
+              <a:spcAft>
+                <a:spcPts val="100"/>
+              </a:spcAft>
+            </a:pPr>
+            <a:r>
+              <a:rPr sz="850" b="0">
+                <a:solidFill>
+                  <a:srgbClr val="222222"/>
+                </a:solidFill>
+                <a:latin typeface="맑은 고딕"/>
+              </a:rPr>
+              <a:t>정비관리 대시보드 「사용 설명서」 버튼 · 각 화면 도움말의 「전체 사용 설명서 보기」</a:t>
+            </a:r>
+          </a:p>
+          <a:p>
+            <a:pPr algn="l">
+              <a:lnSpc>
+                <a:spcPct val="100000"/>
+              </a:lnSpc>
+              <a:spcBef>
+                <a:spcPts val="0"/>
+              </a:spcBef>
+              <a:spcAft>
+                <a:spcPts val="100"/>
+              </a:spcAft>
+            </a:pPr>
+            <a:r>
+              <a:rPr sz="850" b="0">
+                <a:solidFill>
+                  <a:srgbClr val="222222"/>
+                </a:solidFill>
+                <a:latin typeface="맑은 고딕"/>
+              </a:rPr>
+              <a:t>의뢰자·정비섹션·협력사·시설섹션·최종승인·관리자/조회자 역할별 할 일 + 마감시각</a:t>
+            </a:r>
+          </a:p>
+          <a:p>
+            <a:pPr algn="l">
+              <a:lnSpc>
+                <a:spcPct val="100000"/>
+              </a:lnSpc>
+              <a:spcBef>
+                <a:spcPts val="0"/>
+              </a:spcBef>
+              <a:spcAft>
+                <a:spcPts val="100"/>
+              </a:spcAft>
+            </a:pPr>
+            <a:r>
+              <a:rPr sz="850" b="0">
+                <a:solidFill>
+                  <a:srgbClr val="222222"/>
+                </a:solidFill>
+                <a:latin typeface="맑은 고딕"/>
+              </a:rPr>
+              <a:t>인쇄(A4 1장) 지원 · 권한자는 「수정」으로 화면에서 직접 고친 뒤 저장(기본 설명서로 복원 가능)</a:t>
+            </a:r>
+          </a:p>
+          <a:p>
+            <a:pPr algn="l">
+              <a:lnSpc>
+                <a:spcPct val="100000"/>
+              </a:lnSpc>
+              <a:spcBef>
+                <a:spcPts val="0"/>
+              </a:spcBef>
+              <a:spcAft>
+                <a:spcPts val="100"/>
+              </a:spcAft>
+            </a:pPr>
+            <a:r>
+              <a:rPr sz="950" b="1">
+                <a:solidFill>
+                  <a:srgbClr val="003D7A"/>
+                </a:solidFill>
+                <a:latin typeface="맑은 고딕"/>
+              </a:rPr>
+              <a:t>【권한 요약】</a:t>
+            </a:r>
+          </a:p>
+          <a:p>
+            <a:pPr algn="l">
+              <a:lnSpc>
+                <a:spcPct val="100000"/>
+              </a:lnSpc>
+              <a:spcBef>
+                <a:spcPts val="0"/>
+              </a:spcBef>
+              <a:spcAft>
+                <a:spcPts val="100"/>
+              </a:spcAft>
+            </a:pPr>
+            <a:r>
+              <a:rPr sz="850" b="0">
+                <a:solidFill>
+                  <a:srgbClr val="222222"/>
+                </a:solidFill>
+                <a:latin typeface="맑은 고딕"/>
+              </a:rPr>
+              <a:t>정비섹션: 정비접수/승인·D-1 승인·반려</a:t>
+            </a:r>
+          </a:p>
+          <a:p>
+            <a:pPr algn="l">
+              <a:lnSpc>
+                <a:spcPct val="100000"/>
+              </a:lnSpc>
+              <a:spcBef>
+                <a:spcPts val="0"/>
+              </a:spcBef>
+              <a:spcAft>
+                <a:spcPts val="100"/>
+              </a:spcAft>
+            </a:pPr>
+            <a:r>
+              <a:rPr sz="850" b="0">
+                <a:solidFill>
+                  <a:srgbClr val="222222"/>
+                </a:solidFill>
+                <a:latin typeface="맑은 고딕"/>
+              </a:rPr>
+              <a:t>협력사: 지정된 건만 — 예정일·작업허가 요청·완료 요청·사진</a:t>
+            </a:r>
+          </a:p>
+          <a:p>
+            <a:pPr algn="l">
+              <a:lnSpc>
+                <a:spcPct val="100000"/>
+              </a:lnSpc>
+              <a:spcBef>
+                <a:spcPts val="0"/>
+              </a:spcBef>
+              <a:spcAft>
+                <a:spcPts val="100"/>
+              </a:spcAft>
+            </a:pPr>
+            <a:r>
+              <a:rPr sz="850" b="0">
+                <a:solidFill>
+                  <a:srgbClr val="222222"/>
+                </a:solidFill>
+                <a:latin typeface="맑은 고딕"/>
+              </a:rPr>
+              <a:t>시설섹션: 작업허가 승인(관리감독자) · 직원 완료처리</a:t>
+            </a:r>
+          </a:p>
+          <a:p>
+            <a:pPr algn="l">
+              <a:lnSpc>
+                <a:spcPct val="100000"/>
+              </a:lnSpc>
+              <a:spcBef>
+                <a:spcPts val="0"/>
+              </a:spcBef>
+              <a:spcAft>
+                <a:spcPts val="100"/>
+              </a:spcAft>
+            </a:pPr>
+            <a:r>
+              <a:rPr sz="850" b="0">
+                <a:solidFill>
+                  <a:srgbClr val="222222"/>
+                </a:solidFill>
+                <a:latin typeface="맑은 고딕"/>
+              </a:rPr>
+              <a:t>최종승인: 협력사·외부업체 계정은 불가</a:t>
+            </a:r>
+          </a:p>
+          <a:p>
+            <a:pPr algn="l">
+              <a:lnSpc>
+                <a:spcPct val="100000"/>
+              </a:lnSpc>
+              <a:spcBef>
+                <a:spcPts val="0"/>
+              </a:spcBef>
+              <a:spcAft>
+                <a:spcPts val="100"/>
+              </a:spcAft>
+            </a:pPr>
+            <a:r>
+              <a:rPr sz="850" b="0">
+                <a:solidFill>
+                  <a:srgbClr val="222222"/>
+                </a:solidFill>
+                <a:latin typeface="맑은 고딕"/>
+              </a:rPr>
+              <a:t>조회전용: 모든 화면 조회만</a:t>
+            </a:r>
+          </a:p>
+        </p:txBody>
+      </p:sp>
+      <p:sp>
+        <p:nvSpPr>
+          <p:cNvPr id="6" name="TextBox 5"/>
+          <p:cNvSpPr txBox="1"/>
+          <p:nvPr/>
+        </p:nvSpPr>
+        <p:spPr>
+          <a:xfrm>
+            <a:off x="10058400" y="6537960"/>
+            <a:ext cx="1828800" cy="228600"/>
+          </a:xfrm>
+          <a:prstGeom prst="rect">
+            <a:avLst/>
+          </a:prstGeom>
+          <a:noFill/>
+        </p:spPr>
+        <p:txBody>
+          <a:bodyPr wrap="none">
+            <a:spAutoFit/>
+          </a:bodyPr>
+          <a:lstStyle/>
+          <a:p>
+            <a:pPr algn="r"/>
+            <a:r>
+              <a:rPr sz="750" b="0">
+                <a:solidFill>
+                  <a:srgbClr val="555555"/>
+                </a:solidFill>
+                <a:latin typeface="맑은 고딕"/>
+              </a:rPr>
+              <a:t>8 / 12</a:t>
+            </a:r>
+          </a:p>
+        </p:txBody>
+      </p:sp>
+    </p:spTree>
+  </p:cSld>
+  <p:clrMapOvr>
+    <a:masterClrMapping/>
+  </p:clrMapOvr>
+</p:sld>
+</file>
+
+<file path=ppt/slides/slide9.xml><?xml version="1.0" encoding="utf-8"?>
+<p:sld xmlns:a="http://schemas.openxmlformats.org/drawingml/2006/main" xmlns:p="http://schemas.openxmlformats.org/presentationml/2006/main" xmlns:r="http://schemas.openxmlformats.org/officeDocument/2006/relationships">
+  <p:cSld>
+    <p:spTree>
+      <p:nvGrpSpPr>
+        <p:cNvPr id="1" name=""/>
+        <p:cNvGrpSpPr/>
+        <p:nvPr/>
+      </p:nvGrpSpPr>
+      <p:grpSpPr/>
+      <p:sp>
+        <p:nvSpPr>
+          <p:cNvPr id="2" name="Rectangle 1"/>
+          <p:cNvSpPr/>
+          <p:nvPr/>
+        </p:nvSpPr>
+        <p:spPr>
+          <a:xfrm>
+            <a:off x="0" y="0"/>
+            <a:ext cx="12191695" cy="73152"/>
+          </a:xfrm>
+          <a:prstGeom prst="rect">
+            <a:avLst/>
+          </a:prstGeom>
+          <a:solidFill>
+            <a:srgbClr val="007ACC"/>
+          </a:solidFill>
+          <a:ln>
+            <a:noFill/>
+          </a:ln>
+        </p:spPr>
+        <p:style>
+          <a:lnRef idx="1">
+            <a:schemeClr val="accent1"/>
+          </a:lnRef>
+          <a:fillRef idx="3">
+            <a:schemeClr val="accent1"/>
+          </a:fillRef>
+          <a:effectRef idx="2">
+            <a:schemeClr val="accent1"/>
+          </a:effectRef>
+          <a:fontRef idx="minor">
+            <a:schemeClr val="lt1"/>
+          </a:fontRef>
+        </p:style>
+        <p:txBody>
+          <a:bodyPr rtlCol="0" anchor="ctr"/>
+          <a:lstStyle/>
+          <a:p>
+            <a:pPr algn="ctr"/>
+          </a:p>
+        </p:txBody>
+      </p:sp>
+      <p:sp>
+        <p:nvSpPr>
+          <p:cNvPr id="3" name="TextBox 2"/>
+          <p:cNvSpPr txBox="1"/>
+          <p:nvPr/>
+        </p:nvSpPr>
+        <p:spPr>
+          <a:xfrm>
+            <a:off x="411480" y="256032"/>
+            <a:ext cx="11338560" cy="502920"/>
+          </a:xfrm>
+          <a:prstGeom prst="rect">
+            <a:avLst/>
+          </a:prstGeom>
+          <a:noFill/>
+        </p:spPr>
+        <p:txBody>
+          <a:bodyPr wrap="none" anchor="ctr">
+            <a:spAutoFit/>
+          </a:bodyPr>
+          <a:lstStyle/>
+          <a:p>
+            <a:pPr algn="l"/>
+            <a:r>
+              <a:rPr sz="1700" b="1">
+                <a:solidFill>
+                  <a:srgbClr val="003D7A"/>
+                </a:solidFill>
+                <a:latin typeface="맑은 고딕"/>
+              </a:rPr>
+              <a:t>08  정비관리 — 화면별 사용법</a:t>
+            </a:r>
+          </a:p>
+        </p:txBody>
+      </p:sp>
+      <p:sp>
+        <p:nvSpPr>
+          <p:cNvPr id="4" name="TextBox 3"/>
+          <p:cNvSpPr txBox="1"/>
+          <p:nvPr/>
+        </p:nvSpPr>
+        <p:spPr>
+          <a:xfrm>
+            <a:off x="411480" y="804672"/>
+            <a:ext cx="5623560" cy="5623560"/>
+          </a:xfrm>
+          <a:prstGeom prst="rect">
+            <a:avLst/>
+          </a:prstGeom>
+          <a:noFill/>
+        </p:spPr>
+        <p:txBody>
+          <a:bodyPr wrap="square" lIns="25400" rIns="25400" tIns="12700" bIns="12700">
+            <a:spAutoFit/>
+          </a:bodyPr>
+          <a:lstStyle/>
+          <a:p>
+            <a:pPr algn="l">
+              <a:lnSpc>
+                <a:spcPct val="100000"/>
+              </a:lnSpc>
+              <a:spcBef>
+                <a:spcPts val="0"/>
+              </a:spcBef>
+              <a:spcAft>
+                <a:spcPts val="100"/>
+              </a:spcAft>
+            </a:pPr>
+            <a:r>
+              <a:rPr sz="950" b="1">
+                <a:solidFill>
+                  <a:srgbClr val="003D7A"/>
+                </a:solidFill>
+                <a:latin typeface="맑은 고딕"/>
+              </a:rPr>
+              <a:t>【정비관리 대시보드 /admin/maintenance/dashboard】 정비 현황 한눈에 · 우측 상단 설정·사용 설명서</a:t>
+            </a:r>
+          </a:p>
+          <a:p>
+            <a:pPr algn="l">
+              <a:lnSpc>
+                <a:spcPct val="100000"/>
+              </a:lnSpc>
+              <a:spcBef>
+                <a:spcPts val="0"/>
+              </a:spcBef>
+              <a:spcAft>
+                <a:spcPts val="100"/>
+              </a:spcAft>
+            </a:pPr>
+            <a:r>
+              <a:rPr sz="950" b="1">
+                <a:solidFill>
+                  <a:srgbClr val="003D7A"/>
+                </a:solidFill>
+                <a:latin typeface="맑은 고딕"/>
+              </a:rPr>
+              <a:t>【정비접수/승인 /admin/work-orders】</a:t>
+            </a:r>
+          </a:p>
+          <a:p>
+            <a:pPr algn="l">
+              <a:lnSpc>
+                <a:spcPct val="100000"/>
+              </a:lnSpc>
+              <a:spcBef>
+                <a:spcPts val="0"/>
+              </a:spcBef>
+              <a:spcAft>
+                <a:spcPts val="100"/>
+              </a:spcAft>
+            </a:pPr>
+            <a:r>
+              <a:rPr sz="850" b="0">
+                <a:solidFill>
+                  <a:srgbClr val="222222"/>
+                </a:solidFill>
+                <a:latin typeface="맑은 고딕"/>
+              </a:rPr>
+              <a:t>상단 현황 카드(접수·반려·승인대기 등) 클릭 → 해당 목록 · 검색 필터(협력사 '전체' 포함) · 표</a:t>
+            </a:r>
+          </a:p>
+          <a:p>
+            <a:pPr algn="l">
+              <a:lnSpc>
+                <a:spcPct val="100000"/>
+              </a:lnSpc>
+              <a:spcBef>
+                <a:spcPts val="0"/>
+              </a:spcBef>
+              <a:spcAft>
+                <a:spcPts val="100"/>
+              </a:spcAft>
+            </a:pPr>
+            <a:r>
+              <a:rPr sz="850" b="0">
+                <a:solidFill>
+                  <a:srgbClr val="222222"/>
+                </a:solidFill>
+                <a:latin typeface="맑은 고딕"/>
+              </a:rPr>
+              <a:t>「＋ 정비의뢰」(협력사 필수, 지정 시 D-1 안전내용 표시·수정) · D-1 승인/일괄 승인 · 반려 · 엑셀</a:t>
+            </a:r>
+          </a:p>
+          <a:p>
+            <a:pPr algn="l">
+              <a:lnSpc>
+                <a:spcPct val="100000"/>
+              </a:lnSpc>
+              <a:spcBef>
+                <a:spcPts val="0"/>
+              </a:spcBef>
+              <a:spcAft>
+                <a:spcPts val="100"/>
+              </a:spcAft>
+            </a:pPr>
+            <a:r>
+              <a:rPr sz="950" b="1">
+                <a:solidFill>
+                  <a:srgbClr val="003D7A"/>
+                </a:solidFill>
+                <a:latin typeface="맑은 고딕"/>
+              </a:rPr>
+              <a:t>【정비 List(D-1) /admin/d1】</a:t>
+            </a:r>
+          </a:p>
+          <a:p>
+            <a:pPr algn="l">
+              <a:lnSpc>
+                <a:spcPct val="100000"/>
+              </a:lnSpc>
+              <a:spcBef>
+                <a:spcPts val="0"/>
+              </a:spcBef>
+              <a:spcAft>
+                <a:spcPts val="100"/>
+              </a:spcAft>
+            </a:pPr>
+            <a:r>
+              <a:rPr sz="850" b="0">
+                <a:solidFill>
+                  <a:srgbClr val="222222"/>
+                </a:solidFill>
+                <a:latin typeface="맑은 고딕"/>
+              </a:rPr>
+              <a:t>보드: 전체 · 정비접수 · 오늘 · 내일 · 정비 예정 · 정비완료 (20건 페이지 넘김)</a:t>
+            </a:r>
+          </a:p>
+          <a:p>
+            <a:pPr algn="l">
+              <a:lnSpc>
+                <a:spcPct val="100000"/>
+              </a:lnSpc>
+              <a:spcBef>
+                <a:spcPts val="0"/>
+              </a:spcBef>
+              <a:spcAft>
+                <a:spcPts val="100"/>
+              </a:spcAft>
+            </a:pPr>
+            <a:r>
+              <a:rPr sz="850" b="0">
+                <a:solidFill>
+                  <a:srgbClr val="222222"/>
+                </a:solidFill>
+                <a:latin typeface="맑은 고딕"/>
+              </a:rPr>
+              <a:t>협력사별 사이드바 하위메뉴(포스코와이드 숨김) · 협력사 미선택 화면에서도 건수 클릭 → 목록</a:t>
+            </a:r>
+          </a:p>
+          <a:p>
+            <a:pPr algn="l">
+              <a:lnSpc>
+                <a:spcPct val="100000"/>
+              </a:lnSpc>
+              <a:spcBef>
+                <a:spcPts val="0"/>
+              </a:spcBef>
+              <a:spcAft>
+                <a:spcPts val="100"/>
+              </a:spcAft>
+            </a:pPr>
+            <a:r>
+              <a:rPr sz="950" b="1">
+                <a:solidFill>
+                  <a:srgbClr val="003D7A"/>
+                </a:solidFill>
+                <a:latin typeface="맑은 고딕"/>
+              </a:rPr>
+              <a:t>【작업허가/승인 /admin/facility-section】</a:t>
+            </a:r>
+          </a:p>
+          <a:p>
+            <a:pPr algn="l">
+              <a:lnSpc>
+                <a:spcPct val="100000"/>
+              </a:lnSpc>
+              <a:spcBef>
+                <a:spcPts val="0"/>
+              </a:spcBef>
+              <a:spcAft>
+                <a:spcPts val="100"/>
+              </a:spcAft>
+            </a:pPr>
+            <a:r>
+              <a:rPr sz="850" b="0">
+                <a:solidFill>
+                  <a:srgbClr val="222222"/>
+                </a:solidFill>
+                <a:latin typeface="맑은 고딕"/>
+              </a:rPr>
+              <a:t>보드: 하루전 · 당일 · 예정 · 전체 · 작업허가/일괄 승인 · 협력사별 위험등급 기본값 · 내 건물</a:t>
+            </a:r>
+          </a:p>
+          <a:p>
+            <a:pPr algn="l">
+              <a:lnSpc>
+                <a:spcPct val="100000"/>
+              </a:lnSpc>
+              <a:spcBef>
+                <a:spcPts val="0"/>
+              </a:spcBef>
+              <a:spcAft>
+                <a:spcPts val="100"/>
+              </a:spcAft>
+            </a:pPr>
+            <a:r>
+              <a:rPr sz="950" b="1">
+                <a:solidFill>
+                  <a:srgbClr val="003D7A"/>
+                </a:solidFill>
+                <a:latin typeface="맑은 고딕"/>
+              </a:rPr>
+              <a:t>【정비완료 최종승인 /admin/maintenance-final-approvals】</a:t>
+            </a:r>
+          </a:p>
+          <a:p>
+            <a:pPr algn="l">
+              <a:lnSpc>
+                <a:spcPct val="100000"/>
+              </a:lnSpc>
+              <a:spcBef>
+                <a:spcPts val="0"/>
+              </a:spcBef>
+              <a:spcAft>
+                <a:spcPts val="100"/>
+              </a:spcAft>
+            </a:pPr>
+            <a:r>
+              <a:rPr sz="850" b="0">
+                <a:solidFill>
+                  <a:srgbClr val="222222"/>
+                </a:solidFill>
+                <a:latin typeface="맑은 고딕"/>
+              </a:rPr>
+              <a:t>건별 최종승인 · 「선택 항목 일괄 최종승인」 · 반려(진행중 복귀) · 엑셀</a:t>
+            </a:r>
+          </a:p>
+        </p:txBody>
+      </p:sp>
+      <p:sp>
+        <p:nvSpPr>
+          <p:cNvPr id="5" name="TextBox 4"/>
+          <p:cNvSpPr txBox="1"/>
+          <p:nvPr/>
+        </p:nvSpPr>
+        <p:spPr>
+          <a:xfrm>
+            <a:off x="6355080" y="804672"/>
+            <a:ext cx="5623560" cy="5623560"/>
+          </a:xfrm>
+          <a:prstGeom prst="rect">
+            <a:avLst/>
+          </a:prstGeom>
+          <a:noFill/>
+        </p:spPr>
+        <p:txBody>
+          <a:bodyPr wrap="square" lIns="25400" rIns="25400" tIns="12700" bIns="12700">
+            <a:spAutoFit/>
+          </a:bodyPr>
+          <a:lstStyle/>
+          <a:p>
+            <a:pPr algn="l">
+              <a:lnSpc>
+                <a:spcPct val="100000"/>
+              </a:lnSpc>
+              <a:spcBef>
+                <a:spcPts val="0"/>
+              </a:spcBef>
+              <a:spcAft>
+                <a:spcPts val="100"/>
+              </a:spcAft>
+            </a:pPr>
+            <a:r>
+              <a:rPr sz="950" b="1">
+                <a:solidFill>
+                  <a:srgbClr val="003D7A"/>
+                </a:solidFill>
+                <a:latin typeface="맑은 고딕"/>
+              </a:rPr>
+              <a:t>【정비실적(변동비) /admin/maintenance-performance】 월별 실적 파일 업로드·다운로드·ZIP</a:t>
+            </a:r>
+          </a:p>
+          <a:p>
+            <a:pPr algn="l">
+              <a:lnSpc>
+                <a:spcPct val="100000"/>
+              </a:lnSpc>
+              <a:spcBef>
+                <a:spcPts val="0"/>
+              </a:spcBef>
+              <a:spcAft>
+                <a:spcPts val="100"/>
+              </a:spcAft>
+            </a:pPr>
+            <a:r>
+              <a:rPr sz="950" b="1">
+                <a:solidFill>
+                  <a:srgbClr val="003D7A"/>
+                </a:solidFill>
+                <a:latin typeface="맑은 고딕"/>
+              </a:rPr>
+              <a:t>【가로등 /admin/streetlamp/requests】 접수 목록·상태·삭제·Export · QR ZIP · SMS/메일 설정</a:t>
+            </a:r>
+          </a:p>
+          <a:p>
+            <a:pPr algn="l">
+              <a:lnSpc>
+                <a:spcPct val="100000"/>
+              </a:lnSpc>
+              <a:spcBef>
+                <a:spcPts val="0"/>
+              </a:spcBef>
+              <a:spcAft>
+                <a:spcPts val="100"/>
+              </a:spcAft>
+            </a:pPr>
+            <a:r>
+              <a:rPr sz="850" b="0">
+                <a:solidFill>
+                  <a:srgbClr val="222222"/>
+                </a:solidFill>
+                <a:latin typeface="맑은 고딕"/>
+              </a:rPr>
+              <a:t>QR {BASE}/lamp/{코드} → 유형선택·접수(로그인 필요) · 일일 보고 cron(보안키)</a:t>
+            </a:r>
+          </a:p>
+          <a:p>
+            <a:pPr algn="l">
+              <a:lnSpc>
+                <a:spcPct val="100000"/>
+              </a:lnSpc>
+              <a:spcBef>
+                <a:spcPts val="0"/>
+              </a:spcBef>
+              <a:spcAft>
+                <a:spcPts val="100"/>
+              </a:spcAft>
+            </a:pPr>
+            <a:r>
+              <a:rPr sz="950" b="1">
+                <a:solidFill>
+                  <a:srgbClr val="003D7A"/>
+                </a:solidFill>
+                <a:latin typeface="맑은 고딕"/>
+              </a:rPr>
+              <a:t>【정비관리 설정 /admin/maintenance/settings】</a:t>
+            </a:r>
+          </a:p>
+          <a:p>
+            <a:pPr algn="l">
+              <a:lnSpc>
+                <a:spcPct val="100000"/>
+              </a:lnSpc>
+              <a:spcBef>
+                <a:spcPts val="0"/>
+              </a:spcBef>
+              <a:spcAft>
+                <a:spcPts val="100"/>
+              </a:spcAft>
+            </a:pPr>
+            <a:r>
+              <a:rPr sz="850" b="0">
+                <a:solidFill>
+                  <a:srgbClr val="222222"/>
+                </a:solidFill>
+                <a:latin typeface="맑은 고딕"/>
+              </a:rPr>
+              <a:t>협력사 접수 정비의뢰 일일 메일: 설정 시각 기준 집계 구간 · 본문 표 · 안내 문구 · 미리보기·테스트 발송</a:t>
+            </a:r>
+          </a:p>
+          <a:p>
+            <a:pPr algn="l">
+              <a:lnSpc>
+                <a:spcPct val="100000"/>
+              </a:lnSpc>
+              <a:spcBef>
+                <a:spcPts val="0"/>
+              </a:spcBef>
+              <a:spcAft>
+                <a:spcPts val="100"/>
+              </a:spcAft>
+            </a:pPr>
+            <a:r>
+              <a:rPr sz="850" b="0">
+                <a:solidFill>
+                  <a:srgbClr val="222222"/>
+                </a:solidFill>
+                <a:latin typeface="맑은 고딕"/>
+              </a:rPr>
+              <a:t>다음날 작업 예정 메일: 하루 전 자동 발송 · 미리보기·테스트 발송</a:t>
+            </a:r>
+          </a:p>
+          <a:p>
+            <a:pPr algn="l">
+              <a:lnSpc>
+                <a:spcPct val="100000"/>
+              </a:lnSpc>
+              <a:spcBef>
+                <a:spcPts val="0"/>
+              </a:spcBef>
+              <a:spcAft>
+                <a:spcPts val="100"/>
+              </a:spcAft>
+            </a:pPr>
+            <a:r>
+              <a:rPr sz="850" b="0">
+                <a:solidFill>
+                  <a:srgbClr val="222222"/>
+                </a:solidFill>
+                <a:latin typeface="맑은 고딕"/>
+              </a:rPr>
+              <a:t>공식 발신 계정 연결(SMTP) · 발송 테스트</a:t>
+            </a:r>
+          </a:p>
+          <a:p>
+            <a:pPr algn="l">
+              <a:lnSpc>
+                <a:spcPct val="100000"/>
+              </a:lnSpc>
+              <a:spcBef>
+                <a:spcPts val="0"/>
+              </a:spcBef>
+              <a:spcAft>
+                <a:spcPts val="100"/>
+              </a:spcAft>
+            </a:pPr>
+            <a:r>
+              <a:rPr sz="950" b="1">
+                <a:solidFill>
+                  <a:srgbClr val="003D7A"/>
+                </a:solidFill>
+                <a:latin typeface="맑은 고딕"/>
+              </a:rPr>
+              <a:t>【표시 범위】 계정별 나의 협력사 · 내 건물 적용</a:t>
+            </a:r>
+          </a:p>
+          <a:p>
+            <a:pPr algn="l">
+              <a:lnSpc>
+                <a:spcPct val="100000"/>
+              </a:lnSpc>
+              <a:spcBef>
+                <a:spcPts val="0"/>
+              </a:spcBef>
+              <a:spcAft>
+                <a:spcPts val="100"/>
+              </a:spcAft>
+            </a:pPr>
+            <a:r>
+              <a:rPr sz="950" b="1">
+                <a:solidFill>
+                  <a:srgbClr val="003D7A"/>
+                </a:solidFill>
+                <a:latin typeface="맑은 고딕"/>
+              </a:rPr>
+              <a:t>【화면 전환】 「기존 화면으로」 버튼은 시스템관리자에게만 표시</a:t>
+            </a:r>
+          </a:p>
+          <a:p>
+            <a:pPr algn="l">
+              <a:lnSpc>
+                <a:spcPct val="100000"/>
+              </a:lnSpc>
+              <a:spcBef>
+                <a:spcPts val="0"/>
+              </a:spcBef>
+              <a:spcAft>
+                <a:spcPts val="100"/>
+              </a:spcAft>
+            </a:pPr>
+            <a:r>
+              <a:rPr sz="950" b="1">
+                <a:solidFill>
+                  <a:srgbClr val="003D7A"/>
+                </a:solidFill>
+                <a:latin typeface="맑은 고딕"/>
+              </a:rPr>
+              <a:t>【운영 팁】</a:t>
+            </a:r>
+          </a:p>
+          <a:p>
+            <a:pPr algn="l">
+              <a:lnSpc>
+                <a:spcPct val="100000"/>
+              </a:lnSpc>
+              <a:spcBef>
+                <a:spcPts val="0"/>
+              </a:spcBef>
+              <a:spcAft>
+                <a:spcPts val="100"/>
+              </a:spcAft>
+            </a:pPr>
+            <a:r>
+              <a:rPr sz="850" b="0">
+                <a:solidFill>
+                  <a:srgbClr val="222222"/>
+                </a:solidFill>
+                <a:latin typeface="맑은 고딕"/>
+              </a:rPr>
+              <a:t>· 긴급 건이 목록 상단에 먼저 표시</a:t>
+            </a:r>
+          </a:p>
+          <a:p>
+            <a:pPr algn="l">
+              <a:lnSpc>
+                <a:spcPct val="100000"/>
+              </a:lnSpc>
+              <a:spcBef>
+                <a:spcPts val="0"/>
+              </a:spcBef>
+              <a:spcAft>
+                <a:spcPts val="100"/>
+              </a:spcAft>
+            </a:pPr>
+            <a:r>
+              <a:rPr sz="850" b="0">
+                <a:solidFill>
+                  <a:srgbClr val="222222"/>
+                </a:solidFill>
+                <a:latin typeface="맑은 고딕"/>
+              </a:rPr>
+              <a:t>· 협력사 미지정 기존 건은 그대로 유지 — 신규 의뢰부터 필수</a:t>
+            </a:r>
+          </a:p>
+        </p:txBody>
+      </p:sp>
+      <p:sp>
+        <p:nvSpPr>
+          <p:cNvPr id="6" name="TextBox 5"/>
+          <p:cNvSpPr txBox="1"/>
+          <p:nvPr/>
+        </p:nvSpPr>
+        <p:spPr>
+          <a:xfrm>
+            <a:off x="10058400" y="6537960"/>
+            <a:ext cx="1828800" cy="228600"/>
+          </a:xfrm>
+          <a:prstGeom prst="rect">
+            <a:avLst/>
+          </a:prstGeom>
+          <a:noFill/>
+        </p:spPr>
+        <p:txBody>
+          <a:bodyPr wrap="none">
+            <a:spAutoFit/>
+          </a:bodyPr>
+          <a:lstStyle/>
+          <a:p>
+            <a:pPr algn="r"/>
+            <a:r>
+              <a:rPr sz="750" b="0">
+                <a:solidFill>
+                  <a:srgbClr val="555555"/>
+                </a:solidFill>
+                <a:latin typeface="맑은 고딕"/>
+              </a:rPr>
+              <a:t>9 / 12</a:t>
             </a:r>
           </a:p>
         </p:txBody>
